--- a/docs/pptx/auc3/jx-auc3-linsubhr-sens-anyhosp.pptx
+++ b/docs/pptx/auc3/jx-auc3-linsubhr-sens-anyhosp.pptx
@@ -5339,7 +5339,7 @@
           <p:spPr>
             <a:xfrm>
               <a:off x="817517" y="1896563"/>
-              <a:ext cx="6169365" cy="82021"/>
+              <a:ext cx="6833128" cy="82021"/>
             </a:xfrm>
             <a:prstGeom prst="rect">
               <a:avLst/>
@@ -5371,7 +5371,7 @@
                   <a:latin typeface="Helvetica"/>
                   <a:cs typeface="Helvetica"/>
                 </a:rPr>
-                <a:t>subHR per 0.1 ratio decline: 1.14 (1.03-1.26), p = 0.015  |  per IQR decline (Δ = 0.28): 1.43 (1.07-1.90)  |  IQR: [0.70, 0.98]</a:t>
+                <a:t>subHR per 0.1 ratio decline: 1.14 (1.03-1.26), p_Bonf = 0.087 (n = 6)  |  per IQR decline (Δ = 0.28): 1.43 (1.07-1.90)  |  IQR: [0.70, 0.98]</a:t>
               </a:r>
             </a:p>
           </p:txBody>

--- a/docs/pptx/auc3/jx-auc3-linsubhr-sens-anyhosp.pptx
+++ b/docs/pptx/auc3/jx-auc3-linsubhr-sens-anyhosp.pptx
@@ -5062,8 +5062,8 @@
           </p:nvSpPr>
           <p:spPr>
             <a:xfrm>
-              <a:off x="2137719" y="5785772"/>
-              <a:ext cx="155356" cy="80101"/>
+              <a:off x="2134610" y="5785772"/>
+              <a:ext cx="161574" cy="80101"/>
             </a:xfrm>
             <a:prstGeom prst="rect">
               <a:avLst/>
@@ -5095,7 +5095,7 @@
                   <a:latin typeface="Helvetica"/>
                   <a:cs typeface="Helvetica"/>
                 </a:rPr>
-                <a:t>0.6</a:t>
+                <a:t>-40</a:t>
               </a:r>
             </a:p>
           </p:txBody>
@@ -5108,8 +5108,8 @@
           </p:nvSpPr>
           <p:spPr>
             <a:xfrm>
-              <a:off x="3878840" y="5785772"/>
-              <a:ext cx="155356" cy="80101"/>
+              <a:off x="3875731" y="5785772"/>
+              <a:ext cx="161574" cy="80101"/>
             </a:xfrm>
             <a:prstGeom prst="rect">
               <a:avLst/>
@@ -5141,7 +5141,7 @@
                   <a:latin typeface="Helvetica"/>
                   <a:cs typeface="Helvetica"/>
                 </a:rPr>
-                <a:t>0.8</a:t>
+                <a:t>-20</a:t>
               </a:r>
             </a:p>
           </p:txBody>
@@ -5154,8 +5154,8 @@
           </p:nvSpPr>
           <p:spPr>
             <a:xfrm>
-              <a:off x="5619961" y="5785772"/>
-              <a:ext cx="155356" cy="80101"/>
+              <a:off x="5666549" y="5785772"/>
+              <a:ext cx="62179" cy="80101"/>
             </a:xfrm>
             <a:prstGeom prst="rect">
               <a:avLst/>
@@ -5187,7 +5187,7 @@
                   <a:latin typeface="Helvetica"/>
                   <a:cs typeface="Helvetica"/>
                 </a:rPr>
-                <a:t>1.0</a:t>
+                <a:t>0</a:t>
               </a:r>
             </a:p>
           </p:txBody>
@@ -5200,8 +5200,8 @@
           </p:nvSpPr>
           <p:spPr>
             <a:xfrm>
-              <a:off x="7361081" y="5785772"/>
-              <a:ext cx="155356" cy="80101"/>
+              <a:off x="7376580" y="5785772"/>
+              <a:ext cx="124358" cy="80101"/>
             </a:xfrm>
             <a:prstGeom prst="rect">
               <a:avLst/>
@@ -5233,7 +5233,7 @@
                   <a:latin typeface="Helvetica"/>
                   <a:cs typeface="Helvetica"/>
                 </a:rPr>
-                <a:t>1.2</a:t>
+                <a:t>20</a:t>
               </a:r>
             </a:p>
           </p:txBody>
@@ -5246,8 +5246,8 @@
           </p:nvSpPr>
           <p:spPr>
             <a:xfrm>
-              <a:off x="2691419" y="5925448"/>
-              <a:ext cx="4051889" cy="100218"/>
+              <a:off x="1561815" y="5925448"/>
+              <a:ext cx="6311097" cy="100218"/>
             </a:xfrm>
             <a:prstGeom prst="rect">
               <a:avLst/>
@@ -5279,7 +5279,7 @@
                   <a:latin typeface="Helvetica"/>
                   <a:cs typeface="Helvetica"/>
                 </a:rPr>
-                <a:t>Sensitivity eGFR Ratio (CKD-EPI 2012 CysC / CKD-EPI 2021 Cr)</a:t>
+                <a:t>Sensitivity eGFR Difference (%): 100 × (CKD-EPI 2012 CysC − CKD-EPI 2021 Cr) / CKD-EPI 2021 Cr</a:t>
               </a:r>
             </a:p>
           </p:txBody>
@@ -5339,7 +5339,7 @@
           <p:spPr>
             <a:xfrm>
               <a:off x="817517" y="1896563"/>
-              <a:ext cx="6833128" cy="82021"/>
+              <a:ext cx="6959864" cy="82021"/>
             </a:xfrm>
             <a:prstGeom prst="rect">
               <a:avLst/>
@@ -5371,7 +5371,7 @@
                   <a:latin typeface="Helvetica"/>
                   <a:cs typeface="Helvetica"/>
                 </a:rPr>
-                <a:t>subHR per 0.1 ratio decline: 1.14 (1.03-1.26), p_Bonf = 0.087 (n = 6)  |  per IQR decline (Δ = 0.28): 1.43 (1.07-1.90)  |  IQR: [0.70, 0.98]</a:t>
+                <a:t>subHR per 10 % decline: 1.14 (1.03-1.26), p_Bonf = 0.087 (n = 6)  |  per IQR decline (Δ = 28.1 %): 1.43 (1.07-1.90)  |  IQR: [-30.1, -2.1] %</a:t>
               </a:r>
             </a:p>
           </p:txBody>

--- a/docs/pptx/auc3/jx-auc3-linsubhr-sens-anyhosp.pptx
+++ b/docs/pptx/auc3/jx-auc3-linsubhr-sens-anyhosp.pptx
@@ -2265,34 +2265,26 @@
         </p:sp>
         <p:sp>
           <p:nvSpPr>
-            <p:cNvPr id="4" name="pl4"/>
+            <p:cNvPr id="4" name="rc4"/>
             <p:cNvSpPr/>
             <p:nvPr/>
           </p:nvSpPr>
           <p:spPr>
             <a:xfrm>
-              <a:off x="817517" y="5142518"/>
-              <a:ext cx="7799693" cy="0"/>
+              <a:off x="457200" y="1600200"/>
+              <a:ext cx="8229600" cy="4525962"/>
             </a:xfrm>
-            <a:custGeom>
+            <a:prstGeom prst="rect">
               <a:avLst/>
-              <a:pathLst>
-                <a:path w="7799693" h="0">
-                  <a:moveTo>
-                    <a:pt x="0" y="0"/>
-                  </a:moveTo>
-                  <a:lnTo>
-                    <a:pt x="7799693" y="0"/>
-                  </a:lnTo>
-                  <a:lnTo>
-                    <a:pt x="7799693" y="0"/>
-                  </a:lnTo>
-                </a:path>
-              </a:pathLst>
-            </a:custGeom>
-            <a:ln w="6775" cap="flat">
+            </a:prstGeom>
+            <a:solidFill>
+              <a:srgbClr val="FFFFFF">
+                <a:alpha val="100000"/>
+              </a:srgbClr>
+            </a:solidFill>
+            <a:ln w="13550" cap="rnd">
               <a:solidFill>
-                <a:srgbClr val="EBEBEB">
+                <a:srgbClr val="FFFFFF">
                   <a:alpha val="100000"/>
                 </a:srgbClr>
               </a:solidFill>
@@ -2314,21 +2306,21 @@
           </p:nvSpPr>
           <p:spPr>
             <a:xfrm>
-              <a:off x="817517" y="4313054"/>
-              <a:ext cx="7799693" cy="0"/>
+              <a:off x="887106" y="3250627"/>
+              <a:ext cx="7660515" cy="0"/>
             </a:xfrm>
             <a:custGeom>
               <a:avLst/>
               <a:pathLst>
-                <a:path w="7799693" h="0">
+                <a:path w="7660515" h="0">
                   <a:moveTo>
                     <a:pt x="0" y="0"/>
                   </a:moveTo>
                   <a:lnTo>
-                    <a:pt x="7799693" y="0"/>
-                  </a:lnTo>
-                  <a:lnTo>
-                    <a:pt x="7799693" y="0"/>
+                    <a:pt x="7660515" y="0"/>
+                  </a:lnTo>
+                  <a:lnTo>
+                    <a:pt x="7660515" y="0"/>
                   </a:lnTo>
                 </a:path>
               </a:pathLst>
@@ -2357,21 +2349,21 @@
           </p:nvSpPr>
           <p:spPr>
             <a:xfrm>
-              <a:off x="817517" y="3483591"/>
-              <a:ext cx="7799693" cy="0"/>
+              <a:off x="887106" y="2951293"/>
+              <a:ext cx="7660515" cy="0"/>
             </a:xfrm>
             <a:custGeom>
               <a:avLst/>
               <a:pathLst>
-                <a:path w="7799693" h="0">
+                <a:path w="7660515" h="0">
                   <a:moveTo>
                     <a:pt x="0" y="0"/>
                   </a:moveTo>
                   <a:lnTo>
-                    <a:pt x="7799693" y="0"/>
-                  </a:lnTo>
-                  <a:lnTo>
-                    <a:pt x="7799693" y="0"/>
+                    <a:pt x="7660515" y="0"/>
+                  </a:lnTo>
+                  <a:lnTo>
+                    <a:pt x="7660515" y="0"/>
                   </a:lnTo>
                 </a:path>
               </a:pathLst>
@@ -2400,21 +2392,21 @@
           </p:nvSpPr>
           <p:spPr>
             <a:xfrm>
-              <a:off x="817517" y="2654127"/>
-              <a:ext cx="7799693" cy="0"/>
+              <a:off x="887106" y="2651959"/>
+              <a:ext cx="7660515" cy="0"/>
             </a:xfrm>
             <a:custGeom>
               <a:avLst/>
               <a:pathLst>
-                <a:path w="7799693" h="0">
+                <a:path w="7660515" h="0">
                   <a:moveTo>
                     <a:pt x="0" y="0"/>
                   </a:moveTo>
                   <a:lnTo>
-                    <a:pt x="7799693" y="0"/>
-                  </a:lnTo>
-                  <a:lnTo>
-                    <a:pt x="7799693" y="0"/>
+                    <a:pt x="7660515" y="0"/>
+                  </a:lnTo>
+                  <a:lnTo>
+                    <a:pt x="7660515" y="0"/>
                   </a:lnTo>
                 </a:path>
               </a:pathLst>
@@ -2443,21 +2435,21 @@
           </p:nvSpPr>
           <p:spPr>
             <a:xfrm>
-              <a:off x="1344837" y="2073503"/>
-              <a:ext cx="0" cy="3649639"/>
+              <a:off x="887106" y="2352625"/>
+              <a:ext cx="7660515" cy="0"/>
             </a:xfrm>
             <a:custGeom>
               <a:avLst/>
               <a:pathLst>
-                <a:path w="0" h="3649639">
+                <a:path w="7660515" h="0">
                   <a:moveTo>
-                    <a:pt x="0" y="3649639"/>
+                    <a:pt x="0" y="0"/>
                   </a:moveTo>
                   <a:lnTo>
-                    <a:pt x="0" y="0"/>
-                  </a:lnTo>
-                  <a:lnTo>
-                    <a:pt x="0" y="0"/>
+                    <a:pt x="7660515" y="0"/>
+                  </a:lnTo>
+                  <a:lnTo>
+                    <a:pt x="7660515" y="0"/>
                   </a:lnTo>
                 </a:path>
               </a:pathLst>
@@ -2486,15 +2478,15 @@
           </p:nvSpPr>
           <p:spPr>
             <a:xfrm>
-              <a:off x="3085958" y="2073503"/>
-              <a:ext cx="0" cy="3649639"/>
+              <a:off x="1405017" y="2143092"/>
+              <a:ext cx="0" cy="1317069"/>
             </a:xfrm>
             <a:custGeom>
               <a:avLst/>
               <a:pathLst>
-                <a:path w="0" h="3649639">
+                <a:path w="0" h="1317069">
                   <a:moveTo>
-                    <a:pt x="0" y="3649639"/>
+                    <a:pt x="0" y="1317069"/>
                   </a:moveTo>
                   <a:lnTo>
                     <a:pt x="0" y="0"/>
@@ -2529,15 +2521,15 @@
           </p:nvSpPr>
           <p:spPr>
             <a:xfrm>
-              <a:off x="4827079" y="2073503"/>
-              <a:ext cx="0" cy="3649639"/>
+              <a:off x="3115069" y="2143092"/>
+              <a:ext cx="0" cy="1317069"/>
             </a:xfrm>
             <a:custGeom>
               <a:avLst/>
               <a:pathLst>
-                <a:path w="0" h="3649639">
+                <a:path w="0" h="1317069">
                   <a:moveTo>
-                    <a:pt x="0" y="3649639"/>
+                    <a:pt x="0" y="1317069"/>
                   </a:moveTo>
                   <a:lnTo>
                     <a:pt x="0" y="0"/>
@@ -2572,15 +2564,15 @@
           </p:nvSpPr>
           <p:spPr>
             <a:xfrm>
-              <a:off x="6568199" y="2073503"/>
-              <a:ext cx="0" cy="3649639"/>
+              <a:off x="4825121" y="2143092"/>
+              <a:ext cx="0" cy="1317069"/>
             </a:xfrm>
             <a:custGeom>
               <a:avLst/>
               <a:pathLst>
-                <a:path w="0" h="3649639">
+                <a:path w="0" h="1317069">
                   <a:moveTo>
-                    <a:pt x="0" y="3649639"/>
+                    <a:pt x="0" y="1317069"/>
                   </a:moveTo>
                   <a:lnTo>
                     <a:pt x="0" y="0"/>
@@ -2615,15 +2607,15 @@
           </p:nvSpPr>
           <p:spPr>
             <a:xfrm>
-              <a:off x="8309320" y="2073503"/>
-              <a:ext cx="0" cy="3649639"/>
+              <a:off x="6535173" y="2143092"/>
+              <a:ext cx="0" cy="1317069"/>
             </a:xfrm>
             <a:custGeom>
               <a:avLst/>
               <a:pathLst>
-                <a:path w="0" h="3649639">
+                <a:path w="0" h="1317069">
                   <a:moveTo>
-                    <a:pt x="0" y="3649639"/>
+                    <a:pt x="0" y="1317069"/>
                   </a:moveTo>
                   <a:lnTo>
                     <a:pt x="0" y="0"/>
@@ -2658,26 +2650,26 @@
           </p:nvSpPr>
           <p:spPr>
             <a:xfrm>
-              <a:off x="817517" y="5557249"/>
-              <a:ext cx="7799693" cy="0"/>
+              <a:off x="8245225" y="2143092"/>
+              <a:ext cx="0" cy="1317069"/>
             </a:xfrm>
             <a:custGeom>
               <a:avLst/>
               <a:pathLst>
-                <a:path w="7799693" h="0">
+                <a:path w="0" h="1317069">
                   <a:moveTo>
+                    <a:pt x="0" y="1317069"/>
+                  </a:moveTo>
+                  <a:lnTo>
                     <a:pt x="0" y="0"/>
-                  </a:moveTo>
-                  <a:lnTo>
-                    <a:pt x="7799693" y="0"/>
-                  </a:lnTo>
-                  <a:lnTo>
-                    <a:pt x="7799693" y="0"/>
+                  </a:lnTo>
+                  <a:lnTo>
+                    <a:pt x="0" y="0"/>
                   </a:lnTo>
                 </a:path>
               </a:pathLst>
             </a:custGeom>
-            <a:ln w="13550" cap="flat">
+            <a:ln w="6775" cap="flat">
               <a:solidFill>
                 <a:srgbClr val="EBEBEB">
                   <a:alpha val="100000"/>
@@ -2701,21 +2693,21 @@
           </p:nvSpPr>
           <p:spPr>
             <a:xfrm>
-              <a:off x="817517" y="4727786"/>
-              <a:ext cx="7799693" cy="0"/>
+              <a:off x="887106" y="3400294"/>
+              <a:ext cx="7660515" cy="0"/>
             </a:xfrm>
             <a:custGeom>
               <a:avLst/>
               <a:pathLst>
-                <a:path w="7799693" h="0">
+                <a:path w="7660515" h="0">
                   <a:moveTo>
                     <a:pt x="0" y="0"/>
                   </a:moveTo>
                   <a:lnTo>
-                    <a:pt x="7799693" y="0"/>
-                  </a:lnTo>
-                  <a:lnTo>
-                    <a:pt x="7799693" y="0"/>
+                    <a:pt x="7660515" y="0"/>
+                  </a:lnTo>
+                  <a:lnTo>
+                    <a:pt x="7660515" y="0"/>
                   </a:lnTo>
                 </a:path>
               </a:pathLst>
@@ -2744,21 +2736,21 @@
           </p:nvSpPr>
           <p:spPr>
             <a:xfrm>
-              <a:off x="817517" y="3898322"/>
-              <a:ext cx="7799693" cy="0"/>
+              <a:off x="887106" y="3100960"/>
+              <a:ext cx="7660515" cy="0"/>
             </a:xfrm>
             <a:custGeom>
               <a:avLst/>
               <a:pathLst>
-                <a:path w="7799693" h="0">
+                <a:path w="7660515" h="0">
                   <a:moveTo>
                     <a:pt x="0" y="0"/>
                   </a:moveTo>
                   <a:lnTo>
-                    <a:pt x="7799693" y="0"/>
-                  </a:lnTo>
-                  <a:lnTo>
-                    <a:pt x="7799693" y="0"/>
+                    <a:pt x="7660515" y="0"/>
+                  </a:lnTo>
+                  <a:lnTo>
+                    <a:pt x="7660515" y="0"/>
                   </a:lnTo>
                 </a:path>
               </a:pathLst>
@@ -2787,21 +2779,21 @@
           </p:nvSpPr>
           <p:spPr>
             <a:xfrm>
-              <a:off x="817517" y="3068859"/>
-              <a:ext cx="7799693" cy="0"/>
+              <a:off x="887106" y="2801626"/>
+              <a:ext cx="7660515" cy="0"/>
             </a:xfrm>
             <a:custGeom>
               <a:avLst/>
               <a:pathLst>
-                <a:path w="7799693" h="0">
+                <a:path w="7660515" h="0">
                   <a:moveTo>
                     <a:pt x="0" y="0"/>
                   </a:moveTo>
                   <a:lnTo>
-                    <a:pt x="7799693" y="0"/>
-                  </a:lnTo>
-                  <a:lnTo>
-                    <a:pt x="7799693" y="0"/>
+                    <a:pt x="7660515" y="0"/>
+                  </a:lnTo>
+                  <a:lnTo>
+                    <a:pt x="7660515" y="0"/>
                   </a:lnTo>
                 </a:path>
               </a:pathLst>
@@ -2830,21 +2822,21 @@
           </p:nvSpPr>
           <p:spPr>
             <a:xfrm>
-              <a:off x="817517" y="2239395"/>
-              <a:ext cx="7799693" cy="0"/>
+              <a:off x="887106" y="2502292"/>
+              <a:ext cx="7660515" cy="0"/>
             </a:xfrm>
             <a:custGeom>
               <a:avLst/>
               <a:pathLst>
-                <a:path w="7799693" h="0">
+                <a:path w="7660515" h="0">
                   <a:moveTo>
                     <a:pt x="0" y="0"/>
                   </a:moveTo>
                   <a:lnTo>
-                    <a:pt x="7799693" y="0"/>
-                  </a:lnTo>
-                  <a:lnTo>
-                    <a:pt x="7799693" y="0"/>
+                    <a:pt x="7660515" y="0"/>
+                  </a:lnTo>
+                  <a:lnTo>
+                    <a:pt x="7660515" y="0"/>
                   </a:lnTo>
                 </a:path>
               </a:pathLst>
@@ -2873,21 +2865,21 @@
           </p:nvSpPr>
           <p:spPr>
             <a:xfrm>
-              <a:off x="2215398" y="2073503"/>
-              <a:ext cx="0" cy="3649639"/>
+              <a:off x="887106" y="2202958"/>
+              <a:ext cx="7660515" cy="0"/>
             </a:xfrm>
             <a:custGeom>
               <a:avLst/>
               <a:pathLst>
-                <a:path w="0" h="3649639">
+                <a:path w="7660515" h="0">
                   <a:moveTo>
-                    <a:pt x="0" y="3649639"/>
+                    <a:pt x="0" y="0"/>
                   </a:moveTo>
                   <a:lnTo>
-                    <a:pt x="0" y="0"/>
-                  </a:lnTo>
-                  <a:lnTo>
-                    <a:pt x="0" y="0"/>
+                    <a:pt x="7660515" y="0"/>
+                  </a:lnTo>
+                  <a:lnTo>
+                    <a:pt x="7660515" y="0"/>
                   </a:lnTo>
                 </a:path>
               </a:pathLst>
@@ -2916,15 +2908,15 @@
           </p:nvSpPr>
           <p:spPr>
             <a:xfrm>
-              <a:off x="3956518" y="2073503"/>
-              <a:ext cx="0" cy="3649639"/>
+              <a:off x="2260043" y="2143092"/>
+              <a:ext cx="0" cy="1317069"/>
             </a:xfrm>
             <a:custGeom>
               <a:avLst/>
               <a:pathLst>
-                <a:path w="0" h="3649639">
+                <a:path w="0" h="1317069">
                   <a:moveTo>
-                    <a:pt x="0" y="3649639"/>
+                    <a:pt x="0" y="1317069"/>
                   </a:moveTo>
                   <a:lnTo>
                     <a:pt x="0" y="0"/>
@@ -2959,15 +2951,15 @@
           </p:nvSpPr>
           <p:spPr>
             <a:xfrm>
-              <a:off x="5697639" y="2073503"/>
-              <a:ext cx="0" cy="3649639"/>
+              <a:off x="3970095" y="2143092"/>
+              <a:ext cx="0" cy="1317069"/>
             </a:xfrm>
             <a:custGeom>
               <a:avLst/>
               <a:pathLst>
-                <a:path w="0" h="3649639">
+                <a:path w="0" h="1317069">
                   <a:moveTo>
-                    <a:pt x="0" y="3649639"/>
+                    <a:pt x="0" y="1317069"/>
                   </a:moveTo>
                   <a:lnTo>
                     <a:pt x="0" y="0"/>
@@ -3002,15 +2994,15 @@
           </p:nvSpPr>
           <p:spPr>
             <a:xfrm>
-              <a:off x="7438760" y="2073503"/>
-              <a:ext cx="0" cy="3649639"/>
+              <a:off x="5680147" y="2143092"/>
+              <a:ext cx="0" cy="1317069"/>
             </a:xfrm>
             <a:custGeom>
               <a:avLst/>
               <a:pathLst>
-                <a:path w="0" h="3649639">
+                <a:path w="0" h="1317069">
                   <a:moveTo>
-                    <a:pt x="0" y="3649639"/>
+                    <a:pt x="0" y="1317069"/>
                   </a:moveTo>
                   <a:lnTo>
                     <a:pt x="0" y="0"/>
@@ -3039,618 +3031,661 @@
         </p:sp>
         <p:sp>
           <p:nvSpPr>
-            <p:cNvPr id="22" name="pg22"/>
+            <p:cNvPr id="22" name="pl22"/>
             <p:cNvSpPr/>
             <p:nvPr/>
           </p:nvSpPr>
           <p:spPr>
             <a:xfrm>
-              <a:off x="1172049" y="3670182"/>
-              <a:ext cx="7090630" cy="1595484"/>
+              <a:off x="7390199" y="2143092"/>
+              <a:ext cx="0" cy="1317069"/>
             </a:xfrm>
             <a:custGeom>
               <a:avLst/>
               <a:pathLst>
-                <a:path w="7090630" h="1595484">
+                <a:path w="0" h="1317069">
+                  <a:moveTo>
+                    <a:pt x="0" y="1317069"/>
+                  </a:moveTo>
+                  <a:lnTo>
+                    <a:pt x="0" y="0"/>
+                  </a:lnTo>
+                  <a:lnTo>
+                    <a:pt x="0" y="0"/>
+                  </a:lnTo>
+                </a:path>
+              </a:pathLst>
+            </a:custGeom>
+            <a:ln w="13550" cap="flat">
+              <a:solidFill>
+                <a:srgbClr val="EBEBEB">
+                  <a:alpha val="100000"/>
+                </a:srgbClr>
+              </a:solidFill>
+              <a:prstDash val="solid"/>
+              <a:round/>
+            </a:ln>
+          </p:spPr>
+          <p:txBody>
+            <a:bodyPr/>
+            <a:lstStyle/>
+            <a:p/>
+          </p:txBody>
+        </p:sp>
+        <p:sp>
+          <p:nvSpPr>
+            <p:cNvPr id="23" name="pg23"/>
+            <p:cNvSpPr/>
+            <p:nvPr/>
+          </p:nvSpPr>
+          <p:spPr>
+            <a:xfrm>
+              <a:off x="1235312" y="2719296"/>
+              <a:ext cx="6964104" cy="575772"/>
+            </a:xfrm>
+            <a:custGeom>
+              <a:avLst/>
+              <a:pathLst>
+                <a:path w="6964104" h="575772">
                   <a:moveTo>
                     <a:pt x="0" y="0"/>
                   </a:moveTo>
                   <a:lnTo>
-                    <a:pt x="71622" y="35262"/>
-                  </a:lnTo>
-                  <a:lnTo>
-                    <a:pt x="143245" y="69865"/>
-                  </a:lnTo>
-                  <a:lnTo>
-                    <a:pt x="214867" y="103822"/>
-                  </a:lnTo>
-                  <a:lnTo>
-                    <a:pt x="286490" y="137145"/>
-                  </a:lnTo>
-                  <a:lnTo>
-                    <a:pt x="358112" y="169844"/>
-                  </a:lnTo>
-                  <a:lnTo>
-                    <a:pt x="429735" y="201933"/>
-                  </a:lnTo>
-                  <a:lnTo>
-                    <a:pt x="501357" y="233422"/>
-                  </a:lnTo>
-                  <a:lnTo>
-                    <a:pt x="572980" y="264323"/>
-                  </a:lnTo>
-                  <a:lnTo>
-                    <a:pt x="644602" y="294646"/>
-                  </a:lnTo>
-                  <a:lnTo>
-                    <a:pt x="716225" y="324403"/>
-                  </a:lnTo>
-                  <a:lnTo>
-                    <a:pt x="787847" y="353603"/>
-                  </a:lnTo>
-                  <a:lnTo>
-                    <a:pt x="859470" y="382258"/>
-                  </a:lnTo>
-                  <a:lnTo>
-                    <a:pt x="931092" y="410377"/>
-                  </a:lnTo>
-                  <a:lnTo>
-                    <a:pt x="1002715" y="437971"/>
-                  </a:lnTo>
-                  <a:lnTo>
-                    <a:pt x="1074337" y="465050"/>
-                  </a:lnTo>
-                  <a:lnTo>
-                    <a:pt x="1145960" y="491622"/>
-                  </a:lnTo>
-                  <a:lnTo>
-                    <a:pt x="1217582" y="517698"/>
-                  </a:lnTo>
-                  <a:lnTo>
-                    <a:pt x="1289205" y="543286"/>
-                  </a:lnTo>
-                  <a:lnTo>
-                    <a:pt x="1360827" y="568397"/>
-                  </a:lnTo>
-                  <a:lnTo>
-                    <a:pt x="1432450" y="593038"/>
-                  </a:lnTo>
-                  <a:lnTo>
-                    <a:pt x="1504073" y="617219"/>
-                  </a:lnTo>
-                  <a:lnTo>
-                    <a:pt x="1575695" y="640947"/>
-                  </a:lnTo>
-                  <a:lnTo>
-                    <a:pt x="1647318" y="664233"/>
-                  </a:lnTo>
-                  <a:lnTo>
-                    <a:pt x="1718940" y="687083"/>
-                  </a:lnTo>
-                  <a:lnTo>
-                    <a:pt x="1790563" y="709507"/>
-                  </a:lnTo>
-                  <a:lnTo>
-                    <a:pt x="1862185" y="731511"/>
-                  </a:lnTo>
-                  <a:lnTo>
-                    <a:pt x="1933808" y="753104"/>
-                  </a:lnTo>
-                  <a:lnTo>
-                    <a:pt x="2005430" y="774294"/>
-                  </a:lnTo>
-                  <a:lnTo>
-                    <a:pt x="2077053" y="795087"/>
-                  </a:lnTo>
-                  <a:lnTo>
-                    <a:pt x="2148675" y="815493"/>
-                  </a:lnTo>
-                  <a:lnTo>
-                    <a:pt x="2220298" y="835516"/>
-                  </a:lnTo>
-                  <a:lnTo>
-                    <a:pt x="2291920" y="855166"/>
-                  </a:lnTo>
-                  <a:lnTo>
-                    <a:pt x="2363543" y="874449"/>
-                  </a:lnTo>
-                  <a:lnTo>
-                    <a:pt x="2435165" y="893371"/>
-                  </a:lnTo>
-                  <a:lnTo>
-                    <a:pt x="2506788" y="911939"/>
-                  </a:lnTo>
-                  <a:lnTo>
-                    <a:pt x="2578410" y="930161"/>
-                  </a:lnTo>
-                  <a:lnTo>
-                    <a:pt x="2650033" y="948042"/>
-                  </a:lnTo>
-                  <a:lnTo>
-                    <a:pt x="2721655" y="965589"/>
-                  </a:lnTo>
-                  <a:lnTo>
-                    <a:pt x="2793278" y="982808"/>
-                  </a:lnTo>
-                  <a:lnTo>
-                    <a:pt x="2864901" y="999705"/>
-                  </a:lnTo>
-                  <a:lnTo>
-                    <a:pt x="2936523" y="1016287"/>
-                  </a:lnTo>
-                  <a:lnTo>
-                    <a:pt x="3008146" y="1032559"/>
-                  </a:lnTo>
-                  <a:lnTo>
-                    <a:pt x="3079768" y="1048526"/>
-                  </a:lnTo>
-                  <a:lnTo>
-                    <a:pt x="3151391" y="1058330"/>
-                  </a:lnTo>
-                  <a:lnTo>
-                    <a:pt x="3223013" y="1060045"/>
-                  </a:lnTo>
-                  <a:lnTo>
-                    <a:pt x="3294636" y="1061757"/>
-                  </a:lnTo>
-                  <a:lnTo>
-                    <a:pt x="3366258" y="1063465"/>
-                  </a:lnTo>
-                  <a:lnTo>
-                    <a:pt x="3437881" y="1065169"/>
-                  </a:lnTo>
-                  <a:lnTo>
-                    <a:pt x="3509503" y="1066870"/>
-                  </a:lnTo>
-                  <a:lnTo>
-                    <a:pt x="3581126" y="1068568"/>
-                  </a:lnTo>
-                  <a:lnTo>
-                    <a:pt x="3652748" y="1070262"/>
-                  </a:lnTo>
-                  <a:lnTo>
-                    <a:pt x="3724371" y="1071952"/>
-                  </a:lnTo>
-                  <a:lnTo>
-                    <a:pt x="3795993" y="1073639"/>
-                  </a:lnTo>
-                  <a:lnTo>
-                    <a:pt x="3867616" y="1075323"/>
-                  </a:lnTo>
-                  <a:lnTo>
-                    <a:pt x="3939238" y="1077003"/>
-                  </a:lnTo>
-                  <a:lnTo>
-                    <a:pt x="4010861" y="1078679"/>
-                  </a:lnTo>
-                  <a:lnTo>
-                    <a:pt x="4082483" y="1080352"/>
-                  </a:lnTo>
-                  <a:lnTo>
-                    <a:pt x="4154106" y="1082022"/>
-                  </a:lnTo>
-                  <a:lnTo>
-                    <a:pt x="4225729" y="1083688"/>
-                  </a:lnTo>
-                  <a:lnTo>
-                    <a:pt x="4297351" y="1085351"/>
-                  </a:lnTo>
-                  <a:lnTo>
-                    <a:pt x="4368974" y="1087010"/>
-                  </a:lnTo>
-                  <a:lnTo>
-                    <a:pt x="4440596" y="1088666"/>
-                  </a:lnTo>
-                  <a:lnTo>
-                    <a:pt x="4512219" y="1090318"/>
-                  </a:lnTo>
-                  <a:lnTo>
-                    <a:pt x="4583841" y="1091967"/>
-                  </a:lnTo>
-                  <a:lnTo>
-                    <a:pt x="4655464" y="1093612"/>
-                  </a:lnTo>
-                  <a:lnTo>
-                    <a:pt x="4727086" y="1095255"/>
-                  </a:lnTo>
-                  <a:lnTo>
-                    <a:pt x="4798709" y="1096893"/>
-                  </a:lnTo>
-                  <a:lnTo>
-                    <a:pt x="4870331" y="1098529"/>
-                  </a:lnTo>
-                  <a:lnTo>
-                    <a:pt x="4941954" y="1100161"/>
-                  </a:lnTo>
-                  <a:lnTo>
-                    <a:pt x="5013576" y="1101789"/>
-                  </a:lnTo>
-                  <a:lnTo>
-                    <a:pt x="5085199" y="1103414"/>
-                  </a:lnTo>
-                  <a:lnTo>
-                    <a:pt x="5156821" y="1105036"/>
-                  </a:lnTo>
-                  <a:lnTo>
-                    <a:pt x="5228444" y="1106655"/>
-                  </a:lnTo>
-                  <a:lnTo>
-                    <a:pt x="5300066" y="1108270"/>
-                  </a:lnTo>
-                  <a:lnTo>
-                    <a:pt x="5371689" y="1109882"/>
-                  </a:lnTo>
-                  <a:lnTo>
-                    <a:pt x="5443311" y="1111490"/>
-                  </a:lnTo>
-                  <a:lnTo>
-                    <a:pt x="5514934" y="1113095"/>
-                  </a:lnTo>
-                  <a:lnTo>
-                    <a:pt x="5586557" y="1114697"/>
-                  </a:lnTo>
-                  <a:lnTo>
-                    <a:pt x="5658179" y="1116296"/>
-                  </a:lnTo>
-                  <a:lnTo>
-                    <a:pt x="5729802" y="1117891"/>
-                  </a:lnTo>
-                  <a:lnTo>
-                    <a:pt x="5801424" y="1119483"/>
-                  </a:lnTo>
-                  <a:lnTo>
-                    <a:pt x="5873047" y="1121071"/>
-                  </a:lnTo>
-                  <a:lnTo>
-                    <a:pt x="5944669" y="1122656"/>
-                  </a:lnTo>
-                  <a:lnTo>
-                    <a:pt x="6016292" y="1124238"/>
-                  </a:lnTo>
-                  <a:lnTo>
-                    <a:pt x="6087914" y="1125817"/>
-                  </a:lnTo>
-                  <a:lnTo>
-                    <a:pt x="6159537" y="1127393"/>
-                  </a:lnTo>
-                  <a:lnTo>
-                    <a:pt x="6231159" y="1128965"/>
-                  </a:lnTo>
-                  <a:lnTo>
-                    <a:pt x="6302782" y="1130534"/>
-                  </a:lnTo>
-                  <a:lnTo>
-                    <a:pt x="6374404" y="1132100"/>
-                  </a:lnTo>
-                  <a:lnTo>
-                    <a:pt x="6446027" y="1133662"/>
-                  </a:lnTo>
-                  <a:lnTo>
-                    <a:pt x="6517649" y="1135221"/>
-                  </a:lnTo>
-                  <a:lnTo>
-                    <a:pt x="6589272" y="1136777"/>
-                  </a:lnTo>
-                  <a:lnTo>
-                    <a:pt x="6660894" y="1138330"/>
-                  </a:lnTo>
-                  <a:lnTo>
-                    <a:pt x="6732517" y="1139880"/>
-                  </a:lnTo>
-                  <a:lnTo>
-                    <a:pt x="6804139" y="1141426"/>
-                  </a:lnTo>
-                  <a:lnTo>
-                    <a:pt x="6875762" y="1142969"/>
-                  </a:lnTo>
-                  <a:lnTo>
-                    <a:pt x="6947385" y="1144509"/>
-                  </a:lnTo>
-                  <a:lnTo>
-                    <a:pt x="7019007" y="1146046"/>
-                  </a:lnTo>
-                  <a:lnTo>
-                    <a:pt x="7090630" y="1147580"/>
-                  </a:lnTo>
-                  <a:lnTo>
-                    <a:pt x="7090630" y="1595484"/>
-                  </a:lnTo>
-                  <a:lnTo>
-                    <a:pt x="7019007" y="1589931"/>
-                  </a:lnTo>
-                  <a:lnTo>
-                    <a:pt x="6947385" y="1584273"/>
-                  </a:lnTo>
-                  <a:lnTo>
-                    <a:pt x="6875762" y="1578507"/>
-                  </a:lnTo>
-                  <a:lnTo>
-                    <a:pt x="6804139" y="1572632"/>
-                  </a:lnTo>
-                  <a:lnTo>
-                    <a:pt x="6732517" y="1566644"/>
-                  </a:lnTo>
-                  <a:lnTo>
-                    <a:pt x="6660894" y="1560543"/>
-                  </a:lnTo>
-                  <a:lnTo>
-                    <a:pt x="6589272" y="1554325"/>
-                  </a:lnTo>
-                  <a:lnTo>
-                    <a:pt x="6517649" y="1547989"/>
-                  </a:lnTo>
-                  <a:lnTo>
-                    <a:pt x="6446027" y="1541532"/>
-                  </a:lnTo>
-                  <a:lnTo>
-                    <a:pt x="6374404" y="1534952"/>
-                  </a:lnTo>
-                  <a:lnTo>
-                    <a:pt x="6302782" y="1528247"/>
-                  </a:lnTo>
-                  <a:lnTo>
-                    <a:pt x="6231159" y="1521414"/>
-                  </a:lnTo>
-                  <a:lnTo>
-                    <a:pt x="6159537" y="1514452"/>
-                  </a:lnTo>
-                  <a:lnTo>
-                    <a:pt x="6087914" y="1507356"/>
-                  </a:lnTo>
-                  <a:lnTo>
-                    <a:pt x="6016292" y="1500126"/>
-                  </a:lnTo>
-                  <a:lnTo>
-                    <a:pt x="5944669" y="1492757"/>
-                  </a:lnTo>
-                  <a:lnTo>
-                    <a:pt x="5873047" y="1485249"/>
-                  </a:lnTo>
-                  <a:lnTo>
-                    <a:pt x="5801424" y="1477597"/>
-                  </a:lnTo>
-                  <a:lnTo>
-                    <a:pt x="5729802" y="1469800"/>
-                  </a:lnTo>
-                  <a:lnTo>
-                    <a:pt x="5658179" y="1461854"/>
-                  </a:lnTo>
-                  <a:lnTo>
-                    <a:pt x="5586557" y="1453757"/>
-                  </a:lnTo>
-                  <a:lnTo>
-                    <a:pt x="5514934" y="1445506"/>
-                  </a:lnTo>
-                  <a:lnTo>
-                    <a:pt x="5443311" y="1437098"/>
-                  </a:lnTo>
-                  <a:lnTo>
-                    <a:pt x="5371689" y="1428530"/>
-                  </a:lnTo>
-                  <a:lnTo>
-                    <a:pt x="5300066" y="1419798"/>
-                  </a:lnTo>
-                  <a:lnTo>
-                    <a:pt x="5228444" y="1410900"/>
-                  </a:lnTo>
-                  <a:lnTo>
-                    <a:pt x="5156821" y="1401833"/>
-                  </a:lnTo>
-                  <a:lnTo>
-                    <a:pt x="5085199" y="1392593"/>
-                  </a:lnTo>
-                  <a:lnTo>
-                    <a:pt x="5013576" y="1383177"/>
-                  </a:lnTo>
-                  <a:lnTo>
-                    <a:pt x="4941954" y="1373582"/>
-                  </a:lnTo>
-                  <a:lnTo>
-                    <a:pt x="4870331" y="1363804"/>
-                  </a:lnTo>
-                  <a:lnTo>
-                    <a:pt x="4798709" y="1353840"/>
-                  </a:lnTo>
-                  <a:lnTo>
-                    <a:pt x="4727086" y="1343686"/>
-                  </a:lnTo>
-                  <a:lnTo>
-                    <a:pt x="4655464" y="1333339"/>
-                  </a:lnTo>
-                  <a:lnTo>
-                    <a:pt x="4583841" y="1322795"/>
-                  </a:lnTo>
-                  <a:lnTo>
-                    <a:pt x="4512219" y="1312050"/>
-                  </a:lnTo>
-                  <a:lnTo>
-                    <a:pt x="4440596" y="1301100"/>
-                  </a:lnTo>
-                  <a:lnTo>
-                    <a:pt x="4368974" y="1289942"/>
-                  </a:lnTo>
-                  <a:lnTo>
-                    <a:pt x="4297351" y="1278572"/>
-                  </a:lnTo>
-                  <a:lnTo>
-                    <a:pt x="4225729" y="1266985"/>
-                  </a:lnTo>
-                  <a:lnTo>
-                    <a:pt x="4154106" y="1255177"/>
-                  </a:lnTo>
-                  <a:lnTo>
-                    <a:pt x="4082483" y="1243144"/>
-                  </a:lnTo>
-                  <a:lnTo>
-                    <a:pt x="4010861" y="1230883"/>
-                  </a:lnTo>
-                  <a:lnTo>
-                    <a:pt x="3939238" y="1218387"/>
-                  </a:lnTo>
-                  <a:lnTo>
-                    <a:pt x="3867616" y="1205654"/>
-                  </a:lnTo>
-                  <a:lnTo>
-                    <a:pt x="3795993" y="1192679"/>
-                  </a:lnTo>
-                  <a:lnTo>
-                    <a:pt x="3724371" y="1179456"/>
-                  </a:lnTo>
-                  <a:lnTo>
-                    <a:pt x="3652748" y="1165981"/>
-                  </a:lnTo>
-                  <a:lnTo>
-                    <a:pt x="3581126" y="1152250"/>
-                  </a:lnTo>
-                  <a:lnTo>
-                    <a:pt x="3509503" y="1138258"/>
-                  </a:lnTo>
-                  <a:lnTo>
-                    <a:pt x="3437881" y="1123999"/>
-                  </a:lnTo>
-                  <a:lnTo>
-                    <a:pt x="3366258" y="1109468"/>
-                  </a:lnTo>
-                  <a:lnTo>
-                    <a:pt x="3294636" y="1094661"/>
-                  </a:lnTo>
-                  <a:lnTo>
-                    <a:pt x="3223013" y="1079572"/>
-                  </a:lnTo>
-                  <a:lnTo>
-                    <a:pt x="3151391" y="1064196"/>
-                  </a:lnTo>
-                  <a:lnTo>
-                    <a:pt x="3079768" y="1056611"/>
-                  </a:lnTo>
-                  <a:lnTo>
-                    <a:pt x="3008146" y="1054889"/>
-                  </a:lnTo>
-                  <a:lnTo>
-                    <a:pt x="2936523" y="1053163"/>
-                  </a:lnTo>
-                  <a:lnTo>
-                    <a:pt x="2864901" y="1051434"/>
-                  </a:lnTo>
-                  <a:lnTo>
-                    <a:pt x="2793278" y="1049701"/>
-                  </a:lnTo>
-                  <a:lnTo>
-                    <a:pt x="2721655" y="1047964"/>
-                  </a:lnTo>
-                  <a:lnTo>
-                    <a:pt x="2650033" y="1046224"/>
-                  </a:lnTo>
-                  <a:lnTo>
-                    <a:pt x="2578410" y="1044480"/>
-                  </a:lnTo>
-                  <a:lnTo>
-                    <a:pt x="2506788" y="1042733"/>
-                  </a:lnTo>
-                  <a:lnTo>
-                    <a:pt x="2435165" y="1040982"/>
-                  </a:lnTo>
-                  <a:lnTo>
-                    <a:pt x="2363543" y="1039227"/>
-                  </a:lnTo>
-                  <a:lnTo>
-                    <a:pt x="2291920" y="1037469"/>
-                  </a:lnTo>
-                  <a:lnTo>
-                    <a:pt x="2220298" y="1035707"/>
-                  </a:lnTo>
-                  <a:lnTo>
-                    <a:pt x="2148675" y="1033941"/>
-                  </a:lnTo>
-                  <a:lnTo>
-                    <a:pt x="2077053" y="1032172"/>
-                  </a:lnTo>
-                  <a:lnTo>
-                    <a:pt x="2005430" y="1030399"/>
-                  </a:lnTo>
-                  <a:lnTo>
-                    <a:pt x="1933808" y="1028622"/>
-                  </a:lnTo>
-                  <a:lnTo>
-                    <a:pt x="1862185" y="1026842"/>
-                  </a:lnTo>
-                  <a:lnTo>
-                    <a:pt x="1790563" y="1025058"/>
-                  </a:lnTo>
-                  <a:lnTo>
-                    <a:pt x="1718940" y="1023270"/>
-                  </a:lnTo>
-                  <a:lnTo>
-                    <a:pt x="1647318" y="1021479"/>
-                  </a:lnTo>
-                  <a:lnTo>
-                    <a:pt x="1575695" y="1019684"/>
-                  </a:lnTo>
-                  <a:lnTo>
-                    <a:pt x="1504073" y="1017885"/>
-                  </a:lnTo>
-                  <a:lnTo>
-                    <a:pt x="1432450" y="1016082"/>
-                  </a:lnTo>
-                  <a:lnTo>
-                    <a:pt x="1360827" y="1014276"/>
-                  </a:lnTo>
-                  <a:lnTo>
-                    <a:pt x="1289205" y="1012466"/>
-                  </a:lnTo>
-                  <a:lnTo>
-                    <a:pt x="1217582" y="1010652"/>
-                  </a:lnTo>
-                  <a:lnTo>
-                    <a:pt x="1145960" y="1008834"/>
-                  </a:lnTo>
-                  <a:lnTo>
-                    <a:pt x="1074337" y="1007013"/>
-                  </a:lnTo>
-                  <a:lnTo>
-                    <a:pt x="1002715" y="1005188"/>
-                  </a:lnTo>
-                  <a:lnTo>
-                    <a:pt x="931092" y="1003359"/>
-                  </a:lnTo>
-                  <a:lnTo>
-                    <a:pt x="859470" y="1001526"/>
-                  </a:lnTo>
-                  <a:lnTo>
-                    <a:pt x="787847" y="999690"/>
-                  </a:lnTo>
-                  <a:lnTo>
-                    <a:pt x="716225" y="997849"/>
-                  </a:lnTo>
-                  <a:lnTo>
-                    <a:pt x="644602" y="996005"/>
-                  </a:lnTo>
-                  <a:lnTo>
-                    <a:pt x="572980" y="994157"/>
-                  </a:lnTo>
-                  <a:lnTo>
-                    <a:pt x="501357" y="992306"/>
-                  </a:lnTo>
-                  <a:lnTo>
-                    <a:pt x="429735" y="990450"/>
-                  </a:lnTo>
-                  <a:lnTo>
-                    <a:pt x="358112" y="988590"/>
-                  </a:lnTo>
-                  <a:lnTo>
-                    <a:pt x="286490" y="986727"/>
-                  </a:lnTo>
-                  <a:lnTo>
-                    <a:pt x="214867" y="984860"/>
-                  </a:lnTo>
-                  <a:lnTo>
-                    <a:pt x="143245" y="982989"/>
-                  </a:lnTo>
-                  <a:lnTo>
-                    <a:pt x="71622" y="981114"/>
-                  </a:lnTo>
-                  <a:lnTo>
-                    <a:pt x="0" y="979235"/>
+                    <a:pt x="70344" y="12725"/>
+                  </a:lnTo>
+                  <a:lnTo>
+                    <a:pt x="140688" y="25212"/>
+                  </a:lnTo>
+                  <a:lnTo>
+                    <a:pt x="211033" y="37467"/>
+                  </a:lnTo>
+                  <a:lnTo>
+                    <a:pt x="281377" y="49492"/>
+                  </a:lnTo>
+                  <a:lnTo>
+                    <a:pt x="351722" y="61293"/>
+                  </a:lnTo>
+                  <a:lnTo>
+                    <a:pt x="422066" y="72873"/>
+                  </a:lnTo>
+                  <a:lnTo>
+                    <a:pt x="492411" y="84236"/>
+                  </a:lnTo>
+                  <a:lnTo>
+                    <a:pt x="562755" y="95388"/>
+                  </a:lnTo>
+                  <a:lnTo>
+                    <a:pt x="633100" y="106330"/>
+                  </a:lnTo>
+                  <a:lnTo>
+                    <a:pt x="703444" y="117069"/>
+                  </a:lnTo>
+                  <a:lnTo>
+                    <a:pt x="773789" y="127607"/>
+                  </a:lnTo>
+                  <a:lnTo>
+                    <a:pt x="844133" y="137948"/>
+                  </a:lnTo>
+                  <a:lnTo>
+                    <a:pt x="914478" y="148095"/>
+                  </a:lnTo>
+                  <a:lnTo>
+                    <a:pt x="984822" y="158053"/>
+                  </a:lnTo>
+                  <a:lnTo>
+                    <a:pt x="1055167" y="167825"/>
+                  </a:lnTo>
+                  <a:lnTo>
+                    <a:pt x="1125511" y="177414"/>
+                  </a:lnTo>
+                  <a:lnTo>
+                    <a:pt x="1195856" y="186825"/>
+                  </a:lnTo>
+                  <a:lnTo>
+                    <a:pt x="1266200" y="196059"/>
+                  </a:lnTo>
+                  <a:lnTo>
+                    <a:pt x="1336545" y="205121"/>
+                  </a:lnTo>
+                  <a:lnTo>
+                    <a:pt x="1406889" y="214013"/>
+                  </a:lnTo>
+                  <a:lnTo>
+                    <a:pt x="1477234" y="222739"/>
+                  </a:lnTo>
+                  <a:lnTo>
+                    <a:pt x="1547578" y="231303"/>
+                  </a:lnTo>
+                  <a:lnTo>
+                    <a:pt x="1617923" y="239706"/>
+                  </a:lnTo>
+                  <a:lnTo>
+                    <a:pt x="1688267" y="247952"/>
+                  </a:lnTo>
+                  <a:lnTo>
+                    <a:pt x="1758612" y="256044"/>
+                  </a:lnTo>
+                  <a:lnTo>
+                    <a:pt x="1828956" y="263985"/>
+                  </a:lnTo>
+                  <a:lnTo>
+                    <a:pt x="1899301" y="271777"/>
+                  </a:lnTo>
+                  <a:lnTo>
+                    <a:pt x="1969645" y="279424"/>
+                  </a:lnTo>
+                  <a:lnTo>
+                    <a:pt x="2039990" y="286928"/>
+                  </a:lnTo>
+                  <a:lnTo>
+                    <a:pt x="2110334" y="294292"/>
+                  </a:lnTo>
+                  <a:lnTo>
+                    <a:pt x="2180679" y="301518"/>
+                  </a:lnTo>
+                  <a:lnTo>
+                    <a:pt x="2251023" y="308609"/>
+                  </a:lnTo>
+                  <a:lnTo>
+                    <a:pt x="2321368" y="315568"/>
+                  </a:lnTo>
+                  <a:lnTo>
+                    <a:pt x="2391712" y="322396"/>
+                  </a:lnTo>
+                  <a:lnTo>
+                    <a:pt x="2462057" y="329097"/>
+                  </a:lnTo>
+                  <a:lnTo>
+                    <a:pt x="2532401" y="335673"/>
+                  </a:lnTo>
+                  <a:lnTo>
+                    <a:pt x="2602746" y="342126"/>
+                  </a:lnTo>
+                  <a:lnTo>
+                    <a:pt x="2673090" y="348458"/>
+                  </a:lnTo>
+                  <a:lnTo>
+                    <a:pt x="2743435" y="354672"/>
+                  </a:lnTo>
+                  <a:lnTo>
+                    <a:pt x="2813779" y="360770"/>
+                  </a:lnTo>
+                  <a:lnTo>
+                    <a:pt x="2884124" y="366754"/>
+                  </a:lnTo>
+                  <a:lnTo>
+                    <a:pt x="2954468" y="372626"/>
+                  </a:lnTo>
+                  <a:lnTo>
+                    <a:pt x="3024813" y="378388"/>
+                  </a:lnTo>
+                  <a:lnTo>
+                    <a:pt x="3095157" y="381926"/>
+                  </a:lnTo>
+                  <a:lnTo>
+                    <a:pt x="3165502" y="382545"/>
+                  </a:lnTo>
+                  <a:lnTo>
+                    <a:pt x="3235846" y="383163"/>
+                  </a:lnTo>
+                  <a:lnTo>
+                    <a:pt x="3306191" y="383779"/>
+                  </a:lnTo>
+                  <a:lnTo>
+                    <a:pt x="3376535" y="384394"/>
+                  </a:lnTo>
+                  <a:lnTo>
+                    <a:pt x="3446880" y="385008"/>
+                  </a:lnTo>
+                  <a:lnTo>
+                    <a:pt x="3517224" y="385621"/>
+                  </a:lnTo>
+                  <a:lnTo>
+                    <a:pt x="3587569" y="386232"/>
+                  </a:lnTo>
+                  <a:lnTo>
+                    <a:pt x="3657913" y="386842"/>
+                  </a:lnTo>
+                  <a:lnTo>
+                    <a:pt x="3728257" y="387451"/>
+                  </a:lnTo>
+                  <a:lnTo>
+                    <a:pt x="3798602" y="388058"/>
+                  </a:lnTo>
+                  <a:lnTo>
+                    <a:pt x="3868946" y="388665"/>
+                  </a:lnTo>
+                  <a:lnTo>
+                    <a:pt x="3939291" y="389270"/>
+                  </a:lnTo>
+                  <a:lnTo>
+                    <a:pt x="4009635" y="389873"/>
+                  </a:lnTo>
+                  <a:lnTo>
+                    <a:pt x="4079980" y="390476"/>
+                  </a:lnTo>
+                  <a:lnTo>
+                    <a:pt x="4150324" y="391077"/>
+                  </a:lnTo>
+                  <a:lnTo>
+                    <a:pt x="4220669" y="391677"/>
+                  </a:lnTo>
+                  <a:lnTo>
+                    <a:pt x="4291013" y="392276"/>
+                  </a:lnTo>
+                  <a:lnTo>
+                    <a:pt x="4361358" y="392873"/>
+                  </a:lnTo>
+                  <a:lnTo>
+                    <a:pt x="4431702" y="393470"/>
+                  </a:lnTo>
+                  <a:lnTo>
+                    <a:pt x="4502047" y="394065"/>
+                  </a:lnTo>
+                  <a:lnTo>
+                    <a:pt x="4572391" y="394659"/>
+                  </a:lnTo>
+                  <a:lnTo>
+                    <a:pt x="4642736" y="395251"/>
+                  </a:lnTo>
+                  <a:lnTo>
+                    <a:pt x="4713080" y="395843"/>
+                  </a:lnTo>
+                  <a:lnTo>
+                    <a:pt x="4783425" y="396433"/>
+                  </a:lnTo>
+                  <a:lnTo>
+                    <a:pt x="4853769" y="397022"/>
+                  </a:lnTo>
+                  <a:lnTo>
+                    <a:pt x="4924114" y="397609"/>
+                  </a:lnTo>
+                  <a:lnTo>
+                    <a:pt x="4994458" y="398196"/>
+                  </a:lnTo>
+                  <a:lnTo>
+                    <a:pt x="5064803" y="398781"/>
+                  </a:lnTo>
+                  <a:lnTo>
+                    <a:pt x="5135147" y="399365"/>
+                  </a:lnTo>
+                  <a:lnTo>
+                    <a:pt x="5205492" y="399948"/>
+                  </a:lnTo>
+                  <a:lnTo>
+                    <a:pt x="5275836" y="400530"/>
+                  </a:lnTo>
+                  <a:lnTo>
+                    <a:pt x="5346181" y="401110"/>
+                  </a:lnTo>
+                  <a:lnTo>
+                    <a:pt x="5416525" y="401690"/>
+                  </a:lnTo>
+                  <a:lnTo>
+                    <a:pt x="5486870" y="402268"/>
+                  </a:lnTo>
+                  <a:lnTo>
+                    <a:pt x="5557214" y="402844"/>
+                  </a:lnTo>
+                  <a:lnTo>
+                    <a:pt x="5627559" y="403420"/>
+                  </a:lnTo>
+                  <a:lnTo>
+                    <a:pt x="5697903" y="403995"/>
+                  </a:lnTo>
+                  <a:lnTo>
+                    <a:pt x="5768248" y="404568"/>
+                  </a:lnTo>
+                  <a:lnTo>
+                    <a:pt x="5838592" y="405140"/>
+                  </a:lnTo>
+                  <a:lnTo>
+                    <a:pt x="5908937" y="405711"/>
+                  </a:lnTo>
+                  <a:lnTo>
+                    <a:pt x="5979281" y="406281"/>
+                  </a:lnTo>
+                  <a:lnTo>
+                    <a:pt x="6049626" y="406849"/>
+                  </a:lnTo>
+                  <a:lnTo>
+                    <a:pt x="6119970" y="407417"/>
+                  </a:lnTo>
+                  <a:lnTo>
+                    <a:pt x="6190315" y="407983"/>
+                  </a:lnTo>
+                  <a:lnTo>
+                    <a:pt x="6260659" y="408548"/>
+                  </a:lnTo>
+                  <a:lnTo>
+                    <a:pt x="6331004" y="409112"/>
+                  </a:lnTo>
+                  <a:lnTo>
+                    <a:pt x="6401348" y="409674"/>
+                  </a:lnTo>
+                  <a:lnTo>
+                    <a:pt x="6471693" y="410236"/>
+                  </a:lnTo>
+                  <a:lnTo>
+                    <a:pt x="6542037" y="410796"/>
+                  </a:lnTo>
+                  <a:lnTo>
+                    <a:pt x="6612382" y="411355"/>
+                  </a:lnTo>
+                  <a:lnTo>
+                    <a:pt x="6682726" y="411914"/>
+                  </a:lnTo>
+                  <a:lnTo>
+                    <a:pt x="6753071" y="412470"/>
+                  </a:lnTo>
+                  <a:lnTo>
+                    <a:pt x="6823415" y="413026"/>
+                  </a:lnTo>
+                  <a:lnTo>
+                    <a:pt x="6893760" y="413581"/>
+                  </a:lnTo>
+                  <a:lnTo>
+                    <a:pt x="6964104" y="414134"/>
+                  </a:lnTo>
+                  <a:lnTo>
+                    <a:pt x="6964104" y="575772"/>
+                  </a:lnTo>
+                  <a:lnTo>
+                    <a:pt x="6893760" y="573768"/>
+                  </a:lnTo>
+                  <a:lnTo>
+                    <a:pt x="6823415" y="571727"/>
+                  </a:lnTo>
+                  <a:lnTo>
+                    <a:pt x="6753071" y="569646"/>
+                  </a:lnTo>
+                  <a:lnTo>
+                    <a:pt x="6682726" y="567525"/>
+                  </a:lnTo>
+                  <a:lnTo>
+                    <a:pt x="6612382" y="565365"/>
+                  </a:lnTo>
+                  <a:lnTo>
+                    <a:pt x="6542037" y="563163"/>
+                  </a:lnTo>
+                  <a:lnTo>
+                    <a:pt x="6471693" y="560919"/>
+                  </a:lnTo>
+                  <a:lnTo>
+                    <a:pt x="6401348" y="558632"/>
+                  </a:lnTo>
+                  <a:lnTo>
+                    <a:pt x="6331004" y="556302"/>
+                  </a:lnTo>
+                  <a:lnTo>
+                    <a:pt x="6260659" y="553928"/>
+                  </a:lnTo>
+                  <a:lnTo>
+                    <a:pt x="6190315" y="551508"/>
+                  </a:lnTo>
+                  <a:lnTo>
+                    <a:pt x="6119970" y="549042"/>
+                  </a:lnTo>
+                  <a:lnTo>
+                    <a:pt x="6049626" y="546530"/>
+                  </a:lnTo>
+                  <a:lnTo>
+                    <a:pt x="5979281" y="543969"/>
+                  </a:lnTo>
+                  <a:lnTo>
+                    <a:pt x="5908937" y="541360"/>
+                  </a:lnTo>
+                  <a:lnTo>
+                    <a:pt x="5838592" y="538701"/>
+                  </a:lnTo>
+                  <a:lnTo>
+                    <a:pt x="5768248" y="535991"/>
+                  </a:lnTo>
+                  <a:lnTo>
+                    <a:pt x="5697903" y="533230"/>
+                  </a:lnTo>
+                  <a:lnTo>
+                    <a:pt x="5627559" y="530416"/>
+                  </a:lnTo>
+                  <a:lnTo>
+                    <a:pt x="5557214" y="527549"/>
+                  </a:lnTo>
+                  <a:lnTo>
+                    <a:pt x="5486870" y="524627"/>
+                  </a:lnTo>
+                  <a:lnTo>
+                    <a:pt x="5416525" y="521649"/>
+                  </a:lnTo>
+                  <a:lnTo>
+                    <a:pt x="5346181" y="518615"/>
+                  </a:lnTo>
+                  <a:lnTo>
+                    <a:pt x="5275836" y="515522"/>
+                  </a:lnTo>
+                  <a:lnTo>
+                    <a:pt x="5205492" y="512371"/>
+                  </a:lnTo>
+                  <a:lnTo>
+                    <a:pt x="5135147" y="509160"/>
+                  </a:lnTo>
+                  <a:lnTo>
+                    <a:pt x="5064803" y="505888"/>
+                  </a:lnTo>
+                  <a:lnTo>
+                    <a:pt x="4994458" y="502554"/>
+                  </a:lnTo>
+                  <a:lnTo>
+                    <a:pt x="4924114" y="499156"/>
+                  </a:lnTo>
+                  <a:lnTo>
+                    <a:pt x="4853769" y="495693"/>
+                  </a:lnTo>
+                  <a:lnTo>
+                    <a:pt x="4783425" y="492164"/>
+                  </a:lnTo>
+                  <a:lnTo>
+                    <a:pt x="4713080" y="488569"/>
+                  </a:lnTo>
+                  <a:lnTo>
+                    <a:pt x="4642736" y="484904"/>
+                  </a:lnTo>
+                  <a:lnTo>
+                    <a:pt x="4572391" y="481170"/>
+                  </a:lnTo>
+                  <a:lnTo>
+                    <a:pt x="4502047" y="477365"/>
+                  </a:lnTo>
+                  <a:lnTo>
+                    <a:pt x="4431702" y="473488"/>
+                  </a:lnTo>
+                  <a:lnTo>
+                    <a:pt x="4361358" y="469536"/>
+                  </a:lnTo>
+                  <a:lnTo>
+                    <a:pt x="4291013" y="465509"/>
+                  </a:lnTo>
+                  <a:lnTo>
+                    <a:pt x="4220669" y="461406"/>
+                  </a:lnTo>
+                  <a:lnTo>
+                    <a:pt x="4150324" y="457225"/>
+                  </a:lnTo>
+                  <a:lnTo>
+                    <a:pt x="4079980" y="452963"/>
+                  </a:lnTo>
+                  <a:lnTo>
+                    <a:pt x="4009635" y="448621"/>
+                  </a:lnTo>
+                  <a:lnTo>
+                    <a:pt x="3939291" y="444196"/>
+                  </a:lnTo>
+                  <a:lnTo>
+                    <a:pt x="3868946" y="439687"/>
+                  </a:lnTo>
+                  <a:lnTo>
+                    <a:pt x="3798602" y="435092"/>
+                  </a:lnTo>
+                  <a:lnTo>
+                    <a:pt x="3728257" y="430409"/>
+                  </a:lnTo>
+                  <a:lnTo>
+                    <a:pt x="3657913" y="425638"/>
+                  </a:lnTo>
+                  <a:lnTo>
+                    <a:pt x="3587569" y="420775"/>
+                  </a:lnTo>
+                  <a:lnTo>
+                    <a:pt x="3517224" y="415820"/>
+                  </a:lnTo>
+                  <a:lnTo>
+                    <a:pt x="3446880" y="410770"/>
+                  </a:lnTo>
+                  <a:lnTo>
+                    <a:pt x="3376535" y="405624"/>
+                  </a:lnTo>
+                  <a:lnTo>
+                    <a:pt x="3306191" y="400381"/>
+                  </a:lnTo>
+                  <a:lnTo>
+                    <a:pt x="3235846" y="395037"/>
+                  </a:lnTo>
+                  <a:lnTo>
+                    <a:pt x="3165502" y="389592"/>
+                  </a:lnTo>
+                  <a:lnTo>
+                    <a:pt x="3095157" y="384043"/>
+                  </a:lnTo>
+                  <a:lnTo>
+                    <a:pt x="3024813" y="381306"/>
+                  </a:lnTo>
+                  <a:lnTo>
+                    <a:pt x="2954468" y="380684"/>
+                  </a:lnTo>
+                  <a:lnTo>
+                    <a:pt x="2884124" y="380062"/>
+                  </a:lnTo>
+                  <a:lnTo>
+                    <a:pt x="2813779" y="379437"/>
+                  </a:lnTo>
+                  <a:lnTo>
+                    <a:pt x="2743435" y="378812"/>
+                  </a:lnTo>
+                  <a:lnTo>
+                    <a:pt x="2673090" y="378185"/>
+                  </a:lnTo>
+                  <a:lnTo>
+                    <a:pt x="2602746" y="377557"/>
+                  </a:lnTo>
+                  <a:lnTo>
+                    <a:pt x="2532401" y="376928"/>
+                  </a:lnTo>
+                  <a:lnTo>
+                    <a:pt x="2462057" y="376297"/>
+                  </a:lnTo>
+                  <a:lnTo>
+                    <a:pt x="2391712" y="375665"/>
+                  </a:lnTo>
+                  <a:lnTo>
+                    <a:pt x="2321368" y="375032"/>
+                  </a:lnTo>
+                  <a:lnTo>
+                    <a:pt x="2251023" y="374398"/>
+                  </a:lnTo>
+                  <a:lnTo>
+                    <a:pt x="2180679" y="373762"/>
+                  </a:lnTo>
+                  <a:lnTo>
+                    <a:pt x="2110334" y="373125"/>
+                  </a:lnTo>
+                  <a:lnTo>
+                    <a:pt x="2039990" y="372486"/>
+                  </a:lnTo>
+                  <a:lnTo>
+                    <a:pt x="1969645" y="371846"/>
+                  </a:lnTo>
+                  <a:lnTo>
+                    <a:pt x="1899301" y="371205"/>
+                  </a:lnTo>
+                  <a:lnTo>
+                    <a:pt x="1828956" y="370563"/>
+                  </a:lnTo>
+                  <a:lnTo>
+                    <a:pt x="1758612" y="369919"/>
+                  </a:lnTo>
+                  <a:lnTo>
+                    <a:pt x="1688267" y="369274"/>
+                  </a:lnTo>
+                  <a:lnTo>
+                    <a:pt x="1617923" y="368627"/>
+                  </a:lnTo>
+                  <a:lnTo>
+                    <a:pt x="1547578" y="367980"/>
+                  </a:lnTo>
+                  <a:lnTo>
+                    <a:pt x="1477234" y="367330"/>
+                  </a:lnTo>
+                  <a:lnTo>
+                    <a:pt x="1406889" y="366680"/>
+                  </a:lnTo>
+                  <a:lnTo>
+                    <a:pt x="1336545" y="366028"/>
+                  </a:lnTo>
+                  <a:lnTo>
+                    <a:pt x="1266200" y="365375"/>
+                  </a:lnTo>
+                  <a:lnTo>
+                    <a:pt x="1195856" y="364720"/>
+                  </a:lnTo>
+                  <a:lnTo>
+                    <a:pt x="1125511" y="364064"/>
+                  </a:lnTo>
+                  <a:lnTo>
+                    <a:pt x="1055167" y="363407"/>
+                  </a:lnTo>
+                  <a:lnTo>
+                    <a:pt x="984822" y="362748"/>
+                  </a:lnTo>
+                  <a:lnTo>
+                    <a:pt x="914478" y="362088"/>
+                  </a:lnTo>
+                  <a:lnTo>
+                    <a:pt x="844133" y="361427"/>
+                  </a:lnTo>
+                  <a:lnTo>
+                    <a:pt x="773789" y="360764"/>
+                  </a:lnTo>
+                  <a:lnTo>
+                    <a:pt x="703444" y="360100"/>
+                  </a:lnTo>
+                  <a:lnTo>
+                    <a:pt x="633100" y="359435"/>
+                  </a:lnTo>
+                  <a:lnTo>
+                    <a:pt x="562755" y="358768"/>
+                  </a:lnTo>
+                  <a:lnTo>
+                    <a:pt x="492411" y="358099"/>
+                  </a:lnTo>
+                  <a:lnTo>
+                    <a:pt x="422066" y="357430"/>
+                  </a:lnTo>
+                  <a:lnTo>
+                    <a:pt x="351722" y="356759"/>
+                  </a:lnTo>
+                  <a:lnTo>
+                    <a:pt x="281377" y="356086"/>
+                  </a:lnTo>
+                  <a:lnTo>
+                    <a:pt x="211033" y="355412"/>
+                  </a:lnTo>
+                  <a:lnTo>
+                    <a:pt x="140688" y="354737"/>
+                  </a:lnTo>
+                  <a:lnTo>
+                    <a:pt x="70344" y="354061"/>
+                  </a:lnTo>
+                  <a:lnTo>
+                    <a:pt x="0" y="353383"/>
                   </a:lnTo>
                   <a:close/>
                 </a:path>
@@ -3670,643 +3705,318 @@
         </p:sp>
         <p:sp>
           <p:nvSpPr>
-            <p:cNvPr id="23" name="pl23"/>
-            <p:cNvSpPr/>
-            <p:nvPr/>
-          </p:nvSpPr>
-          <p:spPr>
-            <a:xfrm>
-              <a:off x="1172049" y="3670182"/>
-              <a:ext cx="7090630" cy="1147580"/>
-            </a:xfrm>
-            <a:custGeom>
-              <a:avLst/>
-              <a:pathLst>
-                <a:path w="7090630" h="1147580">
-                  <a:moveTo>
-                    <a:pt x="0" y="0"/>
-                  </a:moveTo>
-                  <a:lnTo>
-                    <a:pt x="71622" y="35262"/>
-                  </a:lnTo>
-                  <a:lnTo>
-                    <a:pt x="143245" y="69865"/>
-                  </a:lnTo>
-                  <a:lnTo>
-                    <a:pt x="214867" y="103822"/>
-                  </a:lnTo>
-                  <a:lnTo>
-                    <a:pt x="286490" y="137145"/>
-                  </a:lnTo>
-                  <a:lnTo>
-                    <a:pt x="358112" y="169844"/>
-                  </a:lnTo>
-                  <a:lnTo>
-                    <a:pt x="429735" y="201933"/>
-                  </a:lnTo>
-                  <a:lnTo>
-                    <a:pt x="501357" y="233422"/>
-                  </a:lnTo>
-                  <a:lnTo>
-                    <a:pt x="572980" y="264323"/>
-                  </a:lnTo>
-                  <a:lnTo>
-                    <a:pt x="644602" y="294646"/>
-                  </a:lnTo>
-                  <a:lnTo>
-                    <a:pt x="716225" y="324403"/>
-                  </a:lnTo>
-                  <a:lnTo>
-                    <a:pt x="787847" y="353603"/>
-                  </a:lnTo>
-                  <a:lnTo>
-                    <a:pt x="859470" y="382258"/>
-                  </a:lnTo>
-                  <a:lnTo>
-                    <a:pt x="931092" y="410377"/>
-                  </a:lnTo>
-                  <a:lnTo>
-                    <a:pt x="1002715" y="437971"/>
-                  </a:lnTo>
-                  <a:lnTo>
-                    <a:pt x="1074337" y="465050"/>
-                  </a:lnTo>
-                  <a:lnTo>
-                    <a:pt x="1145960" y="491622"/>
-                  </a:lnTo>
-                  <a:lnTo>
-                    <a:pt x="1217582" y="517698"/>
-                  </a:lnTo>
-                  <a:lnTo>
-                    <a:pt x="1289205" y="543286"/>
-                  </a:lnTo>
-                  <a:lnTo>
-                    <a:pt x="1360827" y="568397"/>
-                  </a:lnTo>
-                  <a:lnTo>
-                    <a:pt x="1432450" y="593038"/>
-                  </a:lnTo>
-                  <a:lnTo>
-                    <a:pt x="1504073" y="617219"/>
-                  </a:lnTo>
-                  <a:lnTo>
-                    <a:pt x="1575695" y="640947"/>
-                  </a:lnTo>
-                  <a:lnTo>
-                    <a:pt x="1647318" y="664233"/>
-                  </a:lnTo>
-                  <a:lnTo>
-                    <a:pt x="1718940" y="687083"/>
-                  </a:lnTo>
-                  <a:lnTo>
-                    <a:pt x="1790563" y="709507"/>
-                  </a:lnTo>
-                  <a:lnTo>
-                    <a:pt x="1862185" y="731511"/>
-                  </a:lnTo>
-                  <a:lnTo>
-                    <a:pt x="1933808" y="753104"/>
-                  </a:lnTo>
-                  <a:lnTo>
-                    <a:pt x="2005430" y="774294"/>
-                  </a:lnTo>
-                  <a:lnTo>
-                    <a:pt x="2077053" y="795087"/>
-                  </a:lnTo>
-                  <a:lnTo>
-                    <a:pt x="2148675" y="815493"/>
-                  </a:lnTo>
-                  <a:lnTo>
-                    <a:pt x="2220298" y="835516"/>
-                  </a:lnTo>
-                  <a:lnTo>
-                    <a:pt x="2291920" y="855166"/>
-                  </a:lnTo>
-                  <a:lnTo>
-                    <a:pt x="2363543" y="874449"/>
-                  </a:lnTo>
-                  <a:lnTo>
-                    <a:pt x="2435165" y="893371"/>
-                  </a:lnTo>
-                  <a:lnTo>
-                    <a:pt x="2506788" y="911939"/>
-                  </a:lnTo>
-                  <a:lnTo>
-                    <a:pt x="2578410" y="930161"/>
-                  </a:lnTo>
-                  <a:lnTo>
-                    <a:pt x="2650033" y="948042"/>
-                  </a:lnTo>
-                  <a:lnTo>
-                    <a:pt x="2721655" y="965589"/>
-                  </a:lnTo>
-                  <a:lnTo>
-                    <a:pt x="2793278" y="982808"/>
-                  </a:lnTo>
-                  <a:lnTo>
-                    <a:pt x="2864901" y="999705"/>
-                  </a:lnTo>
-                  <a:lnTo>
-                    <a:pt x="2936523" y="1016287"/>
-                  </a:lnTo>
-                  <a:lnTo>
-                    <a:pt x="3008146" y="1032559"/>
-                  </a:lnTo>
-                  <a:lnTo>
-                    <a:pt x="3079768" y="1048526"/>
-                  </a:lnTo>
-                  <a:lnTo>
-                    <a:pt x="3151391" y="1058330"/>
-                  </a:lnTo>
-                  <a:lnTo>
-                    <a:pt x="3223013" y="1060045"/>
-                  </a:lnTo>
-                  <a:lnTo>
-                    <a:pt x="3294636" y="1061757"/>
-                  </a:lnTo>
-                  <a:lnTo>
-                    <a:pt x="3366258" y="1063465"/>
-                  </a:lnTo>
-                  <a:lnTo>
-                    <a:pt x="3437881" y="1065169"/>
-                  </a:lnTo>
-                  <a:lnTo>
-                    <a:pt x="3509503" y="1066870"/>
-                  </a:lnTo>
-                  <a:lnTo>
-                    <a:pt x="3581126" y="1068568"/>
-                  </a:lnTo>
-                  <a:lnTo>
-                    <a:pt x="3652748" y="1070262"/>
-                  </a:lnTo>
-                  <a:lnTo>
-                    <a:pt x="3724371" y="1071952"/>
-                  </a:lnTo>
-                  <a:lnTo>
-                    <a:pt x="3795993" y="1073639"/>
-                  </a:lnTo>
-                  <a:lnTo>
-                    <a:pt x="3867616" y="1075323"/>
-                  </a:lnTo>
-                  <a:lnTo>
-                    <a:pt x="3939238" y="1077003"/>
-                  </a:lnTo>
-                  <a:lnTo>
-                    <a:pt x="4010861" y="1078679"/>
-                  </a:lnTo>
-                  <a:lnTo>
-                    <a:pt x="4082483" y="1080352"/>
-                  </a:lnTo>
-                  <a:lnTo>
-                    <a:pt x="4154106" y="1082022"/>
-                  </a:lnTo>
-                  <a:lnTo>
-                    <a:pt x="4225729" y="1083688"/>
-                  </a:lnTo>
-                  <a:lnTo>
-                    <a:pt x="4297351" y="1085351"/>
-                  </a:lnTo>
-                  <a:lnTo>
-                    <a:pt x="4368974" y="1087010"/>
-                  </a:lnTo>
-                  <a:lnTo>
-                    <a:pt x="4440596" y="1088666"/>
-                  </a:lnTo>
-                  <a:lnTo>
-                    <a:pt x="4512219" y="1090318"/>
-                  </a:lnTo>
-                  <a:lnTo>
-                    <a:pt x="4583841" y="1091967"/>
-                  </a:lnTo>
-                  <a:lnTo>
-                    <a:pt x="4655464" y="1093612"/>
-                  </a:lnTo>
-                  <a:lnTo>
-                    <a:pt x="4727086" y="1095255"/>
-                  </a:lnTo>
-                  <a:lnTo>
-                    <a:pt x="4798709" y="1096893"/>
-                  </a:lnTo>
-                  <a:lnTo>
-                    <a:pt x="4870331" y="1098529"/>
-                  </a:lnTo>
-                  <a:lnTo>
-                    <a:pt x="4941954" y="1100161"/>
-                  </a:lnTo>
-                  <a:lnTo>
-                    <a:pt x="5013576" y="1101789"/>
-                  </a:lnTo>
-                  <a:lnTo>
-                    <a:pt x="5085199" y="1103414"/>
-                  </a:lnTo>
-                  <a:lnTo>
-                    <a:pt x="5156821" y="1105036"/>
-                  </a:lnTo>
-                  <a:lnTo>
-                    <a:pt x="5228444" y="1106655"/>
-                  </a:lnTo>
-                  <a:lnTo>
-                    <a:pt x="5300066" y="1108270"/>
-                  </a:lnTo>
-                  <a:lnTo>
-                    <a:pt x="5371689" y="1109882"/>
-                  </a:lnTo>
-                  <a:lnTo>
-                    <a:pt x="5443311" y="1111490"/>
-                  </a:lnTo>
-                  <a:lnTo>
-                    <a:pt x="5514934" y="1113095"/>
-                  </a:lnTo>
-                  <a:lnTo>
-                    <a:pt x="5586557" y="1114697"/>
-                  </a:lnTo>
-                  <a:lnTo>
-                    <a:pt x="5658179" y="1116296"/>
-                  </a:lnTo>
-                  <a:lnTo>
-                    <a:pt x="5729802" y="1117891"/>
-                  </a:lnTo>
-                  <a:lnTo>
-                    <a:pt x="5801424" y="1119483"/>
-                  </a:lnTo>
-                  <a:lnTo>
-                    <a:pt x="5873047" y="1121071"/>
-                  </a:lnTo>
-                  <a:lnTo>
-                    <a:pt x="5944669" y="1122656"/>
-                  </a:lnTo>
-                  <a:lnTo>
-                    <a:pt x="6016292" y="1124238"/>
-                  </a:lnTo>
-                  <a:lnTo>
-                    <a:pt x="6087914" y="1125817"/>
-                  </a:lnTo>
-                  <a:lnTo>
-                    <a:pt x="6159537" y="1127393"/>
-                  </a:lnTo>
-                  <a:lnTo>
-                    <a:pt x="6231159" y="1128965"/>
-                  </a:lnTo>
-                  <a:lnTo>
-                    <a:pt x="6302782" y="1130534"/>
-                  </a:lnTo>
-                  <a:lnTo>
-                    <a:pt x="6374404" y="1132100"/>
-                  </a:lnTo>
-                  <a:lnTo>
-                    <a:pt x="6446027" y="1133662"/>
-                  </a:lnTo>
-                  <a:lnTo>
-                    <a:pt x="6517649" y="1135221"/>
-                  </a:lnTo>
-                  <a:lnTo>
-                    <a:pt x="6589272" y="1136777"/>
-                  </a:lnTo>
-                  <a:lnTo>
-                    <a:pt x="6660894" y="1138330"/>
-                  </a:lnTo>
-                  <a:lnTo>
-                    <a:pt x="6732517" y="1139880"/>
-                  </a:lnTo>
-                  <a:lnTo>
-                    <a:pt x="6804139" y="1141426"/>
-                  </a:lnTo>
-                  <a:lnTo>
-                    <a:pt x="6875762" y="1142969"/>
-                  </a:lnTo>
-                  <a:lnTo>
-                    <a:pt x="6947385" y="1144509"/>
-                  </a:lnTo>
-                  <a:lnTo>
-                    <a:pt x="7019007" y="1146046"/>
-                  </a:lnTo>
-                  <a:lnTo>
-                    <a:pt x="7090630" y="1147580"/>
-                  </a:lnTo>
-                </a:path>
-              </a:pathLst>
-            </a:custGeom>
-          </p:spPr>
-          <p:txBody>
-            <a:bodyPr/>
-            <a:lstStyle/>
-            <a:p/>
-          </p:txBody>
-        </p:sp>
-        <p:sp>
-          <p:nvSpPr>
             <p:cNvPr id="24" name="pl24"/>
             <p:cNvSpPr/>
             <p:nvPr/>
           </p:nvSpPr>
           <p:spPr>
             <a:xfrm>
-              <a:off x="1172049" y="4649417"/>
-              <a:ext cx="7090630" cy="616248"/>
+              <a:off x="1235312" y="2719296"/>
+              <a:ext cx="6964104" cy="414134"/>
             </a:xfrm>
             <a:custGeom>
               <a:avLst/>
               <a:pathLst>
-                <a:path w="7090630" h="616248">
+                <a:path w="6964104" h="414134">
                   <a:moveTo>
-                    <a:pt x="7090630" y="616248"/>
+                    <a:pt x="0" y="0"/>
                   </a:moveTo>
                   <a:lnTo>
-                    <a:pt x="7019007" y="610696"/>
-                  </a:lnTo>
-                  <a:lnTo>
-                    <a:pt x="6947385" y="605038"/>
-                  </a:lnTo>
-                  <a:lnTo>
-                    <a:pt x="6875762" y="599272"/>
-                  </a:lnTo>
-                  <a:lnTo>
-                    <a:pt x="6804139" y="593396"/>
-                  </a:lnTo>
-                  <a:lnTo>
-                    <a:pt x="6732517" y="587409"/>
-                  </a:lnTo>
-                  <a:lnTo>
-                    <a:pt x="6660894" y="581307"/>
-                  </a:lnTo>
-                  <a:lnTo>
-                    <a:pt x="6589272" y="575089"/>
-                  </a:lnTo>
-                  <a:lnTo>
-                    <a:pt x="6517649" y="568753"/>
-                  </a:lnTo>
-                  <a:lnTo>
-                    <a:pt x="6446027" y="562296"/>
-                  </a:lnTo>
-                  <a:lnTo>
-                    <a:pt x="6374404" y="555717"/>
-                  </a:lnTo>
-                  <a:lnTo>
-                    <a:pt x="6302782" y="549012"/>
-                  </a:lnTo>
-                  <a:lnTo>
-                    <a:pt x="6231159" y="542179"/>
-                  </a:lnTo>
-                  <a:lnTo>
-                    <a:pt x="6159537" y="535216"/>
-                  </a:lnTo>
-                  <a:lnTo>
-                    <a:pt x="6087914" y="528121"/>
-                  </a:lnTo>
-                  <a:lnTo>
-                    <a:pt x="6016292" y="520890"/>
-                  </a:lnTo>
-                  <a:lnTo>
-                    <a:pt x="5944669" y="513522"/>
-                  </a:lnTo>
-                  <a:lnTo>
-                    <a:pt x="5873047" y="506013"/>
-                  </a:lnTo>
-                  <a:lnTo>
-                    <a:pt x="5801424" y="498362"/>
-                  </a:lnTo>
-                  <a:lnTo>
-                    <a:pt x="5729802" y="490565"/>
-                  </a:lnTo>
-                  <a:lnTo>
-                    <a:pt x="5658179" y="482619"/>
-                  </a:lnTo>
-                  <a:lnTo>
-                    <a:pt x="5586557" y="474522"/>
-                  </a:lnTo>
-                  <a:lnTo>
-                    <a:pt x="5514934" y="466271"/>
-                  </a:lnTo>
-                  <a:lnTo>
-                    <a:pt x="5443311" y="457862"/>
-                  </a:lnTo>
-                  <a:lnTo>
-                    <a:pt x="5371689" y="449294"/>
-                  </a:lnTo>
-                  <a:lnTo>
-                    <a:pt x="5300066" y="440563"/>
-                  </a:lnTo>
-                  <a:lnTo>
-                    <a:pt x="5228444" y="431665"/>
-                  </a:lnTo>
-                  <a:lnTo>
-                    <a:pt x="5156821" y="422597"/>
-                  </a:lnTo>
-                  <a:lnTo>
-                    <a:pt x="5085199" y="413357"/>
-                  </a:lnTo>
-                  <a:lnTo>
-                    <a:pt x="5013576" y="403942"/>
-                  </a:lnTo>
-                  <a:lnTo>
-                    <a:pt x="4941954" y="394346"/>
-                  </a:lnTo>
-                  <a:lnTo>
-                    <a:pt x="4870331" y="384569"/>
-                  </a:lnTo>
-                  <a:lnTo>
-                    <a:pt x="4798709" y="374604"/>
-                  </a:lnTo>
-                  <a:lnTo>
-                    <a:pt x="4727086" y="364451"/>
-                  </a:lnTo>
-                  <a:lnTo>
-                    <a:pt x="4655464" y="354104"/>
-                  </a:lnTo>
-                  <a:lnTo>
-                    <a:pt x="4583841" y="343559"/>
-                  </a:lnTo>
-                  <a:lnTo>
-                    <a:pt x="4512219" y="332814"/>
-                  </a:lnTo>
-                  <a:lnTo>
-                    <a:pt x="4440596" y="321865"/>
-                  </a:lnTo>
-                  <a:lnTo>
-                    <a:pt x="4368974" y="310707"/>
-                  </a:lnTo>
-                  <a:lnTo>
-                    <a:pt x="4297351" y="299336"/>
-                  </a:lnTo>
-                  <a:lnTo>
-                    <a:pt x="4225729" y="287749"/>
-                  </a:lnTo>
-                  <a:lnTo>
-                    <a:pt x="4154106" y="275941"/>
-                  </a:lnTo>
-                  <a:lnTo>
-                    <a:pt x="4082483" y="263909"/>
-                  </a:lnTo>
-                  <a:lnTo>
-                    <a:pt x="4010861" y="251647"/>
-                  </a:lnTo>
-                  <a:lnTo>
-                    <a:pt x="3939238" y="239152"/>
-                  </a:lnTo>
-                  <a:lnTo>
-                    <a:pt x="3867616" y="226419"/>
-                  </a:lnTo>
-                  <a:lnTo>
-                    <a:pt x="3795993" y="213443"/>
-                  </a:lnTo>
-                  <a:lnTo>
-                    <a:pt x="3724371" y="200220"/>
-                  </a:lnTo>
-                  <a:lnTo>
-                    <a:pt x="3652748" y="186746"/>
-                  </a:lnTo>
-                  <a:lnTo>
-                    <a:pt x="3581126" y="173015"/>
-                  </a:lnTo>
-                  <a:lnTo>
-                    <a:pt x="3509503" y="159022"/>
-                  </a:lnTo>
-                  <a:lnTo>
-                    <a:pt x="3437881" y="144763"/>
-                  </a:lnTo>
-                  <a:lnTo>
-                    <a:pt x="3366258" y="130233"/>
-                  </a:lnTo>
-                  <a:lnTo>
-                    <a:pt x="3294636" y="115426"/>
-                  </a:lnTo>
-                  <a:lnTo>
-                    <a:pt x="3223013" y="100336"/>
-                  </a:lnTo>
-                  <a:lnTo>
-                    <a:pt x="3151391" y="84960"/>
-                  </a:lnTo>
-                  <a:lnTo>
-                    <a:pt x="3079768" y="77376"/>
-                  </a:lnTo>
-                  <a:lnTo>
-                    <a:pt x="3008146" y="75654"/>
-                  </a:lnTo>
-                  <a:lnTo>
-                    <a:pt x="2936523" y="73928"/>
-                  </a:lnTo>
-                  <a:lnTo>
-                    <a:pt x="2864901" y="72198"/>
-                  </a:lnTo>
-                  <a:lnTo>
-                    <a:pt x="2793278" y="70465"/>
-                  </a:lnTo>
-                  <a:lnTo>
-                    <a:pt x="2721655" y="68729"/>
-                  </a:lnTo>
-                  <a:lnTo>
-                    <a:pt x="2650033" y="66988"/>
-                  </a:lnTo>
-                  <a:lnTo>
-                    <a:pt x="2578410" y="65245"/>
-                  </a:lnTo>
-                  <a:lnTo>
-                    <a:pt x="2506788" y="63497"/>
-                  </a:lnTo>
-                  <a:lnTo>
-                    <a:pt x="2435165" y="61746"/>
-                  </a:lnTo>
-                  <a:lnTo>
-                    <a:pt x="2363543" y="59991"/>
-                  </a:lnTo>
-                  <a:lnTo>
-                    <a:pt x="2291920" y="58233"/>
-                  </a:lnTo>
-                  <a:lnTo>
-                    <a:pt x="2220298" y="56471"/>
-                  </a:lnTo>
-                  <a:lnTo>
-                    <a:pt x="2148675" y="54706"/>
-                  </a:lnTo>
-                  <a:lnTo>
-                    <a:pt x="2077053" y="52936"/>
-                  </a:lnTo>
-                  <a:lnTo>
-                    <a:pt x="2005430" y="51163"/>
-                  </a:lnTo>
-                  <a:lnTo>
-                    <a:pt x="1933808" y="49387"/>
-                  </a:lnTo>
-                  <a:lnTo>
-                    <a:pt x="1862185" y="47606"/>
-                  </a:lnTo>
-                  <a:lnTo>
-                    <a:pt x="1790563" y="45822"/>
-                  </a:lnTo>
-                  <a:lnTo>
-                    <a:pt x="1718940" y="44035"/>
-                  </a:lnTo>
-                  <a:lnTo>
-                    <a:pt x="1647318" y="42243"/>
-                  </a:lnTo>
-                  <a:lnTo>
-                    <a:pt x="1575695" y="40448"/>
-                  </a:lnTo>
-                  <a:lnTo>
-                    <a:pt x="1504073" y="38649"/>
-                  </a:lnTo>
-                  <a:lnTo>
-                    <a:pt x="1432450" y="36847"/>
-                  </a:lnTo>
-                  <a:lnTo>
-                    <a:pt x="1360827" y="35040"/>
-                  </a:lnTo>
-                  <a:lnTo>
-                    <a:pt x="1289205" y="33230"/>
-                  </a:lnTo>
-                  <a:lnTo>
-                    <a:pt x="1217582" y="31416"/>
-                  </a:lnTo>
-                  <a:lnTo>
-                    <a:pt x="1145960" y="29599"/>
-                  </a:lnTo>
-                  <a:lnTo>
-                    <a:pt x="1074337" y="27778"/>
-                  </a:lnTo>
-                  <a:lnTo>
-                    <a:pt x="1002715" y="25952"/>
-                  </a:lnTo>
-                  <a:lnTo>
-                    <a:pt x="931092" y="24123"/>
-                  </a:lnTo>
-                  <a:lnTo>
-                    <a:pt x="859470" y="22291"/>
-                  </a:lnTo>
-                  <a:lnTo>
-                    <a:pt x="787847" y="20454"/>
-                  </a:lnTo>
-                  <a:lnTo>
-                    <a:pt x="716225" y="18614"/>
-                  </a:lnTo>
-                  <a:lnTo>
-                    <a:pt x="644602" y="16770"/>
-                  </a:lnTo>
-                  <a:lnTo>
-                    <a:pt x="572980" y="14922"/>
-                  </a:lnTo>
-                  <a:lnTo>
-                    <a:pt x="501357" y="13070"/>
-                  </a:lnTo>
-                  <a:lnTo>
-                    <a:pt x="429735" y="11214"/>
-                  </a:lnTo>
-                  <a:lnTo>
-                    <a:pt x="358112" y="9355"/>
-                  </a:lnTo>
-                  <a:lnTo>
-                    <a:pt x="286490" y="7492"/>
-                  </a:lnTo>
-                  <a:lnTo>
-                    <a:pt x="214867" y="5624"/>
-                  </a:lnTo>
-                  <a:lnTo>
-                    <a:pt x="143245" y="3753"/>
-                  </a:lnTo>
-                  <a:lnTo>
-                    <a:pt x="71622" y="1878"/>
-                  </a:lnTo>
-                  <a:lnTo>
-                    <a:pt x="0" y="0"/>
+                    <a:pt x="70344" y="12725"/>
+                  </a:lnTo>
+                  <a:lnTo>
+                    <a:pt x="140688" y="25212"/>
+                  </a:lnTo>
+                  <a:lnTo>
+                    <a:pt x="211033" y="37467"/>
+                  </a:lnTo>
+                  <a:lnTo>
+                    <a:pt x="281377" y="49492"/>
+                  </a:lnTo>
+                  <a:lnTo>
+                    <a:pt x="351722" y="61293"/>
+                  </a:lnTo>
+                  <a:lnTo>
+                    <a:pt x="422066" y="72873"/>
+                  </a:lnTo>
+                  <a:lnTo>
+                    <a:pt x="492411" y="84236"/>
+                  </a:lnTo>
+                  <a:lnTo>
+                    <a:pt x="562755" y="95388"/>
+                  </a:lnTo>
+                  <a:lnTo>
+                    <a:pt x="633100" y="106330"/>
+                  </a:lnTo>
+                  <a:lnTo>
+                    <a:pt x="703444" y="117069"/>
+                  </a:lnTo>
+                  <a:lnTo>
+                    <a:pt x="773789" y="127607"/>
+                  </a:lnTo>
+                  <a:lnTo>
+                    <a:pt x="844133" y="137948"/>
+                  </a:lnTo>
+                  <a:lnTo>
+                    <a:pt x="914478" y="148095"/>
+                  </a:lnTo>
+                  <a:lnTo>
+                    <a:pt x="984822" y="158053"/>
+                  </a:lnTo>
+                  <a:lnTo>
+                    <a:pt x="1055167" y="167825"/>
+                  </a:lnTo>
+                  <a:lnTo>
+                    <a:pt x="1125511" y="177414"/>
+                  </a:lnTo>
+                  <a:lnTo>
+                    <a:pt x="1195856" y="186825"/>
+                  </a:lnTo>
+                  <a:lnTo>
+                    <a:pt x="1266200" y="196059"/>
+                  </a:lnTo>
+                  <a:lnTo>
+                    <a:pt x="1336545" y="205121"/>
+                  </a:lnTo>
+                  <a:lnTo>
+                    <a:pt x="1406889" y="214013"/>
+                  </a:lnTo>
+                  <a:lnTo>
+                    <a:pt x="1477234" y="222739"/>
+                  </a:lnTo>
+                  <a:lnTo>
+                    <a:pt x="1547578" y="231303"/>
+                  </a:lnTo>
+                  <a:lnTo>
+                    <a:pt x="1617923" y="239706"/>
+                  </a:lnTo>
+                  <a:lnTo>
+                    <a:pt x="1688267" y="247952"/>
+                  </a:lnTo>
+                  <a:lnTo>
+                    <a:pt x="1758612" y="256044"/>
+                  </a:lnTo>
+                  <a:lnTo>
+                    <a:pt x="1828956" y="263985"/>
+                  </a:lnTo>
+                  <a:lnTo>
+                    <a:pt x="1899301" y="271777"/>
+                  </a:lnTo>
+                  <a:lnTo>
+                    <a:pt x="1969645" y="279424"/>
+                  </a:lnTo>
+                  <a:lnTo>
+                    <a:pt x="2039990" y="286928"/>
+                  </a:lnTo>
+                  <a:lnTo>
+                    <a:pt x="2110334" y="294292"/>
+                  </a:lnTo>
+                  <a:lnTo>
+                    <a:pt x="2180679" y="301518"/>
+                  </a:lnTo>
+                  <a:lnTo>
+                    <a:pt x="2251023" y="308609"/>
+                  </a:lnTo>
+                  <a:lnTo>
+                    <a:pt x="2321368" y="315568"/>
+                  </a:lnTo>
+                  <a:lnTo>
+                    <a:pt x="2391712" y="322396"/>
+                  </a:lnTo>
+                  <a:lnTo>
+                    <a:pt x="2462057" y="329097"/>
+                  </a:lnTo>
+                  <a:lnTo>
+                    <a:pt x="2532401" y="335673"/>
+                  </a:lnTo>
+                  <a:lnTo>
+                    <a:pt x="2602746" y="342126"/>
+                  </a:lnTo>
+                  <a:lnTo>
+                    <a:pt x="2673090" y="348458"/>
+                  </a:lnTo>
+                  <a:lnTo>
+                    <a:pt x="2743435" y="354672"/>
+                  </a:lnTo>
+                  <a:lnTo>
+                    <a:pt x="2813779" y="360770"/>
+                  </a:lnTo>
+                  <a:lnTo>
+                    <a:pt x="2884124" y="366754"/>
+                  </a:lnTo>
+                  <a:lnTo>
+                    <a:pt x="2954468" y="372626"/>
+                  </a:lnTo>
+                  <a:lnTo>
+                    <a:pt x="3024813" y="378388"/>
+                  </a:lnTo>
+                  <a:lnTo>
+                    <a:pt x="3095157" y="381926"/>
+                  </a:lnTo>
+                  <a:lnTo>
+                    <a:pt x="3165502" y="382545"/>
+                  </a:lnTo>
+                  <a:lnTo>
+                    <a:pt x="3235846" y="383163"/>
+                  </a:lnTo>
+                  <a:lnTo>
+                    <a:pt x="3306191" y="383779"/>
+                  </a:lnTo>
+                  <a:lnTo>
+                    <a:pt x="3376535" y="384394"/>
+                  </a:lnTo>
+                  <a:lnTo>
+                    <a:pt x="3446880" y="385008"/>
+                  </a:lnTo>
+                  <a:lnTo>
+                    <a:pt x="3517224" y="385621"/>
+                  </a:lnTo>
+                  <a:lnTo>
+                    <a:pt x="3587569" y="386232"/>
+                  </a:lnTo>
+                  <a:lnTo>
+                    <a:pt x="3657913" y="386842"/>
+                  </a:lnTo>
+                  <a:lnTo>
+                    <a:pt x="3728257" y="387451"/>
+                  </a:lnTo>
+                  <a:lnTo>
+                    <a:pt x="3798602" y="388058"/>
+                  </a:lnTo>
+                  <a:lnTo>
+                    <a:pt x="3868946" y="388665"/>
+                  </a:lnTo>
+                  <a:lnTo>
+                    <a:pt x="3939291" y="389270"/>
+                  </a:lnTo>
+                  <a:lnTo>
+                    <a:pt x="4009635" y="389873"/>
+                  </a:lnTo>
+                  <a:lnTo>
+                    <a:pt x="4079980" y="390476"/>
+                  </a:lnTo>
+                  <a:lnTo>
+                    <a:pt x="4150324" y="391077"/>
+                  </a:lnTo>
+                  <a:lnTo>
+                    <a:pt x="4220669" y="391677"/>
+                  </a:lnTo>
+                  <a:lnTo>
+                    <a:pt x="4291013" y="392276"/>
+                  </a:lnTo>
+                  <a:lnTo>
+                    <a:pt x="4361358" y="392873"/>
+                  </a:lnTo>
+                  <a:lnTo>
+                    <a:pt x="4431702" y="393470"/>
+                  </a:lnTo>
+                  <a:lnTo>
+                    <a:pt x="4502047" y="394065"/>
+                  </a:lnTo>
+                  <a:lnTo>
+                    <a:pt x="4572391" y="394659"/>
+                  </a:lnTo>
+                  <a:lnTo>
+                    <a:pt x="4642736" y="395251"/>
+                  </a:lnTo>
+                  <a:lnTo>
+                    <a:pt x="4713080" y="395843"/>
+                  </a:lnTo>
+                  <a:lnTo>
+                    <a:pt x="4783425" y="396433"/>
+                  </a:lnTo>
+                  <a:lnTo>
+                    <a:pt x="4853769" y="397022"/>
+                  </a:lnTo>
+                  <a:lnTo>
+                    <a:pt x="4924114" y="397609"/>
+                  </a:lnTo>
+                  <a:lnTo>
+                    <a:pt x="4994458" y="398196"/>
+                  </a:lnTo>
+                  <a:lnTo>
+                    <a:pt x="5064803" y="398781"/>
+                  </a:lnTo>
+                  <a:lnTo>
+                    <a:pt x="5135147" y="399365"/>
+                  </a:lnTo>
+                  <a:lnTo>
+                    <a:pt x="5205492" y="399948"/>
+                  </a:lnTo>
+                  <a:lnTo>
+                    <a:pt x="5275836" y="400530"/>
+                  </a:lnTo>
+                  <a:lnTo>
+                    <a:pt x="5346181" y="401110"/>
+                  </a:lnTo>
+                  <a:lnTo>
+                    <a:pt x="5416525" y="401690"/>
+                  </a:lnTo>
+                  <a:lnTo>
+                    <a:pt x="5486870" y="402268"/>
+                  </a:lnTo>
+                  <a:lnTo>
+                    <a:pt x="5557214" y="402844"/>
+                  </a:lnTo>
+                  <a:lnTo>
+                    <a:pt x="5627559" y="403420"/>
+                  </a:lnTo>
+                  <a:lnTo>
+                    <a:pt x="5697903" y="403995"/>
+                  </a:lnTo>
+                  <a:lnTo>
+                    <a:pt x="5768248" y="404568"/>
+                  </a:lnTo>
+                  <a:lnTo>
+                    <a:pt x="5838592" y="405140"/>
+                  </a:lnTo>
+                  <a:lnTo>
+                    <a:pt x="5908937" y="405711"/>
+                  </a:lnTo>
+                  <a:lnTo>
+                    <a:pt x="5979281" y="406281"/>
+                  </a:lnTo>
+                  <a:lnTo>
+                    <a:pt x="6049626" y="406849"/>
+                  </a:lnTo>
+                  <a:lnTo>
+                    <a:pt x="6119970" y="407417"/>
+                  </a:lnTo>
+                  <a:lnTo>
+                    <a:pt x="6190315" y="407983"/>
+                  </a:lnTo>
+                  <a:lnTo>
+                    <a:pt x="6260659" y="408548"/>
+                  </a:lnTo>
+                  <a:lnTo>
+                    <a:pt x="6331004" y="409112"/>
+                  </a:lnTo>
+                  <a:lnTo>
+                    <a:pt x="6401348" y="409674"/>
+                  </a:lnTo>
+                  <a:lnTo>
+                    <a:pt x="6471693" y="410236"/>
+                  </a:lnTo>
+                  <a:lnTo>
+                    <a:pt x="6542037" y="410796"/>
+                  </a:lnTo>
+                  <a:lnTo>
+                    <a:pt x="6612382" y="411355"/>
+                  </a:lnTo>
+                  <a:lnTo>
+                    <a:pt x="6682726" y="411914"/>
+                  </a:lnTo>
+                  <a:lnTo>
+                    <a:pt x="6753071" y="412470"/>
+                  </a:lnTo>
+                  <a:lnTo>
+                    <a:pt x="6823415" y="413026"/>
+                  </a:lnTo>
+                  <a:lnTo>
+                    <a:pt x="6893760" y="413581"/>
+                  </a:lnTo>
+                  <a:lnTo>
+                    <a:pt x="6964104" y="414134"/>
                   </a:lnTo>
                 </a:path>
               </a:pathLst>
@@ -4326,312 +4036,637 @@
           </p:nvSpPr>
           <p:spPr>
             <a:xfrm>
-              <a:off x="1172049" y="4248380"/>
-              <a:ext cx="7090630" cy="844518"/>
+              <a:off x="1235312" y="3072679"/>
+              <a:ext cx="6964104" cy="222389"/>
             </a:xfrm>
             <a:custGeom>
               <a:avLst/>
               <a:pathLst>
-                <a:path w="7090630" h="844518">
+                <a:path w="6964104" h="222389">
+                  <a:moveTo>
+                    <a:pt x="6964104" y="222389"/>
+                  </a:moveTo>
+                  <a:lnTo>
+                    <a:pt x="6893760" y="220385"/>
+                  </a:lnTo>
+                  <a:lnTo>
+                    <a:pt x="6823415" y="218344"/>
+                  </a:lnTo>
+                  <a:lnTo>
+                    <a:pt x="6753071" y="216263"/>
+                  </a:lnTo>
+                  <a:lnTo>
+                    <a:pt x="6682726" y="214142"/>
+                  </a:lnTo>
+                  <a:lnTo>
+                    <a:pt x="6612382" y="211982"/>
+                  </a:lnTo>
+                  <a:lnTo>
+                    <a:pt x="6542037" y="209780"/>
+                  </a:lnTo>
+                  <a:lnTo>
+                    <a:pt x="6471693" y="207536"/>
+                  </a:lnTo>
+                  <a:lnTo>
+                    <a:pt x="6401348" y="205249"/>
+                  </a:lnTo>
+                  <a:lnTo>
+                    <a:pt x="6331004" y="202919"/>
+                  </a:lnTo>
+                  <a:lnTo>
+                    <a:pt x="6260659" y="200545"/>
+                  </a:lnTo>
+                  <a:lnTo>
+                    <a:pt x="6190315" y="198125"/>
+                  </a:lnTo>
+                  <a:lnTo>
+                    <a:pt x="6119970" y="195659"/>
+                  </a:lnTo>
+                  <a:lnTo>
+                    <a:pt x="6049626" y="193147"/>
+                  </a:lnTo>
+                  <a:lnTo>
+                    <a:pt x="5979281" y="190586"/>
+                  </a:lnTo>
+                  <a:lnTo>
+                    <a:pt x="5908937" y="187977"/>
+                  </a:lnTo>
+                  <a:lnTo>
+                    <a:pt x="5838592" y="185318"/>
+                  </a:lnTo>
+                  <a:lnTo>
+                    <a:pt x="5768248" y="182608"/>
+                  </a:lnTo>
+                  <a:lnTo>
+                    <a:pt x="5697903" y="179847"/>
+                  </a:lnTo>
+                  <a:lnTo>
+                    <a:pt x="5627559" y="177033"/>
+                  </a:lnTo>
+                  <a:lnTo>
+                    <a:pt x="5557214" y="174165"/>
+                  </a:lnTo>
+                  <a:lnTo>
+                    <a:pt x="5486870" y="171243"/>
+                  </a:lnTo>
+                  <a:lnTo>
+                    <a:pt x="5416525" y="168266"/>
+                  </a:lnTo>
+                  <a:lnTo>
+                    <a:pt x="5346181" y="165231"/>
+                  </a:lnTo>
+                  <a:lnTo>
+                    <a:pt x="5275836" y="162139"/>
+                  </a:lnTo>
+                  <a:lnTo>
+                    <a:pt x="5205492" y="158988"/>
+                  </a:lnTo>
+                  <a:lnTo>
+                    <a:pt x="5135147" y="155777"/>
+                  </a:lnTo>
+                  <a:lnTo>
+                    <a:pt x="5064803" y="152505"/>
+                  </a:lnTo>
+                  <a:lnTo>
+                    <a:pt x="4994458" y="149171"/>
+                  </a:lnTo>
+                  <a:lnTo>
+                    <a:pt x="4924114" y="145773"/>
+                  </a:lnTo>
+                  <a:lnTo>
+                    <a:pt x="4853769" y="142310"/>
+                  </a:lnTo>
+                  <a:lnTo>
+                    <a:pt x="4783425" y="138781"/>
+                  </a:lnTo>
+                  <a:lnTo>
+                    <a:pt x="4713080" y="135186"/>
+                  </a:lnTo>
+                  <a:lnTo>
+                    <a:pt x="4642736" y="131521"/>
+                  </a:lnTo>
+                  <a:lnTo>
+                    <a:pt x="4572391" y="127787"/>
+                  </a:lnTo>
+                  <a:lnTo>
+                    <a:pt x="4502047" y="123982"/>
+                  </a:lnTo>
+                  <a:lnTo>
+                    <a:pt x="4431702" y="120105"/>
+                  </a:lnTo>
+                  <a:lnTo>
+                    <a:pt x="4361358" y="116153"/>
+                  </a:lnTo>
+                  <a:lnTo>
+                    <a:pt x="4291013" y="112126"/>
+                  </a:lnTo>
+                  <a:lnTo>
+                    <a:pt x="4220669" y="108023"/>
+                  </a:lnTo>
+                  <a:lnTo>
+                    <a:pt x="4150324" y="103842"/>
+                  </a:lnTo>
+                  <a:lnTo>
+                    <a:pt x="4079980" y="99580"/>
+                  </a:lnTo>
+                  <a:lnTo>
+                    <a:pt x="4009635" y="95238"/>
+                  </a:lnTo>
+                  <a:lnTo>
+                    <a:pt x="3939291" y="90813"/>
+                  </a:lnTo>
+                  <a:lnTo>
+                    <a:pt x="3868946" y="86304"/>
+                  </a:lnTo>
+                  <a:lnTo>
+                    <a:pt x="3798602" y="81709"/>
+                  </a:lnTo>
+                  <a:lnTo>
+                    <a:pt x="3728257" y="77026"/>
+                  </a:lnTo>
+                  <a:lnTo>
+                    <a:pt x="3657913" y="72254"/>
+                  </a:lnTo>
+                  <a:lnTo>
+                    <a:pt x="3587569" y="67392"/>
+                  </a:lnTo>
+                  <a:lnTo>
+                    <a:pt x="3517224" y="62437"/>
+                  </a:lnTo>
+                  <a:lnTo>
+                    <a:pt x="3446880" y="57387"/>
+                  </a:lnTo>
+                  <a:lnTo>
+                    <a:pt x="3376535" y="52241"/>
+                  </a:lnTo>
+                  <a:lnTo>
+                    <a:pt x="3306191" y="46998"/>
+                  </a:lnTo>
+                  <a:lnTo>
+                    <a:pt x="3235846" y="41654"/>
+                  </a:lnTo>
+                  <a:lnTo>
+                    <a:pt x="3165502" y="36209"/>
+                  </a:lnTo>
+                  <a:lnTo>
+                    <a:pt x="3095157" y="30660"/>
+                  </a:lnTo>
+                  <a:lnTo>
+                    <a:pt x="3024813" y="27923"/>
+                  </a:lnTo>
+                  <a:lnTo>
+                    <a:pt x="2954468" y="27301"/>
+                  </a:lnTo>
+                  <a:lnTo>
+                    <a:pt x="2884124" y="26678"/>
+                  </a:lnTo>
+                  <a:lnTo>
+                    <a:pt x="2813779" y="26054"/>
+                  </a:lnTo>
+                  <a:lnTo>
+                    <a:pt x="2743435" y="25429"/>
+                  </a:lnTo>
+                  <a:lnTo>
+                    <a:pt x="2673090" y="24802"/>
+                  </a:lnTo>
+                  <a:lnTo>
+                    <a:pt x="2602746" y="24174"/>
+                  </a:lnTo>
+                  <a:lnTo>
+                    <a:pt x="2532401" y="23545"/>
+                  </a:lnTo>
+                  <a:lnTo>
+                    <a:pt x="2462057" y="22914"/>
+                  </a:lnTo>
+                  <a:lnTo>
+                    <a:pt x="2391712" y="22282"/>
+                  </a:lnTo>
+                  <a:lnTo>
+                    <a:pt x="2321368" y="21649"/>
+                  </a:lnTo>
+                  <a:lnTo>
+                    <a:pt x="2251023" y="21015"/>
+                  </a:lnTo>
+                  <a:lnTo>
+                    <a:pt x="2180679" y="20379"/>
+                  </a:lnTo>
+                  <a:lnTo>
+                    <a:pt x="2110334" y="19742"/>
+                  </a:lnTo>
+                  <a:lnTo>
+                    <a:pt x="2039990" y="19103"/>
+                  </a:lnTo>
+                  <a:lnTo>
+                    <a:pt x="1969645" y="18463"/>
+                  </a:lnTo>
+                  <a:lnTo>
+                    <a:pt x="1899301" y="17822"/>
+                  </a:lnTo>
+                  <a:lnTo>
+                    <a:pt x="1828956" y="17180"/>
+                  </a:lnTo>
+                  <a:lnTo>
+                    <a:pt x="1758612" y="16536"/>
+                  </a:lnTo>
+                  <a:lnTo>
+                    <a:pt x="1688267" y="15891"/>
+                  </a:lnTo>
+                  <a:lnTo>
+                    <a:pt x="1617923" y="15244"/>
+                  </a:lnTo>
+                  <a:lnTo>
+                    <a:pt x="1547578" y="14596"/>
+                  </a:lnTo>
+                  <a:lnTo>
+                    <a:pt x="1477234" y="13947"/>
+                  </a:lnTo>
+                  <a:lnTo>
+                    <a:pt x="1406889" y="13297"/>
+                  </a:lnTo>
+                  <a:lnTo>
+                    <a:pt x="1336545" y="12645"/>
+                  </a:lnTo>
+                  <a:lnTo>
+                    <a:pt x="1266200" y="11992"/>
+                  </a:lnTo>
+                  <a:lnTo>
+                    <a:pt x="1195856" y="11337"/>
+                  </a:lnTo>
+                  <a:lnTo>
+                    <a:pt x="1125511" y="10681"/>
+                  </a:lnTo>
+                  <a:lnTo>
+                    <a:pt x="1055167" y="10024"/>
+                  </a:lnTo>
+                  <a:lnTo>
+                    <a:pt x="984822" y="9365"/>
+                  </a:lnTo>
+                  <a:lnTo>
+                    <a:pt x="914478" y="8705"/>
+                  </a:lnTo>
+                  <a:lnTo>
+                    <a:pt x="844133" y="8044"/>
+                  </a:lnTo>
+                  <a:lnTo>
+                    <a:pt x="773789" y="7381"/>
+                  </a:lnTo>
+                  <a:lnTo>
+                    <a:pt x="703444" y="6717"/>
+                  </a:lnTo>
+                  <a:lnTo>
+                    <a:pt x="633100" y="6051"/>
+                  </a:lnTo>
+                  <a:lnTo>
+                    <a:pt x="562755" y="5385"/>
+                  </a:lnTo>
+                  <a:lnTo>
+                    <a:pt x="492411" y="4716"/>
+                  </a:lnTo>
+                  <a:lnTo>
+                    <a:pt x="422066" y="4047"/>
+                  </a:lnTo>
+                  <a:lnTo>
+                    <a:pt x="351722" y="3376"/>
+                  </a:lnTo>
+                  <a:lnTo>
+                    <a:pt x="281377" y="2703"/>
+                  </a:lnTo>
+                  <a:lnTo>
+                    <a:pt x="211033" y="2029"/>
+                  </a:lnTo>
+                  <a:lnTo>
+                    <a:pt x="140688" y="1354"/>
+                  </a:lnTo>
+                  <a:lnTo>
+                    <a:pt x="70344" y="678"/>
+                  </a:lnTo>
+                  <a:lnTo>
+                    <a:pt x="0" y="0"/>
+                  </a:lnTo>
+                </a:path>
+              </a:pathLst>
+            </a:custGeom>
+          </p:spPr>
+          <p:txBody>
+            <a:bodyPr/>
+            <a:lstStyle/>
+            <a:p/>
+          </p:txBody>
+        </p:sp>
+        <p:sp>
+          <p:nvSpPr>
+            <p:cNvPr id="26" name="pl26"/>
+            <p:cNvSpPr/>
+            <p:nvPr/>
+          </p:nvSpPr>
+          <p:spPr>
+            <a:xfrm>
+              <a:off x="1235312" y="2927954"/>
+              <a:ext cx="6964104" cy="304766"/>
+            </a:xfrm>
+            <a:custGeom>
+              <a:avLst/>
+              <a:pathLst>
+                <a:path w="6964104" h="304766">
                   <a:moveTo>
                     <a:pt x="0" y="0"/>
                   </a:moveTo>
                   <a:lnTo>
-                    <a:pt x="71622" y="13629"/>
-                  </a:lnTo>
-                  <a:lnTo>
-                    <a:pt x="143245" y="27116"/>
-                  </a:lnTo>
-                  <a:lnTo>
-                    <a:pt x="214867" y="40462"/>
-                  </a:lnTo>
-                  <a:lnTo>
-                    <a:pt x="286490" y="53670"/>
-                  </a:lnTo>
-                  <a:lnTo>
-                    <a:pt x="358112" y="66740"/>
-                  </a:lnTo>
-                  <a:lnTo>
-                    <a:pt x="429735" y="79675"/>
-                  </a:lnTo>
-                  <a:lnTo>
-                    <a:pt x="501357" y="92474"/>
-                  </a:lnTo>
-                  <a:lnTo>
-                    <a:pt x="572980" y="105140"/>
-                  </a:lnTo>
-                  <a:lnTo>
-                    <a:pt x="644602" y="117674"/>
-                  </a:lnTo>
-                  <a:lnTo>
-                    <a:pt x="716225" y="130078"/>
-                  </a:lnTo>
-                  <a:lnTo>
-                    <a:pt x="787847" y="142353"/>
-                  </a:lnTo>
-                  <a:lnTo>
-                    <a:pt x="859470" y="154499"/>
-                  </a:lnTo>
-                  <a:lnTo>
-                    <a:pt x="931092" y="166520"/>
-                  </a:lnTo>
-                  <a:lnTo>
-                    <a:pt x="1002715" y="178415"/>
-                  </a:lnTo>
-                  <a:lnTo>
-                    <a:pt x="1074337" y="190186"/>
-                  </a:lnTo>
-                  <a:lnTo>
-                    <a:pt x="1145960" y="201835"/>
-                  </a:lnTo>
-                  <a:lnTo>
-                    <a:pt x="1217582" y="213362"/>
-                  </a:lnTo>
-                  <a:lnTo>
-                    <a:pt x="1289205" y="224770"/>
-                  </a:lnTo>
-                  <a:lnTo>
-                    <a:pt x="1360827" y="236058"/>
-                  </a:lnTo>
-                  <a:lnTo>
-                    <a:pt x="1432450" y="247229"/>
-                  </a:lnTo>
-                  <a:lnTo>
-                    <a:pt x="1504073" y="258284"/>
-                  </a:lnTo>
-                  <a:lnTo>
-                    <a:pt x="1575695" y="269224"/>
-                  </a:lnTo>
-                  <a:lnTo>
-                    <a:pt x="1647318" y="280049"/>
-                  </a:lnTo>
-                  <a:lnTo>
-                    <a:pt x="1718940" y="290762"/>
-                  </a:lnTo>
-                  <a:lnTo>
-                    <a:pt x="1790563" y="301364"/>
-                  </a:lnTo>
-                  <a:lnTo>
-                    <a:pt x="1862185" y="311855"/>
-                  </a:lnTo>
-                  <a:lnTo>
-                    <a:pt x="1933808" y="322236"/>
-                  </a:lnTo>
-                  <a:lnTo>
-                    <a:pt x="2005430" y="332510"/>
-                  </a:lnTo>
-                  <a:lnTo>
-                    <a:pt x="2077053" y="342677"/>
-                  </a:lnTo>
-                  <a:lnTo>
-                    <a:pt x="2148675" y="352738"/>
-                  </a:lnTo>
-                  <a:lnTo>
-                    <a:pt x="2220298" y="362694"/>
-                  </a:lnTo>
-                  <a:lnTo>
-                    <a:pt x="2291920" y="372546"/>
-                  </a:lnTo>
-                  <a:lnTo>
-                    <a:pt x="2363543" y="382296"/>
-                  </a:lnTo>
-                  <a:lnTo>
-                    <a:pt x="2435165" y="391944"/>
-                  </a:lnTo>
-                  <a:lnTo>
-                    <a:pt x="2506788" y="401492"/>
-                  </a:lnTo>
-                  <a:lnTo>
-                    <a:pt x="2578410" y="410940"/>
-                  </a:lnTo>
-                  <a:lnTo>
-                    <a:pt x="2650033" y="420290"/>
-                  </a:lnTo>
-                  <a:lnTo>
-                    <a:pt x="2721655" y="429543"/>
-                  </a:lnTo>
-                  <a:lnTo>
-                    <a:pt x="2793278" y="438699"/>
-                  </a:lnTo>
-                  <a:lnTo>
-                    <a:pt x="2864901" y="447760"/>
-                  </a:lnTo>
-                  <a:lnTo>
-                    <a:pt x="2936523" y="456727"/>
-                  </a:lnTo>
-                  <a:lnTo>
-                    <a:pt x="3008146" y="465600"/>
-                  </a:lnTo>
-                  <a:lnTo>
-                    <a:pt x="3079768" y="474381"/>
-                  </a:lnTo>
-                  <a:lnTo>
-                    <a:pt x="3151391" y="483070"/>
-                  </a:lnTo>
-                  <a:lnTo>
-                    <a:pt x="3223013" y="491669"/>
-                  </a:lnTo>
-                  <a:lnTo>
-                    <a:pt x="3294636" y="500179"/>
-                  </a:lnTo>
-                  <a:lnTo>
-                    <a:pt x="3366258" y="508599"/>
-                  </a:lnTo>
-                  <a:lnTo>
-                    <a:pt x="3437881" y="516933"/>
-                  </a:lnTo>
-                  <a:lnTo>
-                    <a:pt x="3509503" y="525179"/>
-                  </a:lnTo>
-                  <a:lnTo>
-                    <a:pt x="3581126" y="533339"/>
-                  </a:lnTo>
-                  <a:lnTo>
-                    <a:pt x="3652748" y="541415"/>
-                  </a:lnTo>
-                  <a:lnTo>
-                    <a:pt x="3724371" y="549406"/>
-                  </a:lnTo>
-                  <a:lnTo>
-                    <a:pt x="3795993" y="557314"/>
-                  </a:lnTo>
-                  <a:lnTo>
-                    <a:pt x="3867616" y="565140"/>
-                  </a:lnTo>
-                  <a:lnTo>
-                    <a:pt x="3939238" y="572885"/>
-                  </a:lnTo>
-                  <a:lnTo>
-                    <a:pt x="4010861" y="580548"/>
-                  </a:lnTo>
-                  <a:lnTo>
-                    <a:pt x="4082483" y="588132"/>
-                  </a:lnTo>
-                  <a:lnTo>
-                    <a:pt x="4154106" y="595637"/>
-                  </a:lnTo>
-                  <a:lnTo>
-                    <a:pt x="4225729" y="603064"/>
-                  </a:lnTo>
-                  <a:lnTo>
-                    <a:pt x="4297351" y="610413"/>
-                  </a:lnTo>
-                  <a:lnTo>
-                    <a:pt x="4368974" y="617686"/>
-                  </a:lnTo>
-                  <a:lnTo>
-                    <a:pt x="4440596" y="624883"/>
-                  </a:lnTo>
-                  <a:lnTo>
-                    <a:pt x="4512219" y="632006"/>
-                  </a:lnTo>
-                  <a:lnTo>
-                    <a:pt x="4583841" y="639054"/>
-                  </a:lnTo>
-                  <a:lnTo>
-                    <a:pt x="4655464" y="646028"/>
-                  </a:lnTo>
-                  <a:lnTo>
-                    <a:pt x="4727086" y="652931"/>
-                  </a:lnTo>
-                  <a:lnTo>
-                    <a:pt x="4798709" y="659761"/>
-                  </a:lnTo>
-                  <a:lnTo>
-                    <a:pt x="4870331" y="666520"/>
-                  </a:lnTo>
-                  <a:lnTo>
-                    <a:pt x="4941954" y="673209"/>
-                  </a:lnTo>
-                  <a:lnTo>
-                    <a:pt x="5013576" y="679828"/>
-                  </a:lnTo>
-                  <a:lnTo>
-                    <a:pt x="5085199" y="686378"/>
-                  </a:lnTo>
-                  <a:lnTo>
-                    <a:pt x="5156821" y="692860"/>
-                  </a:lnTo>
-                  <a:lnTo>
-                    <a:pt x="5228444" y="699274"/>
-                  </a:lnTo>
-                  <a:lnTo>
-                    <a:pt x="5300066" y="705622"/>
-                  </a:lnTo>
-                  <a:lnTo>
-                    <a:pt x="5371689" y="711903"/>
-                  </a:lnTo>
-                  <a:lnTo>
-                    <a:pt x="5443311" y="718119"/>
-                  </a:lnTo>
-                  <a:lnTo>
-                    <a:pt x="5514934" y="724271"/>
-                  </a:lnTo>
-                  <a:lnTo>
-                    <a:pt x="5586557" y="730358"/>
-                  </a:lnTo>
-                  <a:lnTo>
-                    <a:pt x="5658179" y="736382"/>
-                  </a:lnTo>
-                  <a:lnTo>
-                    <a:pt x="5729802" y="742343"/>
-                  </a:lnTo>
-                  <a:lnTo>
-                    <a:pt x="5801424" y="748242"/>
-                  </a:lnTo>
-                  <a:lnTo>
-                    <a:pt x="5873047" y="754080"/>
-                  </a:lnTo>
-                  <a:lnTo>
-                    <a:pt x="5944669" y="759857"/>
-                  </a:lnTo>
-                  <a:lnTo>
-                    <a:pt x="6016292" y="765574"/>
-                  </a:lnTo>
-                  <a:lnTo>
-                    <a:pt x="6087914" y="771231"/>
-                  </a:lnTo>
-                  <a:lnTo>
-                    <a:pt x="6159537" y="776829"/>
-                  </a:lnTo>
-                  <a:lnTo>
-                    <a:pt x="6231159" y="782370"/>
-                  </a:lnTo>
-                  <a:lnTo>
-                    <a:pt x="6302782" y="787852"/>
-                  </a:lnTo>
-                  <a:lnTo>
-                    <a:pt x="6374404" y="793277"/>
-                  </a:lnTo>
-                  <a:lnTo>
-                    <a:pt x="6446027" y="798646"/>
-                  </a:lnTo>
-                  <a:lnTo>
-                    <a:pt x="6517649" y="803959"/>
-                  </a:lnTo>
-                  <a:lnTo>
-                    <a:pt x="6589272" y="809216"/>
-                  </a:lnTo>
-                  <a:lnTo>
-                    <a:pt x="6660894" y="814419"/>
-                  </a:lnTo>
-                  <a:lnTo>
-                    <a:pt x="6732517" y="819568"/>
-                  </a:lnTo>
-                  <a:lnTo>
-                    <a:pt x="6804139" y="824663"/>
-                  </a:lnTo>
-                  <a:lnTo>
-                    <a:pt x="6875762" y="829705"/>
-                  </a:lnTo>
-                  <a:lnTo>
-                    <a:pt x="6947385" y="834694"/>
-                  </a:lnTo>
-                  <a:lnTo>
-                    <a:pt x="7019007" y="839632"/>
-                  </a:lnTo>
-                  <a:lnTo>
-                    <a:pt x="7090630" y="844518"/>
+                    <a:pt x="70344" y="4918"/>
+                  </a:lnTo>
+                  <a:lnTo>
+                    <a:pt x="140688" y="9785"/>
+                  </a:lnTo>
+                  <a:lnTo>
+                    <a:pt x="211033" y="14602"/>
+                  </a:lnTo>
+                  <a:lnTo>
+                    <a:pt x="281377" y="19368"/>
+                  </a:lnTo>
+                  <a:lnTo>
+                    <a:pt x="351722" y="24085"/>
+                  </a:lnTo>
+                  <a:lnTo>
+                    <a:pt x="422066" y="28752"/>
+                  </a:lnTo>
+                  <a:lnTo>
+                    <a:pt x="492411" y="33371"/>
+                  </a:lnTo>
+                  <a:lnTo>
+                    <a:pt x="562755" y="37942"/>
+                  </a:lnTo>
+                  <a:lnTo>
+                    <a:pt x="633100" y="42466"/>
+                  </a:lnTo>
+                  <a:lnTo>
+                    <a:pt x="703444" y="46942"/>
+                  </a:lnTo>
+                  <a:lnTo>
+                    <a:pt x="773789" y="51371"/>
+                  </a:lnTo>
+                  <a:lnTo>
+                    <a:pt x="844133" y="55755"/>
+                  </a:lnTo>
+                  <a:lnTo>
+                    <a:pt x="914478" y="60093"/>
+                  </a:lnTo>
+                  <a:lnTo>
+                    <a:pt x="984822" y="64385"/>
+                  </a:lnTo>
+                  <a:lnTo>
+                    <a:pt x="1055167" y="68633"/>
+                  </a:lnTo>
+                  <a:lnTo>
+                    <a:pt x="1125511" y="72837"/>
+                  </a:lnTo>
+                  <a:lnTo>
+                    <a:pt x="1195856" y="76997"/>
+                  </a:lnTo>
+                  <a:lnTo>
+                    <a:pt x="1266200" y="81114"/>
+                  </a:lnTo>
+                  <a:lnTo>
+                    <a:pt x="1336545" y="85188"/>
+                  </a:lnTo>
+                  <a:lnTo>
+                    <a:pt x="1406889" y="89219"/>
+                  </a:lnTo>
+                  <a:lnTo>
+                    <a:pt x="1477234" y="93208"/>
+                  </a:lnTo>
+                  <a:lnTo>
+                    <a:pt x="1547578" y="97156"/>
+                  </a:lnTo>
+                  <a:lnTo>
+                    <a:pt x="1617923" y="101063"/>
+                  </a:lnTo>
+                  <a:lnTo>
+                    <a:pt x="1688267" y="104929"/>
+                  </a:lnTo>
+                  <a:lnTo>
+                    <a:pt x="1758612" y="108755"/>
+                  </a:lnTo>
+                  <a:lnTo>
+                    <a:pt x="1828956" y="112541"/>
+                  </a:lnTo>
+                  <a:lnTo>
+                    <a:pt x="1899301" y="116287"/>
+                  </a:lnTo>
+                  <a:lnTo>
+                    <a:pt x="1969645" y="119995"/>
+                  </a:lnTo>
+                  <a:lnTo>
+                    <a:pt x="2039990" y="123664"/>
+                  </a:lnTo>
+                  <a:lnTo>
+                    <a:pt x="2110334" y="127294"/>
+                  </a:lnTo>
+                  <a:lnTo>
+                    <a:pt x="2180679" y="130887"/>
+                  </a:lnTo>
+                  <a:lnTo>
+                    <a:pt x="2251023" y="134443"/>
+                  </a:lnTo>
+                  <a:lnTo>
+                    <a:pt x="2321368" y="137961"/>
+                  </a:lnTo>
+                  <a:lnTo>
+                    <a:pt x="2391712" y="141443"/>
+                  </a:lnTo>
+                  <a:lnTo>
+                    <a:pt x="2462057" y="144889"/>
+                  </a:lnTo>
+                  <a:lnTo>
+                    <a:pt x="2532401" y="148298"/>
+                  </a:lnTo>
+                  <a:lnTo>
+                    <a:pt x="2602746" y="151673"/>
+                  </a:lnTo>
+                  <a:lnTo>
+                    <a:pt x="2673090" y="155012"/>
+                  </a:lnTo>
+                  <a:lnTo>
+                    <a:pt x="2743435" y="158316"/>
+                  </a:lnTo>
+                  <a:lnTo>
+                    <a:pt x="2813779" y="161586"/>
+                  </a:lnTo>
+                  <a:lnTo>
+                    <a:pt x="2884124" y="164822"/>
+                  </a:lnTo>
+                  <a:lnTo>
+                    <a:pt x="2954468" y="168024"/>
+                  </a:lnTo>
+                  <a:lnTo>
+                    <a:pt x="3024813" y="171193"/>
+                  </a:lnTo>
+                  <a:lnTo>
+                    <a:pt x="3095157" y="174328"/>
+                  </a:lnTo>
+                  <a:lnTo>
+                    <a:pt x="3165502" y="177432"/>
+                  </a:lnTo>
+                  <a:lnTo>
+                    <a:pt x="3235846" y="180502"/>
+                  </a:lnTo>
+                  <a:lnTo>
+                    <a:pt x="3306191" y="183541"/>
+                  </a:lnTo>
+                  <a:lnTo>
+                    <a:pt x="3376535" y="186548"/>
+                  </a:lnTo>
+                  <a:lnTo>
+                    <a:pt x="3446880" y="189524"/>
+                  </a:lnTo>
+                  <a:lnTo>
+                    <a:pt x="3517224" y="192469"/>
+                  </a:lnTo>
+                  <a:lnTo>
+                    <a:pt x="3587569" y="195384"/>
+                  </a:lnTo>
+                  <a:lnTo>
+                    <a:pt x="3657913" y="198267"/>
+                  </a:lnTo>
+                  <a:lnTo>
+                    <a:pt x="3728257" y="201121"/>
+                  </a:lnTo>
+                  <a:lnTo>
+                    <a:pt x="3798602" y="203945"/>
+                  </a:lnTo>
+                  <a:lnTo>
+                    <a:pt x="3868946" y="206740"/>
+                  </a:lnTo>
+                  <a:lnTo>
+                    <a:pt x="3939291" y="209506"/>
+                  </a:lnTo>
+                  <a:lnTo>
+                    <a:pt x="4009635" y="212243"/>
+                  </a:lnTo>
+                  <a:lnTo>
+                    <a:pt x="4079980" y="214951"/>
+                  </a:lnTo>
+                  <a:lnTo>
+                    <a:pt x="4150324" y="217631"/>
+                  </a:lnTo>
+                  <a:lnTo>
+                    <a:pt x="4220669" y="220283"/>
+                  </a:lnTo>
+                  <a:lnTo>
+                    <a:pt x="4291013" y="222908"/>
+                  </a:lnTo>
+                  <a:lnTo>
+                    <a:pt x="4361358" y="225505"/>
+                  </a:lnTo>
+                  <a:lnTo>
+                    <a:pt x="4431702" y="228076"/>
+                  </a:lnTo>
+                  <a:lnTo>
+                    <a:pt x="4502047" y="230619"/>
+                  </a:lnTo>
+                  <a:lnTo>
+                    <a:pt x="4572391" y="233136"/>
+                  </a:lnTo>
+                  <a:lnTo>
+                    <a:pt x="4642736" y="235627"/>
+                  </a:lnTo>
+                  <a:lnTo>
+                    <a:pt x="4713080" y="238092"/>
+                  </a:lnTo>
+                  <a:lnTo>
+                    <a:pt x="4783425" y="240531"/>
+                  </a:lnTo>
+                  <a:lnTo>
+                    <a:pt x="4853769" y="242945"/>
+                  </a:lnTo>
+                  <a:lnTo>
+                    <a:pt x="4924114" y="245333"/>
+                  </a:lnTo>
+                  <a:lnTo>
+                    <a:pt x="4994458" y="247697"/>
+                  </a:lnTo>
+                  <a:lnTo>
+                    <a:pt x="5064803" y="250036"/>
+                  </a:lnTo>
+                  <a:lnTo>
+                    <a:pt x="5135147" y="252351"/>
+                  </a:lnTo>
+                  <a:lnTo>
+                    <a:pt x="5205492" y="254642"/>
+                  </a:lnTo>
+                  <a:lnTo>
+                    <a:pt x="5275836" y="256909"/>
+                  </a:lnTo>
+                  <a:lnTo>
+                    <a:pt x="5346181" y="259152"/>
+                  </a:lnTo>
+                  <a:lnTo>
+                    <a:pt x="5416525" y="261372"/>
+                  </a:lnTo>
+                  <a:lnTo>
+                    <a:pt x="5486870" y="263569"/>
+                  </a:lnTo>
+                  <a:lnTo>
+                    <a:pt x="5557214" y="265743"/>
+                  </a:lnTo>
+                  <a:lnTo>
+                    <a:pt x="5627559" y="267894"/>
+                  </a:lnTo>
+                  <a:lnTo>
+                    <a:pt x="5697903" y="270023"/>
+                  </a:lnTo>
+                  <a:lnTo>
+                    <a:pt x="5768248" y="272129"/>
+                  </a:lnTo>
+                  <a:lnTo>
+                    <a:pt x="5838592" y="274214"/>
+                  </a:lnTo>
+                  <a:lnTo>
+                    <a:pt x="5908937" y="276277"/>
+                  </a:lnTo>
+                  <a:lnTo>
+                    <a:pt x="5979281" y="278319"/>
+                  </a:lnTo>
+                  <a:lnTo>
+                    <a:pt x="6049626" y="280339"/>
+                  </a:lnTo>
+                  <a:lnTo>
+                    <a:pt x="6119970" y="282338"/>
+                  </a:lnTo>
+                  <a:lnTo>
+                    <a:pt x="6190315" y="284317"/>
+                  </a:lnTo>
+                  <a:lnTo>
+                    <a:pt x="6260659" y="286275"/>
+                  </a:lnTo>
+                  <a:lnTo>
+                    <a:pt x="6331004" y="288212"/>
+                  </a:lnTo>
+                  <a:lnTo>
+                    <a:pt x="6401348" y="290130"/>
+                  </a:lnTo>
+                  <a:lnTo>
+                    <a:pt x="6471693" y="292027"/>
+                  </a:lnTo>
+                  <a:lnTo>
+                    <a:pt x="6542037" y="293904"/>
+                  </a:lnTo>
+                  <a:lnTo>
+                    <a:pt x="6612382" y="295762"/>
+                  </a:lnTo>
+                  <a:lnTo>
+                    <a:pt x="6682726" y="297601"/>
+                  </a:lnTo>
+                  <a:lnTo>
+                    <a:pt x="6753071" y="299421"/>
+                  </a:lnTo>
+                  <a:lnTo>
+                    <a:pt x="6823415" y="301221"/>
+                  </a:lnTo>
+                  <a:lnTo>
+                    <a:pt x="6893760" y="303003"/>
+                  </a:lnTo>
+                  <a:lnTo>
+                    <a:pt x="6964104" y="304766"/>
                   </a:lnTo>
                 </a:path>
               </a:pathLst>
@@ -4654,27 +4689,27 @@
         </p:sp>
         <p:sp>
           <p:nvSpPr>
-            <p:cNvPr id="26" name="pl26"/>
+            <p:cNvPr id="27" name="pl27"/>
             <p:cNvSpPr/>
             <p:nvPr/>
           </p:nvSpPr>
           <p:spPr>
             <a:xfrm>
-              <a:off x="817517" y="4727786"/>
-              <a:ext cx="7799693" cy="0"/>
+              <a:off x="887106" y="3100960"/>
+              <a:ext cx="7660515" cy="0"/>
             </a:xfrm>
             <a:custGeom>
               <a:avLst/>
               <a:pathLst>
-                <a:path w="7799693" h="0">
+                <a:path w="7660515" h="0">
                   <a:moveTo>
                     <a:pt x="0" y="0"/>
                   </a:moveTo>
                   <a:lnTo>
-                    <a:pt x="7799693" y="0"/>
-                  </a:lnTo>
-                  <a:lnTo>
-                    <a:pt x="7799693" y="0"/>
+                    <a:pt x="7660515" y="0"/>
+                  </a:lnTo>
+                  <a:lnTo>
+                    <a:pt x="7660515" y="0"/>
                   </a:lnTo>
                 </a:path>
               </a:pathLst>
@@ -4697,21 +4732,21 @@
         </p:sp>
         <p:sp>
           <p:nvSpPr>
-            <p:cNvPr id="27" name="pl27"/>
+            <p:cNvPr id="28" name="pl28"/>
             <p:cNvSpPr/>
             <p:nvPr/>
           </p:nvSpPr>
           <p:spPr>
             <a:xfrm>
-              <a:off x="4293144" y="2073503"/>
-              <a:ext cx="0" cy="3649639"/>
+              <a:off x="4300713" y="2143092"/>
+              <a:ext cx="0" cy="1317069"/>
             </a:xfrm>
             <a:custGeom>
               <a:avLst/>
               <a:pathLst>
-                <a:path w="0" h="3649639">
+                <a:path w="0" h="1317069">
                   <a:moveTo>
-                    <a:pt x="0" y="3649639"/>
+                    <a:pt x="0" y="1317069"/>
                   </a:moveTo>
                   <a:lnTo>
                     <a:pt x="0" y="0"/>
@@ -4740,21 +4775,21 @@
         </p:sp>
         <p:sp>
           <p:nvSpPr>
-            <p:cNvPr id="28" name="pl28"/>
+            <p:cNvPr id="29" name="pl29"/>
             <p:cNvSpPr/>
             <p:nvPr/>
           </p:nvSpPr>
           <p:spPr>
             <a:xfrm>
-              <a:off x="3074393" y="2073503"/>
-              <a:ext cx="0" cy="3649639"/>
+              <a:off x="3103710" y="2143092"/>
+              <a:ext cx="0" cy="1317069"/>
             </a:xfrm>
             <a:custGeom>
               <a:avLst/>
               <a:pathLst>
-                <a:path w="0" h="3649639">
+                <a:path w="0" h="1317069">
                   <a:moveTo>
-                    <a:pt x="0" y="3649639"/>
+                    <a:pt x="0" y="1317069"/>
                   </a:moveTo>
                   <a:lnTo>
                     <a:pt x="0" y="0"/>
@@ -4783,21 +4818,21 @@
         </p:sp>
         <p:sp>
           <p:nvSpPr>
-            <p:cNvPr id="29" name="pl29"/>
+            <p:cNvPr id="30" name="pl30"/>
             <p:cNvSpPr/>
             <p:nvPr/>
           </p:nvSpPr>
           <p:spPr>
             <a:xfrm>
-              <a:off x="5518580" y="2073503"/>
-              <a:ext cx="0" cy="3649639"/>
+              <a:off x="5504283" y="2143092"/>
+              <a:ext cx="0" cy="1317069"/>
             </a:xfrm>
             <a:custGeom>
               <a:avLst/>
               <a:pathLst>
-                <a:path w="0" h="3649639">
+                <a:path w="0" h="1317069">
                   <a:moveTo>
-                    <a:pt x="0" y="3649639"/>
+                    <a:pt x="0" y="1317069"/>
                   </a:moveTo>
                   <a:lnTo>
                     <a:pt x="0" y="0"/>
@@ -4826,13 +4861,13 @@
         </p:sp>
         <p:sp>
           <p:nvSpPr>
-            <p:cNvPr id="30" name="tx30"/>
+            <p:cNvPr id="31" name="tx31"/>
             <p:cNvSpPr/>
             <p:nvPr/>
           </p:nvSpPr>
           <p:spPr>
             <a:xfrm>
-              <a:off x="692708" y="5517199"/>
+              <a:off x="762297" y="3360243"/>
               <a:ext cx="62179" cy="80101"/>
             </a:xfrm>
             <a:prstGeom prst="rect">
@@ -4872,13 +4907,13 @@
         </p:sp>
         <p:sp>
           <p:nvSpPr>
-            <p:cNvPr id="31" name="tx31"/>
+            <p:cNvPr id="32" name="tx32"/>
             <p:cNvSpPr/>
             <p:nvPr/>
           </p:nvSpPr>
           <p:spPr>
             <a:xfrm>
-              <a:off x="692708" y="4687735"/>
+              <a:off x="762297" y="3060909"/>
               <a:ext cx="62179" cy="80101"/>
             </a:xfrm>
             <a:prstGeom prst="rect">
@@ -4918,13 +4953,13 @@
         </p:sp>
         <p:sp>
           <p:nvSpPr>
-            <p:cNvPr id="32" name="tx32"/>
+            <p:cNvPr id="33" name="tx33"/>
             <p:cNvSpPr/>
             <p:nvPr/>
           </p:nvSpPr>
           <p:spPr>
             <a:xfrm>
-              <a:off x="692708" y="3858272"/>
+              <a:off x="762297" y="2761575"/>
               <a:ext cx="62179" cy="80101"/>
             </a:xfrm>
             <a:prstGeom prst="rect">
@@ -4964,13 +4999,13 @@
         </p:sp>
         <p:sp>
           <p:nvSpPr>
-            <p:cNvPr id="33" name="tx33"/>
+            <p:cNvPr id="34" name="tx34"/>
             <p:cNvSpPr/>
             <p:nvPr/>
           </p:nvSpPr>
           <p:spPr>
             <a:xfrm>
-              <a:off x="692708" y="3028808"/>
+              <a:off x="762297" y="2462242"/>
               <a:ext cx="62179" cy="80101"/>
             </a:xfrm>
             <a:prstGeom prst="rect">
@@ -5010,13 +5045,13 @@
         </p:sp>
         <p:sp>
           <p:nvSpPr>
-            <p:cNvPr id="34" name="tx34"/>
+            <p:cNvPr id="35" name="tx35"/>
             <p:cNvSpPr/>
             <p:nvPr/>
           </p:nvSpPr>
           <p:spPr>
             <a:xfrm>
-              <a:off x="692708" y="2199345"/>
+              <a:off x="762297" y="2162908"/>
               <a:ext cx="62179" cy="80101"/>
             </a:xfrm>
             <a:prstGeom prst="rect">
@@ -5056,13 +5091,13 @@
         </p:sp>
         <p:sp>
           <p:nvSpPr>
-            <p:cNvPr id="35" name="tx35"/>
+            <p:cNvPr id="36" name="tx36"/>
             <p:cNvSpPr/>
             <p:nvPr/>
           </p:nvSpPr>
           <p:spPr>
             <a:xfrm>
-              <a:off x="2134610" y="5785772"/>
+              <a:off x="2179256" y="3522791"/>
               <a:ext cx="161574" cy="80101"/>
             </a:xfrm>
             <a:prstGeom prst="rect">
@@ -5102,13 +5137,13 @@
         </p:sp>
         <p:sp>
           <p:nvSpPr>
-            <p:cNvPr id="36" name="tx36"/>
+            <p:cNvPr id="37" name="tx37"/>
             <p:cNvSpPr/>
             <p:nvPr/>
           </p:nvSpPr>
           <p:spPr>
             <a:xfrm>
-              <a:off x="3875731" y="5785772"/>
+              <a:off x="3889308" y="3522791"/>
               <a:ext cx="161574" cy="80101"/>
             </a:xfrm>
             <a:prstGeom prst="rect">
@@ -5148,13 +5183,13 @@
         </p:sp>
         <p:sp>
           <p:nvSpPr>
-            <p:cNvPr id="37" name="tx37"/>
+            <p:cNvPr id="38" name="tx38"/>
             <p:cNvSpPr/>
             <p:nvPr/>
           </p:nvSpPr>
           <p:spPr>
             <a:xfrm>
-              <a:off x="5666549" y="5785772"/>
+              <a:off x="5649057" y="3522791"/>
               <a:ext cx="62179" cy="80101"/>
             </a:xfrm>
             <a:prstGeom prst="rect">
@@ -5194,13 +5229,13 @@
         </p:sp>
         <p:sp>
           <p:nvSpPr>
-            <p:cNvPr id="38" name="tx38"/>
+            <p:cNvPr id="39" name="tx39"/>
             <p:cNvSpPr/>
             <p:nvPr/>
           </p:nvSpPr>
           <p:spPr>
             <a:xfrm>
-              <a:off x="7376580" y="5785772"/>
+              <a:off x="7328020" y="3522791"/>
               <a:ext cx="124358" cy="80101"/>
             </a:xfrm>
             <a:prstGeom prst="rect">
@@ -5240,13 +5275,13 @@
         </p:sp>
         <p:sp>
           <p:nvSpPr>
-            <p:cNvPr id="39" name="tx39"/>
+            <p:cNvPr id="40" name="tx40"/>
             <p:cNvSpPr/>
             <p:nvPr/>
           </p:nvSpPr>
           <p:spPr>
             <a:xfrm>
-              <a:off x="1561815" y="5925448"/>
+              <a:off x="1561815" y="3662467"/>
               <a:ext cx="6311097" cy="100218"/>
             </a:xfrm>
             <a:prstGeom prst="rect">
@@ -5286,13 +5321,13 @@
         </p:sp>
         <p:sp>
           <p:nvSpPr>
-            <p:cNvPr id="40" name="tx40"/>
+            <p:cNvPr id="41" name="tx41"/>
             <p:cNvSpPr/>
             <p:nvPr/>
           </p:nvSpPr>
           <p:spPr>
             <a:xfrm rot="-5400000">
-              <a:off x="68446" y="3848213"/>
+              <a:off x="138035" y="2751517"/>
               <a:ext cx="1016904" cy="100218"/>
             </a:xfrm>
             <a:prstGeom prst="rect">
@@ -5332,13 +5367,13 @@
         </p:sp>
         <p:sp>
           <p:nvSpPr>
-            <p:cNvPr id="41" name="tx41"/>
+            <p:cNvPr id="42" name="tx42"/>
             <p:cNvSpPr/>
             <p:nvPr/>
           </p:nvSpPr>
           <p:spPr>
             <a:xfrm>
-              <a:off x="817517" y="1896563"/>
+              <a:off x="887106" y="1966152"/>
               <a:ext cx="6959864" cy="82021"/>
             </a:xfrm>
             <a:prstGeom prst="rect">
@@ -5378,13 +5413,3789 @@
         </p:sp>
         <p:sp>
           <p:nvSpPr>
-            <p:cNvPr id="42" name="tx42"/>
+            <p:cNvPr id="43" name="tx43"/>
             <p:cNvSpPr/>
             <p:nvPr/>
           </p:nvSpPr>
           <p:spPr>
             <a:xfrm>
-              <a:off x="817517" y="1669789"/>
+              <a:off x="887106" y="1739378"/>
+              <a:ext cx="4207154" cy="120152"/>
+            </a:xfrm>
+            <a:prstGeom prst="rect">
+              <a:avLst/>
+            </a:prstGeom>
+            <a:noFill/>
+          </p:spPr>
+          <p:txBody>
+            <a:bodyPr lIns="0" rIns="0" tIns="0" bIns="0" anchorCtr="1" anchor="ctr" wrap="none"/>
+            <a:lstStyle/>
+            <a:p>
+              <a:pPr algn="l" marL="0" marR="0" indent="0">
+                <a:lnSpc>
+                  <a:spcPts val="1320"/>
+                </a:lnSpc>
+                <a:spcBef>
+                  <a:spcPts val="0"/>
+                </a:spcBef>
+                <a:spcAft>
+                  <a:spcPts val="0"/>
+                </a:spcAft>
+              </a:pPr>
+              <a:r>
+                <a:rPr sz="1320">
+                  <a:solidFill>
+                    <a:srgbClr val="000000">
+                      <a:alpha val="100000"/>
+                    </a:srgbClr>
+                  </a:solidFill>
+                  <a:latin typeface="Helvetica"/>
+                  <a:cs typeface="Helvetica"/>
+                </a:rPr>
+                <a:t>Overall Hospitalization (Sensitivity, Carboplatin AUC ≥ 3)</a:t>
+              </a:r>
+            </a:p>
+          </p:txBody>
+        </p:sp>
+        <p:sp>
+          <p:nvSpPr>
+            <p:cNvPr id="44" name="pl44"/>
+            <p:cNvSpPr/>
+            <p:nvPr/>
+          </p:nvSpPr>
+          <p:spPr>
+            <a:xfrm>
+              <a:off x="887106" y="5444019"/>
+              <a:ext cx="7660515" cy="0"/>
+            </a:xfrm>
+            <a:custGeom>
+              <a:avLst/>
+              <a:pathLst>
+                <a:path w="7660515" h="0">
+                  <a:moveTo>
+                    <a:pt x="0" y="0"/>
+                  </a:moveTo>
+                  <a:lnTo>
+                    <a:pt x="7660515" y="0"/>
+                  </a:lnTo>
+                  <a:lnTo>
+                    <a:pt x="7660515" y="0"/>
+                  </a:lnTo>
+                </a:path>
+              </a:pathLst>
+            </a:custGeom>
+            <a:ln w="6775" cap="flat">
+              <a:solidFill>
+                <a:srgbClr val="EBEBEB">
+                  <a:alpha val="100000"/>
+                </a:srgbClr>
+              </a:solidFill>
+              <a:prstDash val="solid"/>
+              <a:round/>
+            </a:ln>
+          </p:spPr>
+          <p:txBody>
+            <a:bodyPr/>
+            <a:lstStyle/>
+            <a:p/>
+          </p:txBody>
+        </p:sp>
+        <p:sp>
+          <p:nvSpPr>
+            <p:cNvPr id="45" name="pl45"/>
+            <p:cNvSpPr/>
+            <p:nvPr/>
+          </p:nvSpPr>
+          <p:spPr>
+            <a:xfrm>
+              <a:off x="887106" y="5144686"/>
+              <a:ext cx="7660515" cy="0"/>
+            </a:xfrm>
+            <a:custGeom>
+              <a:avLst/>
+              <a:pathLst>
+                <a:path w="7660515" h="0">
+                  <a:moveTo>
+                    <a:pt x="0" y="0"/>
+                  </a:moveTo>
+                  <a:lnTo>
+                    <a:pt x="7660515" y="0"/>
+                  </a:lnTo>
+                  <a:lnTo>
+                    <a:pt x="7660515" y="0"/>
+                  </a:lnTo>
+                </a:path>
+              </a:pathLst>
+            </a:custGeom>
+            <a:ln w="6775" cap="flat">
+              <a:solidFill>
+                <a:srgbClr val="EBEBEB">
+                  <a:alpha val="100000"/>
+                </a:srgbClr>
+              </a:solidFill>
+              <a:prstDash val="solid"/>
+              <a:round/>
+            </a:ln>
+          </p:spPr>
+          <p:txBody>
+            <a:bodyPr/>
+            <a:lstStyle/>
+            <a:p/>
+          </p:txBody>
+        </p:sp>
+        <p:sp>
+          <p:nvSpPr>
+            <p:cNvPr id="46" name="pl46"/>
+            <p:cNvSpPr/>
+            <p:nvPr/>
+          </p:nvSpPr>
+          <p:spPr>
+            <a:xfrm>
+              <a:off x="887106" y="4845352"/>
+              <a:ext cx="7660515" cy="0"/>
+            </a:xfrm>
+            <a:custGeom>
+              <a:avLst/>
+              <a:pathLst>
+                <a:path w="7660515" h="0">
+                  <a:moveTo>
+                    <a:pt x="0" y="0"/>
+                  </a:moveTo>
+                  <a:lnTo>
+                    <a:pt x="7660515" y="0"/>
+                  </a:lnTo>
+                  <a:lnTo>
+                    <a:pt x="7660515" y="0"/>
+                  </a:lnTo>
+                </a:path>
+              </a:pathLst>
+            </a:custGeom>
+            <a:ln w="6775" cap="flat">
+              <a:solidFill>
+                <a:srgbClr val="EBEBEB">
+                  <a:alpha val="100000"/>
+                </a:srgbClr>
+              </a:solidFill>
+              <a:prstDash val="solid"/>
+              <a:round/>
+            </a:ln>
+          </p:spPr>
+          <p:txBody>
+            <a:bodyPr/>
+            <a:lstStyle/>
+            <a:p/>
+          </p:txBody>
+        </p:sp>
+        <p:sp>
+          <p:nvSpPr>
+            <p:cNvPr id="47" name="pl47"/>
+            <p:cNvSpPr/>
+            <p:nvPr/>
+          </p:nvSpPr>
+          <p:spPr>
+            <a:xfrm>
+              <a:off x="887106" y="4546018"/>
+              <a:ext cx="7660515" cy="0"/>
+            </a:xfrm>
+            <a:custGeom>
+              <a:avLst/>
+              <a:pathLst>
+                <a:path w="7660515" h="0">
+                  <a:moveTo>
+                    <a:pt x="0" y="0"/>
+                  </a:moveTo>
+                  <a:lnTo>
+                    <a:pt x="7660515" y="0"/>
+                  </a:lnTo>
+                  <a:lnTo>
+                    <a:pt x="7660515" y="0"/>
+                  </a:lnTo>
+                </a:path>
+              </a:pathLst>
+            </a:custGeom>
+            <a:ln w="6775" cap="flat">
+              <a:solidFill>
+                <a:srgbClr val="EBEBEB">
+                  <a:alpha val="100000"/>
+                </a:srgbClr>
+              </a:solidFill>
+              <a:prstDash val="solid"/>
+              <a:round/>
+            </a:ln>
+          </p:spPr>
+          <p:txBody>
+            <a:bodyPr/>
+            <a:lstStyle/>
+            <a:p/>
+          </p:txBody>
+        </p:sp>
+        <p:sp>
+          <p:nvSpPr>
+            <p:cNvPr id="48" name="pl48"/>
+            <p:cNvSpPr/>
+            <p:nvPr/>
+          </p:nvSpPr>
+          <p:spPr>
+            <a:xfrm>
+              <a:off x="977504" y="4336484"/>
+              <a:ext cx="0" cy="1317069"/>
+            </a:xfrm>
+            <a:custGeom>
+              <a:avLst/>
+              <a:pathLst>
+                <a:path w="0" h="1317069">
+                  <a:moveTo>
+                    <a:pt x="0" y="1317069"/>
+                  </a:moveTo>
+                  <a:lnTo>
+                    <a:pt x="0" y="0"/>
+                  </a:lnTo>
+                  <a:lnTo>
+                    <a:pt x="0" y="0"/>
+                  </a:lnTo>
+                </a:path>
+              </a:pathLst>
+            </a:custGeom>
+            <a:ln w="6775" cap="flat">
+              <a:solidFill>
+                <a:srgbClr val="EBEBEB">
+                  <a:alpha val="100000"/>
+                </a:srgbClr>
+              </a:solidFill>
+              <a:prstDash val="solid"/>
+              <a:round/>
+            </a:ln>
+          </p:spPr>
+          <p:txBody>
+            <a:bodyPr/>
+            <a:lstStyle/>
+            <a:p/>
+          </p:txBody>
+        </p:sp>
+        <p:sp>
+          <p:nvSpPr>
+            <p:cNvPr id="49" name="pl49"/>
+            <p:cNvSpPr/>
+            <p:nvPr/>
+          </p:nvSpPr>
+          <p:spPr>
+            <a:xfrm>
+              <a:off x="1832530" y="4336484"/>
+              <a:ext cx="0" cy="1317069"/>
+            </a:xfrm>
+            <a:custGeom>
+              <a:avLst/>
+              <a:pathLst>
+                <a:path w="0" h="1317069">
+                  <a:moveTo>
+                    <a:pt x="0" y="1317069"/>
+                  </a:moveTo>
+                  <a:lnTo>
+                    <a:pt x="0" y="0"/>
+                  </a:lnTo>
+                  <a:lnTo>
+                    <a:pt x="0" y="0"/>
+                  </a:lnTo>
+                </a:path>
+              </a:pathLst>
+            </a:custGeom>
+            <a:ln w="6775" cap="flat">
+              <a:solidFill>
+                <a:srgbClr val="EBEBEB">
+                  <a:alpha val="100000"/>
+                </a:srgbClr>
+              </a:solidFill>
+              <a:prstDash val="solid"/>
+              <a:round/>
+            </a:ln>
+          </p:spPr>
+          <p:txBody>
+            <a:bodyPr/>
+            <a:lstStyle/>
+            <a:p/>
+          </p:txBody>
+        </p:sp>
+        <p:sp>
+          <p:nvSpPr>
+            <p:cNvPr id="50" name="pl50"/>
+            <p:cNvSpPr/>
+            <p:nvPr/>
+          </p:nvSpPr>
+          <p:spPr>
+            <a:xfrm>
+              <a:off x="2687556" y="4336484"/>
+              <a:ext cx="0" cy="1317069"/>
+            </a:xfrm>
+            <a:custGeom>
+              <a:avLst/>
+              <a:pathLst>
+                <a:path w="0" h="1317069">
+                  <a:moveTo>
+                    <a:pt x="0" y="1317069"/>
+                  </a:moveTo>
+                  <a:lnTo>
+                    <a:pt x="0" y="0"/>
+                  </a:lnTo>
+                  <a:lnTo>
+                    <a:pt x="0" y="0"/>
+                  </a:lnTo>
+                </a:path>
+              </a:pathLst>
+            </a:custGeom>
+            <a:ln w="6775" cap="flat">
+              <a:solidFill>
+                <a:srgbClr val="EBEBEB">
+                  <a:alpha val="100000"/>
+                </a:srgbClr>
+              </a:solidFill>
+              <a:prstDash val="solid"/>
+              <a:round/>
+            </a:ln>
+          </p:spPr>
+          <p:txBody>
+            <a:bodyPr/>
+            <a:lstStyle/>
+            <a:p/>
+          </p:txBody>
+        </p:sp>
+        <p:sp>
+          <p:nvSpPr>
+            <p:cNvPr id="51" name="pl51"/>
+            <p:cNvSpPr/>
+            <p:nvPr/>
+          </p:nvSpPr>
+          <p:spPr>
+            <a:xfrm>
+              <a:off x="3542582" y="4336484"/>
+              <a:ext cx="0" cy="1317069"/>
+            </a:xfrm>
+            <a:custGeom>
+              <a:avLst/>
+              <a:pathLst>
+                <a:path w="0" h="1317069">
+                  <a:moveTo>
+                    <a:pt x="0" y="1317069"/>
+                  </a:moveTo>
+                  <a:lnTo>
+                    <a:pt x="0" y="0"/>
+                  </a:lnTo>
+                  <a:lnTo>
+                    <a:pt x="0" y="0"/>
+                  </a:lnTo>
+                </a:path>
+              </a:pathLst>
+            </a:custGeom>
+            <a:ln w="6775" cap="flat">
+              <a:solidFill>
+                <a:srgbClr val="EBEBEB">
+                  <a:alpha val="100000"/>
+                </a:srgbClr>
+              </a:solidFill>
+              <a:prstDash val="solid"/>
+              <a:round/>
+            </a:ln>
+          </p:spPr>
+          <p:txBody>
+            <a:bodyPr/>
+            <a:lstStyle/>
+            <a:p/>
+          </p:txBody>
+        </p:sp>
+        <p:sp>
+          <p:nvSpPr>
+            <p:cNvPr id="52" name="pl52"/>
+            <p:cNvSpPr/>
+            <p:nvPr/>
+          </p:nvSpPr>
+          <p:spPr>
+            <a:xfrm>
+              <a:off x="4397608" y="4336484"/>
+              <a:ext cx="0" cy="1317069"/>
+            </a:xfrm>
+            <a:custGeom>
+              <a:avLst/>
+              <a:pathLst>
+                <a:path w="0" h="1317069">
+                  <a:moveTo>
+                    <a:pt x="0" y="1317069"/>
+                  </a:moveTo>
+                  <a:lnTo>
+                    <a:pt x="0" y="0"/>
+                  </a:lnTo>
+                  <a:lnTo>
+                    <a:pt x="0" y="0"/>
+                  </a:lnTo>
+                </a:path>
+              </a:pathLst>
+            </a:custGeom>
+            <a:ln w="6775" cap="flat">
+              <a:solidFill>
+                <a:srgbClr val="EBEBEB">
+                  <a:alpha val="100000"/>
+                </a:srgbClr>
+              </a:solidFill>
+              <a:prstDash val="solid"/>
+              <a:round/>
+            </a:ln>
+          </p:spPr>
+          <p:txBody>
+            <a:bodyPr/>
+            <a:lstStyle/>
+            <a:p/>
+          </p:txBody>
+        </p:sp>
+        <p:sp>
+          <p:nvSpPr>
+            <p:cNvPr id="53" name="pl53"/>
+            <p:cNvSpPr/>
+            <p:nvPr/>
+          </p:nvSpPr>
+          <p:spPr>
+            <a:xfrm>
+              <a:off x="5252634" y="4336484"/>
+              <a:ext cx="0" cy="1317069"/>
+            </a:xfrm>
+            <a:custGeom>
+              <a:avLst/>
+              <a:pathLst>
+                <a:path w="0" h="1317069">
+                  <a:moveTo>
+                    <a:pt x="0" y="1317069"/>
+                  </a:moveTo>
+                  <a:lnTo>
+                    <a:pt x="0" y="0"/>
+                  </a:lnTo>
+                  <a:lnTo>
+                    <a:pt x="0" y="0"/>
+                  </a:lnTo>
+                </a:path>
+              </a:pathLst>
+            </a:custGeom>
+            <a:ln w="6775" cap="flat">
+              <a:solidFill>
+                <a:srgbClr val="EBEBEB">
+                  <a:alpha val="100000"/>
+                </a:srgbClr>
+              </a:solidFill>
+              <a:prstDash val="solid"/>
+              <a:round/>
+            </a:ln>
+          </p:spPr>
+          <p:txBody>
+            <a:bodyPr/>
+            <a:lstStyle/>
+            <a:p/>
+          </p:txBody>
+        </p:sp>
+        <p:sp>
+          <p:nvSpPr>
+            <p:cNvPr id="54" name="pl54"/>
+            <p:cNvSpPr/>
+            <p:nvPr/>
+          </p:nvSpPr>
+          <p:spPr>
+            <a:xfrm>
+              <a:off x="6107660" y="4336484"/>
+              <a:ext cx="0" cy="1317069"/>
+            </a:xfrm>
+            <a:custGeom>
+              <a:avLst/>
+              <a:pathLst>
+                <a:path w="0" h="1317069">
+                  <a:moveTo>
+                    <a:pt x="0" y="1317069"/>
+                  </a:moveTo>
+                  <a:lnTo>
+                    <a:pt x="0" y="0"/>
+                  </a:lnTo>
+                  <a:lnTo>
+                    <a:pt x="0" y="0"/>
+                  </a:lnTo>
+                </a:path>
+              </a:pathLst>
+            </a:custGeom>
+            <a:ln w="6775" cap="flat">
+              <a:solidFill>
+                <a:srgbClr val="EBEBEB">
+                  <a:alpha val="100000"/>
+                </a:srgbClr>
+              </a:solidFill>
+              <a:prstDash val="solid"/>
+              <a:round/>
+            </a:ln>
+          </p:spPr>
+          <p:txBody>
+            <a:bodyPr/>
+            <a:lstStyle/>
+            <a:p/>
+          </p:txBody>
+        </p:sp>
+        <p:sp>
+          <p:nvSpPr>
+            <p:cNvPr id="55" name="pl55"/>
+            <p:cNvSpPr/>
+            <p:nvPr/>
+          </p:nvSpPr>
+          <p:spPr>
+            <a:xfrm>
+              <a:off x="6962686" y="4336484"/>
+              <a:ext cx="0" cy="1317069"/>
+            </a:xfrm>
+            <a:custGeom>
+              <a:avLst/>
+              <a:pathLst>
+                <a:path w="0" h="1317069">
+                  <a:moveTo>
+                    <a:pt x="0" y="1317069"/>
+                  </a:moveTo>
+                  <a:lnTo>
+                    <a:pt x="0" y="0"/>
+                  </a:lnTo>
+                  <a:lnTo>
+                    <a:pt x="0" y="0"/>
+                  </a:lnTo>
+                </a:path>
+              </a:pathLst>
+            </a:custGeom>
+            <a:ln w="6775" cap="flat">
+              <a:solidFill>
+                <a:srgbClr val="EBEBEB">
+                  <a:alpha val="100000"/>
+                </a:srgbClr>
+              </a:solidFill>
+              <a:prstDash val="solid"/>
+              <a:round/>
+            </a:ln>
+          </p:spPr>
+          <p:txBody>
+            <a:bodyPr/>
+            <a:lstStyle/>
+            <a:p/>
+          </p:txBody>
+        </p:sp>
+        <p:sp>
+          <p:nvSpPr>
+            <p:cNvPr id="56" name="pl56"/>
+            <p:cNvSpPr/>
+            <p:nvPr/>
+          </p:nvSpPr>
+          <p:spPr>
+            <a:xfrm>
+              <a:off x="7817712" y="4336484"/>
+              <a:ext cx="0" cy="1317069"/>
+            </a:xfrm>
+            <a:custGeom>
+              <a:avLst/>
+              <a:pathLst>
+                <a:path w="0" h="1317069">
+                  <a:moveTo>
+                    <a:pt x="0" y="1317069"/>
+                  </a:moveTo>
+                  <a:lnTo>
+                    <a:pt x="0" y="0"/>
+                  </a:lnTo>
+                  <a:lnTo>
+                    <a:pt x="0" y="0"/>
+                  </a:lnTo>
+                </a:path>
+              </a:pathLst>
+            </a:custGeom>
+            <a:ln w="6775" cap="flat">
+              <a:solidFill>
+                <a:srgbClr val="EBEBEB">
+                  <a:alpha val="100000"/>
+                </a:srgbClr>
+              </a:solidFill>
+              <a:prstDash val="solid"/>
+              <a:round/>
+            </a:ln>
+          </p:spPr>
+          <p:txBody>
+            <a:bodyPr/>
+            <a:lstStyle/>
+            <a:p/>
+          </p:txBody>
+        </p:sp>
+        <p:sp>
+          <p:nvSpPr>
+            <p:cNvPr id="57" name="pl57"/>
+            <p:cNvSpPr/>
+            <p:nvPr/>
+          </p:nvSpPr>
+          <p:spPr>
+            <a:xfrm>
+              <a:off x="887106" y="5593686"/>
+              <a:ext cx="7660515" cy="0"/>
+            </a:xfrm>
+            <a:custGeom>
+              <a:avLst/>
+              <a:pathLst>
+                <a:path w="7660515" h="0">
+                  <a:moveTo>
+                    <a:pt x="0" y="0"/>
+                  </a:moveTo>
+                  <a:lnTo>
+                    <a:pt x="7660515" y="0"/>
+                  </a:lnTo>
+                  <a:lnTo>
+                    <a:pt x="7660515" y="0"/>
+                  </a:lnTo>
+                </a:path>
+              </a:pathLst>
+            </a:custGeom>
+            <a:ln w="13550" cap="flat">
+              <a:solidFill>
+                <a:srgbClr val="EBEBEB">
+                  <a:alpha val="100000"/>
+                </a:srgbClr>
+              </a:solidFill>
+              <a:prstDash val="solid"/>
+              <a:round/>
+            </a:ln>
+          </p:spPr>
+          <p:txBody>
+            <a:bodyPr/>
+            <a:lstStyle/>
+            <a:p/>
+          </p:txBody>
+        </p:sp>
+        <p:sp>
+          <p:nvSpPr>
+            <p:cNvPr id="58" name="pl58"/>
+            <p:cNvSpPr/>
+            <p:nvPr/>
+          </p:nvSpPr>
+          <p:spPr>
+            <a:xfrm>
+              <a:off x="887106" y="5294352"/>
+              <a:ext cx="7660515" cy="0"/>
+            </a:xfrm>
+            <a:custGeom>
+              <a:avLst/>
+              <a:pathLst>
+                <a:path w="7660515" h="0">
+                  <a:moveTo>
+                    <a:pt x="0" y="0"/>
+                  </a:moveTo>
+                  <a:lnTo>
+                    <a:pt x="7660515" y="0"/>
+                  </a:lnTo>
+                  <a:lnTo>
+                    <a:pt x="7660515" y="0"/>
+                  </a:lnTo>
+                </a:path>
+              </a:pathLst>
+            </a:custGeom>
+            <a:ln w="13550" cap="flat">
+              <a:solidFill>
+                <a:srgbClr val="EBEBEB">
+                  <a:alpha val="100000"/>
+                </a:srgbClr>
+              </a:solidFill>
+              <a:prstDash val="solid"/>
+              <a:round/>
+            </a:ln>
+          </p:spPr>
+          <p:txBody>
+            <a:bodyPr/>
+            <a:lstStyle/>
+            <a:p/>
+          </p:txBody>
+        </p:sp>
+        <p:sp>
+          <p:nvSpPr>
+            <p:cNvPr id="59" name="pl59"/>
+            <p:cNvSpPr/>
+            <p:nvPr/>
+          </p:nvSpPr>
+          <p:spPr>
+            <a:xfrm>
+              <a:off x="887106" y="4995019"/>
+              <a:ext cx="7660515" cy="0"/>
+            </a:xfrm>
+            <a:custGeom>
+              <a:avLst/>
+              <a:pathLst>
+                <a:path w="7660515" h="0">
+                  <a:moveTo>
+                    <a:pt x="0" y="0"/>
+                  </a:moveTo>
+                  <a:lnTo>
+                    <a:pt x="7660515" y="0"/>
+                  </a:lnTo>
+                  <a:lnTo>
+                    <a:pt x="7660515" y="0"/>
+                  </a:lnTo>
+                </a:path>
+              </a:pathLst>
+            </a:custGeom>
+            <a:ln w="13550" cap="flat">
+              <a:solidFill>
+                <a:srgbClr val="EBEBEB">
+                  <a:alpha val="100000"/>
+                </a:srgbClr>
+              </a:solidFill>
+              <a:prstDash val="solid"/>
+              <a:round/>
+            </a:ln>
+          </p:spPr>
+          <p:txBody>
+            <a:bodyPr/>
+            <a:lstStyle/>
+            <a:p/>
+          </p:txBody>
+        </p:sp>
+        <p:sp>
+          <p:nvSpPr>
+            <p:cNvPr id="60" name="pl60"/>
+            <p:cNvSpPr/>
+            <p:nvPr/>
+          </p:nvSpPr>
+          <p:spPr>
+            <a:xfrm>
+              <a:off x="887106" y="4695685"/>
+              <a:ext cx="7660515" cy="0"/>
+            </a:xfrm>
+            <a:custGeom>
+              <a:avLst/>
+              <a:pathLst>
+                <a:path w="7660515" h="0">
+                  <a:moveTo>
+                    <a:pt x="0" y="0"/>
+                  </a:moveTo>
+                  <a:lnTo>
+                    <a:pt x="7660515" y="0"/>
+                  </a:lnTo>
+                  <a:lnTo>
+                    <a:pt x="7660515" y="0"/>
+                  </a:lnTo>
+                </a:path>
+              </a:pathLst>
+            </a:custGeom>
+            <a:ln w="13550" cap="flat">
+              <a:solidFill>
+                <a:srgbClr val="EBEBEB">
+                  <a:alpha val="100000"/>
+                </a:srgbClr>
+              </a:solidFill>
+              <a:prstDash val="solid"/>
+              <a:round/>
+            </a:ln>
+          </p:spPr>
+          <p:txBody>
+            <a:bodyPr/>
+            <a:lstStyle/>
+            <a:p/>
+          </p:txBody>
+        </p:sp>
+        <p:sp>
+          <p:nvSpPr>
+            <p:cNvPr id="61" name="pl61"/>
+            <p:cNvSpPr/>
+            <p:nvPr/>
+          </p:nvSpPr>
+          <p:spPr>
+            <a:xfrm>
+              <a:off x="887106" y="4396351"/>
+              <a:ext cx="7660515" cy="0"/>
+            </a:xfrm>
+            <a:custGeom>
+              <a:avLst/>
+              <a:pathLst>
+                <a:path w="7660515" h="0">
+                  <a:moveTo>
+                    <a:pt x="0" y="0"/>
+                  </a:moveTo>
+                  <a:lnTo>
+                    <a:pt x="7660515" y="0"/>
+                  </a:lnTo>
+                  <a:lnTo>
+                    <a:pt x="7660515" y="0"/>
+                  </a:lnTo>
+                </a:path>
+              </a:pathLst>
+            </a:custGeom>
+            <a:ln w="13550" cap="flat">
+              <a:solidFill>
+                <a:srgbClr val="EBEBEB">
+                  <a:alpha val="100000"/>
+                </a:srgbClr>
+              </a:solidFill>
+              <a:prstDash val="solid"/>
+              <a:round/>
+            </a:ln>
+          </p:spPr>
+          <p:txBody>
+            <a:bodyPr/>
+            <a:lstStyle/>
+            <a:p/>
+          </p:txBody>
+        </p:sp>
+        <p:sp>
+          <p:nvSpPr>
+            <p:cNvPr id="62" name="pl62"/>
+            <p:cNvSpPr/>
+            <p:nvPr/>
+          </p:nvSpPr>
+          <p:spPr>
+            <a:xfrm>
+              <a:off x="1405017" y="4336484"/>
+              <a:ext cx="0" cy="1317069"/>
+            </a:xfrm>
+            <a:custGeom>
+              <a:avLst/>
+              <a:pathLst>
+                <a:path w="0" h="1317069">
+                  <a:moveTo>
+                    <a:pt x="0" y="1317069"/>
+                  </a:moveTo>
+                  <a:lnTo>
+                    <a:pt x="0" y="0"/>
+                  </a:lnTo>
+                  <a:lnTo>
+                    <a:pt x="0" y="0"/>
+                  </a:lnTo>
+                </a:path>
+              </a:pathLst>
+            </a:custGeom>
+            <a:ln w="13550" cap="flat">
+              <a:solidFill>
+                <a:srgbClr val="EBEBEB">
+                  <a:alpha val="100000"/>
+                </a:srgbClr>
+              </a:solidFill>
+              <a:prstDash val="solid"/>
+              <a:round/>
+            </a:ln>
+          </p:spPr>
+          <p:txBody>
+            <a:bodyPr/>
+            <a:lstStyle/>
+            <a:p/>
+          </p:txBody>
+        </p:sp>
+        <p:sp>
+          <p:nvSpPr>
+            <p:cNvPr id="63" name="pl63"/>
+            <p:cNvSpPr/>
+            <p:nvPr/>
+          </p:nvSpPr>
+          <p:spPr>
+            <a:xfrm>
+              <a:off x="2260043" y="4336484"/>
+              <a:ext cx="0" cy="1317069"/>
+            </a:xfrm>
+            <a:custGeom>
+              <a:avLst/>
+              <a:pathLst>
+                <a:path w="0" h="1317069">
+                  <a:moveTo>
+                    <a:pt x="0" y="1317069"/>
+                  </a:moveTo>
+                  <a:lnTo>
+                    <a:pt x="0" y="0"/>
+                  </a:lnTo>
+                  <a:lnTo>
+                    <a:pt x="0" y="0"/>
+                  </a:lnTo>
+                </a:path>
+              </a:pathLst>
+            </a:custGeom>
+            <a:ln w="13550" cap="flat">
+              <a:solidFill>
+                <a:srgbClr val="EBEBEB">
+                  <a:alpha val="100000"/>
+                </a:srgbClr>
+              </a:solidFill>
+              <a:prstDash val="solid"/>
+              <a:round/>
+            </a:ln>
+          </p:spPr>
+          <p:txBody>
+            <a:bodyPr/>
+            <a:lstStyle/>
+            <a:p/>
+          </p:txBody>
+        </p:sp>
+        <p:sp>
+          <p:nvSpPr>
+            <p:cNvPr id="64" name="pl64"/>
+            <p:cNvSpPr/>
+            <p:nvPr/>
+          </p:nvSpPr>
+          <p:spPr>
+            <a:xfrm>
+              <a:off x="3115069" y="4336484"/>
+              <a:ext cx="0" cy="1317069"/>
+            </a:xfrm>
+            <a:custGeom>
+              <a:avLst/>
+              <a:pathLst>
+                <a:path w="0" h="1317069">
+                  <a:moveTo>
+                    <a:pt x="0" y="1317069"/>
+                  </a:moveTo>
+                  <a:lnTo>
+                    <a:pt x="0" y="0"/>
+                  </a:lnTo>
+                  <a:lnTo>
+                    <a:pt x="0" y="0"/>
+                  </a:lnTo>
+                </a:path>
+              </a:pathLst>
+            </a:custGeom>
+            <a:ln w="13550" cap="flat">
+              <a:solidFill>
+                <a:srgbClr val="EBEBEB">
+                  <a:alpha val="100000"/>
+                </a:srgbClr>
+              </a:solidFill>
+              <a:prstDash val="solid"/>
+              <a:round/>
+            </a:ln>
+          </p:spPr>
+          <p:txBody>
+            <a:bodyPr/>
+            <a:lstStyle/>
+            <a:p/>
+          </p:txBody>
+        </p:sp>
+        <p:sp>
+          <p:nvSpPr>
+            <p:cNvPr id="65" name="pl65"/>
+            <p:cNvSpPr/>
+            <p:nvPr/>
+          </p:nvSpPr>
+          <p:spPr>
+            <a:xfrm>
+              <a:off x="3970095" y="4336484"/>
+              <a:ext cx="0" cy="1317069"/>
+            </a:xfrm>
+            <a:custGeom>
+              <a:avLst/>
+              <a:pathLst>
+                <a:path w="0" h="1317069">
+                  <a:moveTo>
+                    <a:pt x="0" y="1317069"/>
+                  </a:moveTo>
+                  <a:lnTo>
+                    <a:pt x="0" y="0"/>
+                  </a:lnTo>
+                  <a:lnTo>
+                    <a:pt x="0" y="0"/>
+                  </a:lnTo>
+                </a:path>
+              </a:pathLst>
+            </a:custGeom>
+            <a:ln w="13550" cap="flat">
+              <a:solidFill>
+                <a:srgbClr val="EBEBEB">
+                  <a:alpha val="100000"/>
+                </a:srgbClr>
+              </a:solidFill>
+              <a:prstDash val="solid"/>
+              <a:round/>
+            </a:ln>
+          </p:spPr>
+          <p:txBody>
+            <a:bodyPr/>
+            <a:lstStyle/>
+            <a:p/>
+          </p:txBody>
+        </p:sp>
+        <p:sp>
+          <p:nvSpPr>
+            <p:cNvPr id="66" name="pl66"/>
+            <p:cNvSpPr/>
+            <p:nvPr/>
+          </p:nvSpPr>
+          <p:spPr>
+            <a:xfrm>
+              <a:off x="4825121" y="4336484"/>
+              <a:ext cx="0" cy="1317069"/>
+            </a:xfrm>
+            <a:custGeom>
+              <a:avLst/>
+              <a:pathLst>
+                <a:path w="0" h="1317069">
+                  <a:moveTo>
+                    <a:pt x="0" y="1317069"/>
+                  </a:moveTo>
+                  <a:lnTo>
+                    <a:pt x="0" y="0"/>
+                  </a:lnTo>
+                  <a:lnTo>
+                    <a:pt x="0" y="0"/>
+                  </a:lnTo>
+                </a:path>
+              </a:pathLst>
+            </a:custGeom>
+            <a:ln w="13550" cap="flat">
+              <a:solidFill>
+                <a:srgbClr val="EBEBEB">
+                  <a:alpha val="100000"/>
+                </a:srgbClr>
+              </a:solidFill>
+              <a:prstDash val="solid"/>
+              <a:round/>
+            </a:ln>
+          </p:spPr>
+          <p:txBody>
+            <a:bodyPr/>
+            <a:lstStyle/>
+            <a:p/>
+          </p:txBody>
+        </p:sp>
+        <p:sp>
+          <p:nvSpPr>
+            <p:cNvPr id="67" name="pl67"/>
+            <p:cNvSpPr/>
+            <p:nvPr/>
+          </p:nvSpPr>
+          <p:spPr>
+            <a:xfrm>
+              <a:off x="5680147" y="4336484"/>
+              <a:ext cx="0" cy="1317069"/>
+            </a:xfrm>
+            <a:custGeom>
+              <a:avLst/>
+              <a:pathLst>
+                <a:path w="0" h="1317069">
+                  <a:moveTo>
+                    <a:pt x="0" y="1317069"/>
+                  </a:moveTo>
+                  <a:lnTo>
+                    <a:pt x="0" y="0"/>
+                  </a:lnTo>
+                  <a:lnTo>
+                    <a:pt x="0" y="0"/>
+                  </a:lnTo>
+                </a:path>
+              </a:pathLst>
+            </a:custGeom>
+            <a:ln w="13550" cap="flat">
+              <a:solidFill>
+                <a:srgbClr val="EBEBEB">
+                  <a:alpha val="100000"/>
+                </a:srgbClr>
+              </a:solidFill>
+              <a:prstDash val="solid"/>
+              <a:round/>
+            </a:ln>
+          </p:spPr>
+          <p:txBody>
+            <a:bodyPr/>
+            <a:lstStyle/>
+            <a:p/>
+          </p:txBody>
+        </p:sp>
+        <p:sp>
+          <p:nvSpPr>
+            <p:cNvPr id="68" name="pl68"/>
+            <p:cNvSpPr/>
+            <p:nvPr/>
+          </p:nvSpPr>
+          <p:spPr>
+            <a:xfrm>
+              <a:off x="6535173" y="4336484"/>
+              <a:ext cx="0" cy="1317069"/>
+            </a:xfrm>
+            <a:custGeom>
+              <a:avLst/>
+              <a:pathLst>
+                <a:path w="0" h="1317069">
+                  <a:moveTo>
+                    <a:pt x="0" y="1317069"/>
+                  </a:moveTo>
+                  <a:lnTo>
+                    <a:pt x="0" y="0"/>
+                  </a:lnTo>
+                  <a:lnTo>
+                    <a:pt x="0" y="0"/>
+                  </a:lnTo>
+                </a:path>
+              </a:pathLst>
+            </a:custGeom>
+            <a:ln w="13550" cap="flat">
+              <a:solidFill>
+                <a:srgbClr val="EBEBEB">
+                  <a:alpha val="100000"/>
+                </a:srgbClr>
+              </a:solidFill>
+              <a:prstDash val="solid"/>
+              <a:round/>
+            </a:ln>
+          </p:spPr>
+          <p:txBody>
+            <a:bodyPr/>
+            <a:lstStyle/>
+            <a:p/>
+          </p:txBody>
+        </p:sp>
+        <p:sp>
+          <p:nvSpPr>
+            <p:cNvPr id="69" name="pl69"/>
+            <p:cNvSpPr/>
+            <p:nvPr/>
+          </p:nvSpPr>
+          <p:spPr>
+            <a:xfrm>
+              <a:off x="7390199" y="4336484"/>
+              <a:ext cx="0" cy="1317069"/>
+            </a:xfrm>
+            <a:custGeom>
+              <a:avLst/>
+              <a:pathLst>
+                <a:path w="0" h="1317069">
+                  <a:moveTo>
+                    <a:pt x="0" y="1317069"/>
+                  </a:moveTo>
+                  <a:lnTo>
+                    <a:pt x="0" y="0"/>
+                  </a:lnTo>
+                  <a:lnTo>
+                    <a:pt x="0" y="0"/>
+                  </a:lnTo>
+                </a:path>
+              </a:pathLst>
+            </a:custGeom>
+            <a:ln w="13550" cap="flat">
+              <a:solidFill>
+                <a:srgbClr val="EBEBEB">
+                  <a:alpha val="100000"/>
+                </a:srgbClr>
+              </a:solidFill>
+              <a:prstDash val="solid"/>
+              <a:round/>
+            </a:ln>
+          </p:spPr>
+          <p:txBody>
+            <a:bodyPr/>
+            <a:lstStyle/>
+            <a:p/>
+          </p:txBody>
+        </p:sp>
+        <p:sp>
+          <p:nvSpPr>
+            <p:cNvPr id="70" name="pl70"/>
+            <p:cNvSpPr/>
+            <p:nvPr/>
+          </p:nvSpPr>
+          <p:spPr>
+            <a:xfrm>
+              <a:off x="8245225" y="4336484"/>
+              <a:ext cx="0" cy="1317069"/>
+            </a:xfrm>
+            <a:custGeom>
+              <a:avLst/>
+              <a:pathLst>
+                <a:path w="0" h="1317069">
+                  <a:moveTo>
+                    <a:pt x="0" y="1317069"/>
+                  </a:moveTo>
+                  <a:lnTo>
+                    <a:pt x="0" y="0"/>
+                  </a:lnTo>
+                  <a:lnTo>
+                    <a:pt x="0" y="0"/>
+                  </a:lnTo>
+                </a:path>
+              </a:pathLst>
+            </a:custGeom>
+            <a:ln w="13550" cap="flat">
+              <a:solidFill>
+                <a:srgbClr val="EBEBEB">
+                  <a:alpha val="100000"/>
+                </a:srgbClr>
+              </a:solidFill>
+              <a:prstDash val="solid"/>
+              <a:round/>
+            </a:ln>
+          </p:spPr>
+          <p:txBody>
+            <a:bodyPr/>
+            <a:lstStyle/>
+            <a:p/>
+          </p:txBody>
+        </p:sp>
+        <p:sp>
+          <p:nvSpPr>
+            <p:cNvPr id="71" name="pg71"/>
+            <p:cNvSpPr/>
+            <p:nvPr/>
+          </p:nvSpPr>
+          <p:spPr>
+            <a:xfrm>
+              <a:off x="1235312" y="4912688"/>
+              <a:ext cx="6964104" cy="575772"/>
+            </a:xfrm>
+            <a:custGeom>
+              <a:avLst/>
+              <a:pathLst>
+                <a:path w="6964104" h="575772">
+                  <a:moveTo>
+                    <a:pt x="0" y="0"/>
+                  </a:moveTo>
+                  <a:lnTo>
+                    <a:pt x="70344" y="12725"/>
+                  </a:lnTo>
+                  <a:lnTo>
+                    <a:pt x="140688" y="25212"/>
+                  </a:lnTo>
+                  <a:lnTo>
+                    <a:pt x="211033" y="37467"/>
+                  </a:lnTo>
+                  <a:lnTo>
+                    <a:pt x="281377" y="49492"/>
+                  </a:lnTo>
+                  <a:lnTo>
+                    <a:pt x="351722" y="61293"/>
+                  </a:lnTo>
+                  <a:lnTo>
+                    <a:pt x="422066" y="72873"/>
+                  </a:lnTo>
+                  <a:lnTo>
+                    <a:pt x="492411" y="84236"/>
+                  </a:lnTo>
+                  <a:lnTo>
+                    <a:pt x="562755" y="95388"/>
+                  </a:lnTo>
+                  <a:lnTo>
+                    <a:pt x="633100" y="106330"/>
+                  </a:lnTo>
+                  <a:lnTo>
+                    <a:pt x="703444" y="117069"/>
+                  </a:lnTo>
+                  <a:lnTo>
+                    <a:pt x="773789" y="127607"/>
+                  </a:lnTo>
+                  <a:lnTo>
+                    <a:pt x="844133" y="137948"/>
+                  </a:lnTo>
+                  <a:lnTo>
+                    <a:pt x="914478" y="148095"/>
+                  </a:lnTo>
+                  <a:lnTo>
+                    <a:pt x="984822" y="158053"/>
+                  </a:lnTo>
+                  <a:lnTo>
+                    <a:pt x="1055167" y="167825"/>
+                  </a:lnTo>
+                  <a:lnTo>
+                    <a:pt x="1125511" y="177414"/>
+                  </a:lnTo>
+                  <a:lnTo>
+                    <a:pt x="1195856" y="186825"/>
+                  </a:lnTo>
+                  <a:lnTo>
+                    <a:pt x="1266200" y="196059"/>
+                  </a:lnTo>
+                  <a:lnTo>
+                    <a:pt x="1336545" y="205121"/>
+                  </a:lnTo>
+                  <a:lnTo>
+                    <a:pt x="1406889" y="214013"/>
+                  </a:lnTo>
+                  <a:lnTo>
+                    <a:pt x="1477234" y="222739"/>
+                  </a:lnTo>
+                  <a:lnTo>
+                    <a:pt x="1547578" y="231303"/>
+                  </a:lnTo>
+                  <a:lnTo>
+                    <a:pt x="1617923" y="239706"/>
+                  </a:lnTo>
+                  <a:lnTo>
+                    <a:pt x="1688267" y="247952"/>
+                  </a:lnTo>
+                  <a:lnTo>
+                    <a:pt x="1758612" y="256044"/>
+                  </a:lnTo>
+                  <a:lnTo>
+                    <a:pt x="1828956" y="263985"/>
+                  </a:lnTo>
+                  <a:lnTo>
+                    <a:pt x="1899301" y="271777"/>
+                  </a:lnTo>
+                  <a:lnTo>
+                    <a:pt x="1969645" y="279424"/>
+                  </a:lnTo>
+                  <a:lnTo>
+                    <a:pt x="2039990" y="286928"/>
+                  </a:lnTo>
+                  <a:lnTo>
+                    <a:pt x="2110334" y="294292"/>
+                  </a:lnTo>
+                  <a:lnTo>
+                    <a:pt x="2180679" y="301518"/>
+                  </a:lnTo>
+                  <a:lnTo>
+                    <a:pt x="2251023" y="308609"/>
+                  </a:lnTo>
+                  <a:lnTo>
+                    <a:pt x="2321368" y="315568"/>
+                  </a:lnTo>
+                  <a:lnTo>
+                    <a:pt x="2391712" y="322396"/>
+                  </a:lnTo>
+                  <a:lnTo>
+                    <a:pt x="2462057" y="329097"/>
+                  </a:lnTo>
+                  <a:lnTo>
+                    <a:pt x="2532401" y="335673"/>
+                  </a:lnTo>
+                  <a:lnTo>
+                    <a:pt x="2602746" y="342126"/>
+                  </a:lnTo>
+                  <a:lnTo>
+                    <a:pt x="2673090" y="348458"/>
+                  </a:lnTo>
+                  <a:lnTo>
+                    <a:pt x="2743435" y="354672"/>
+                  </a:lnTo>
+                  <a:lnTo>
+                    <a:pt x="2813779" y="360770"/>
+                  </a:lnTo>
+                  <a:lnTo>
+                    <a:pt x="2884124" y="366754"/>
+                  </a:lnTo>
+                  <a:lnTo>
+                    <a:pt x="2954468" y="372626"/>
+                  </a:lnTo>
+                  <a:lnTo>
+                    <a:pt x="3024813" y="378388"/>
+                  </a:lnTo>
+                  <a:lnTo>
+                    <a:pt x="3095157" y="381926"/>
+                  </a:lnTo>
+                  <a:lnTo>
+                    <a:pt x="3165502" y="382545"/>
+                  </a:lnTo>
+                  <a:lnTo>
+                    <a:pt x="3235846" y="383163"/>
+                  </a:lnTo>
+                  <a:lnTo>
+                    <a:pt x="3306191" y="383779"/>
+                  </a:lnTo>
+                  <a:lnTo>
+                    <a:pt x="3376535" y="384394"/>
+                  </a:lnTo>
+                  <a:lnTo>
+                    <a:pt x="3446880" y="385008"/>
+                  </a:lnTo>
+                  <a:lnTo>
+                    <a:pt x="3517224" y="385621"/>
+                  </a:lnTo>
+                  <a:lnTo>
+                    <a:pt x="3587569" y="386232"/>
+                  </a:lnTo>
+                  <a:lnTo>
+                    <a:pt x="3657913" y="386842"/>
+                  </a:lnTo>
+                  <a:lnTo>
+                    <a:pt x="3728257" y="387451"/>
+                  </a:lnTo>
+                  <a:lnTo>
+                    <a:pt x="3798602" y="388058"/>
+                  </a:lnTo>
+                  <a:lnTo>
+                    <a:pt x="3868946" y="388665"/>
+                  </a:lnTo>
+                  <a:lnTo>
+                    <a:pt x="3939291" y="389270"/>
+                  </a:lnTo>
+                  <a:lnTo>
+                    <a:pt x="4009635" y="389873"/>
+                  </a:lnTo>
+                  <a:lnTo>
+                    <a:pt x="4079980" y="390476"/>
+                  </a:lnTo>
+                  <a:lnTo>
+                    <a:pt x="4150324" y="391077"/>
+                  </a:lnTo>
+                  <a:lnTo>
+                    <a:pt x="4220669" y="391677"/>
+                  </a:lnTo>
+                  <a:lnTo>
+                    <a:pt x="4291013" y="392276"/>
+                  </a:lnTo>
+                  <a:lnTo>
+                    <a:pt x="4361358" y="392873"/>
+                  </a:lnTo>
+                  <a:lnTo>
+                    <a:pt x="4431702" y="393470"/>
+                  </a:lnTo>
+                  <a:lnTo>
+                    <a:pt x="4502047" y="394065"/>
+                  </a:lnTo>
+                  <a:lnTo>
+                    <a:pt x="4572391" y="394659"/>
+                  </a:lnTo>
+                  <a:lnTo>
+                    <a:pt x="4642736" y="395251"/>
+                  </a:lnTo>
+                  <a:lnTo>
+                    <a:pt x="4713080" y="395843"/>
+                  </a:lnTo>
+                  <a:lnTo>
+                    <a:pt x="4783425" y="396433"/>
+                  </a:lnTo>
+                  <a:lnTo>
+                    <a:pt x="4853769" y="397022"/>
+                  </a:lnTo>
+                  <a:lnTo>
+                    <a:pt x="4924114" y="397609"/>
+                  </a:lnTo>
+                  <a:lnTo>
+                    <a:pt x="4994458" y="398196"/>
+                  </a:lnTo>
+                  <a:lnTo>
+                    <a:pt x="5064803" y="398781"/>
+                  </a:lnTo>
+                  <a:lnTo>
+                    <a:pt x="5135147" y="399365"/>
+                  </a:lnTo>
+                  <a:lnTo>
+                    <a:pt x="5205492" y="399948"/>
+                  </a:lnTo>
+                  <a:lnTo>
+                    <a:pt x="5275836" y="400530"/>
+                  </a:lnTo>
+                  <a:lnTo>
+                    <a:pt x="5346181" y="401110"/>
+                  </a:lnTo>
+                  <a:lnTo>
+                    <a:pt x="5416525" y="401690"/>
+                  </a:lnTo>
+                  <a:lnTo>
+                    <a:pt x="5486870" y="402268"/>
+                  </a:lnTo>
+                  <a:lnTo>
+                    <a:pt x="5557214" y="402844"/>
+                  </a:lnTo>
+                  <a:lnTo>
+                    <a:pt x="5627559" y="403420"/>
+                  </a:lnTo>
+                  <a:lnTo>
+                    <a:pt x="5697903" y="403995"/>
+                  </a:lnTo>
+                  <a:lnTo>
+                    <a:pt x="5768248" y="404568"/>
+                  </a:lnTo>
+                  <a:lnTo>
+                    <a:pt x="5838592" y="405140"/>
+                  </a:lnTo>
+                  <a:lnTo>
+                    <a:pt x="5908937" y="405711"/>
+                  </a:lnTo>
+                  <a:lnTo>
+                    <a:pt x="5979281" y="406281"/>
+                  </a:lnTo>
+                  <a:lnTo>
+                    <a:pt x="6049626" y="406849"/>
+                  </a:lnTo>
+                  <a:lnTo>
+                    <a:pt x="6119970" y="407417"/>
+                  </a:lnTo>
+                  <a:lnTo>
+                    <a:pt x="6190315" y="407983"/>
+                  </a:lnTo>
+                  <a:lnTo>
+                    <a:pt x="6260659" y="408548"/>
+                  </a:lnTo>
+                  <a:lnTo>
+                    <a:pt x="6331004" y="409112"/>
+                  </a:lnTo>
+                  <a:lnTo>
+                    <a:pt x="6401348" y="409674"/>
+                  </a:lnTo>
+                  <a:lnTo>
+                    <a:pt x="6471693" y="410236"/>
+                  </a:lnTo>
+                  <a:lnTo>
+                    <a:pt x="6542037" y="410796"/>
+                  </a:lnTo>
+                  <a:lnTo>
+                    <a:pt x="6612382" y="411355"/>
+                  </a:lnTo>
+                  <a:lnTo>
+                    <a:pt x="6682726" y="411914"/>
+                  </a:lnTo>
+                  <a:lnTo>
+                    <a:pt x="6753071" y="412470"/>
+                  </a:lnTo>
+                  <a:lnTo>
+                    <a:pt x="6823415" y="413026"/>
+                  </a:lnTo>
+                  <a:lnTo>
+                    <a:pt x="6893760" y="413581"/>
+                  </a:lnTo>
+                  <a:lnTo>
+                    <a:pt x="6964104" y="414134"/>
+                  </a:lnTo>
+                  <a:lnTo>
+                    <a:pt x="6964104" y="575772"/>
+                  </a:lnTo>
+                  <a:lnTo>
+                    <a:pt x="6893760" y="573768"/>
+                  </a:lnTo>
+                  <a:lnTo>
+                    <a:pt x="6823415" y="571727"/>
+                  </a:lnTo>
+                  <a:lnTo>
+                    <a:pt x="6753071" y="569646"/>
+                  </a:lnTo>
+                  <a:lnTo>
+                    <a:pt x="6682726" y="567525"/>
+                  </a:lnTo>
+                  <a:lnTo>
+                    <a:pt x="6612382" y="565365"/>
+                  </a:lnTo>
+                  <a:lnTo>
+                    <a:pt x="6542037" y="563163"/>
+                  </a:lnTo>
+                  <a:lnTo>
+                    <a:pt x="6471693" y="560919"/>
+                  </a:lnTo>
+                  <a:lnTo>
+                    <a:pt x="6401348" y="558632"/>
+                  </a:lnTo>
+                  <a:lnTo>
+                    <a:pt x="6331004" y="556302"/>
+                  </a:lnTo>
+                  <a:lnTo>
+                    <a:pt x="6260659" y="553928"/>
+                  </a:lnTo>
+                  <a:lnTo>
+                    <a:pt x="6190315" y="551508"/>
+                  </a:lnTo>
+                  <a:lnTo>
+                    <a:pt x="6119970" y="549042"/>
+                  </a:lnTo>
+                  <a:lnTo>
+                    <a:pt x="6049626" y="546530"/>
+                  </a:lnTo>
+                  <a:lnTo>
+                    <a:pt x="5979281" y="543969"/>
+                  </a:lnTo>
+                  <a:lnTo>
+                    <a:pt x="5908937" y="541360"/>
+                  </a:lnTo>
+                  <a:lnTo>
+                    <a:pt x="5838592" y="538701"/>
+                  </a:lnTo>
+                  <a:lnTo>
+                    <a:pt x="5768248" y="535991"/>
+                  </a:lnTo>
+                  <a:lnTo>
+                    <a:pt x="5697903" y="533230"/>
+                  </a:lnTo>
+                  <a:lnTo>
+                    <a:pt x="5627559" y="530416"/>
+                  </a:lnTo>
+                  <a:lnTo>
+                    <a:pt x="5557214" y="527549"/>
+                  </a:lnTo>
+                  <a:lnTo>
+                    <a:pt x="5486870" y="524627"/>
+                  </a:lnTo>
+                  <a:lnTo>
+                    <a:pt x="5416525" y="521649"/>
+                  </a:lnTo>
+                  <a:lnTo>
+                    <a:pt x="5346181" y="518615"/>
+                  </a:lnTo>
+                  <a:lnTo>
+                    <a:pt x="5275836" y="515522"/>
+                  </a:lnTo>
+                  <a:lnTo>
+                    <a:pt x="5205492" y="512371"/>
+                  </a:lnTo>
+                  <a:lnTo>
+                    <a:pt x="5135147" y="509160"/>
+                  </a:lnTo>
+                  <a:lnTo>
+                    <a:pt x="5064803" y="505888"/>
+                  </a:lnTo>
+                  <a:lnTo>
+                    <a:pt x="4994458" y="502554"/>
+                  </a:lnTo>
+                  <a:lnTo>
+                    <a:pt x="4924114" y="499156"/>
+                  </a:lnTo>
+                  <a:lnTo>
+                    <a:pt x="4853769" y="495693"/>
+                  </a:lnTo>
+                  <a:lnTo>
+                    <a:pt x="4783425" y="492164"/>
+                  </a:lnTo>
+                  <a:lnTo>
+                    <a:pt x="4713080" y="488569"/>
+                  </a:lnTo>
+                  <a:lnTo>
+                    <a:pt x="4642736" y="484904"/>
+                  </a:lnTo>
+                  <a:lnTo>
+                    <a:pt x="4572391" y="481170"/>
+                  </a:lnTo>
+                  <a:lnTo>
+                    <a:pt x="4502047" y="477365"/>
+                  </a:lnTo>
+                  <a:lnTo>
+                    <a:pt x="4431702" y="473488"/>
+                  </a:lnTo>
+                  <a:lnTo>
+                    <a:pt x="4361358" y="469536"/>
+                  </a:lnTo>
+                  <a:lnTo>
+                    <a:pt x="4291013" y="465509"/>
+                  </a:lnTo>
+                  <a:lnTo>
+                    <a:pt x="4220669" y="461406"/>
+                  </a:lnTo>
+                  <a:lnTo>
+                    <a:pt x="4150324" y="457225"/>
+                  </a:lnTo>
+                  <a:lnTo>
+                    <a:pt x="4079980" y="452963"/>
+                  </a:lnTo>
+                  <a:lnTo>
+                    <a:pt x="4009635" y="448621"/>
+                  </a:lnTo>
+                  <a:lnTo>
+                    <a:pt x="3939291" y="444196"/>
+                  </a:lnTo>
+                  <a:lnTo>
+                    <a:pt x="3868946" y="439687"/>
+                  </a:lnTo>
+                  <a:lnTo>
+                    <a:pt x="3798602" y="435092"/>
+                  </a:lnTo>
+                  <a:lnTo>
+                    <a:pt x="3728257" y="430409"/>
+                  </a:lnTo>
+                  <a:lnTo>
+                    <a:pt x="3657913" y="425638"/>
+                  </a:lnTo>
+                  <a:lnTo>
+                    <a:pt x="3587569" y="420775"/>
+                  </a:lnTo>
+                  <a:lnTo>
+                    <a:pt x="3517224" y="415820"/>
+                  </a:lnTo>
+                  <a:lnTo>
+                    <a:pt x="3446880" y="410770"/>
+                  </a:lnTo>
+                  <a:lnTo>
+                    <a:pt x="3376535" y="405624"/>
+                  </a:lnTo>
+                  <a:lnTo>
+                    <a:pt x="3306191" y="400381"/>
+                  </a:lnTo>
+                  <a:lnTo>
+                    <a:pt x="3235846" y="395037"/>
+                  </a:lnTo>
+                  <a:lnTo>
+                    <a:pt x="3165502" y="389592"/>
+                  </a:lnTo>
+                  <a:lnTo>
+                    <a:pt x="3095157" y="384043"/>
+                  </a:lnTo>
+                  <a:lnTo>
+                    <a:pt x="3024813" y="381306"/>
+                  </a:lnTo>
+                  <a:lnTo>
+                    <a:pt x="2954468" y="380684"/>
+                  </a:lnTo>
+                  <a:lnTo>
+                    <a:pt x="2884124" y="380062"/>
+                  </a:lnTo>
+                  <a:lnTo>
+                    <a:pt x="2813779" y="379437"/>
+                  </a:lnTo>
+                  <a:lnTo>
+                    <a:pt x="2743435" y="378812"/>
+                  </a:lnTo>
+                  <a:lnTo>
+                    <a:pt x="2673090" y="378185"/>
+                  </a:lnTo>
+                  <a:lnTo>
+                    <a:pt x="2602746" y="377557"/>
+                  </a:lnTo>
+                  <a:lnTo>
+                    <a:pt x="2532401" y="376928"/>
+                  </a:lnTo>
+                  <a:lnTo>
+                    <a:pt x="2462057" y="376297"/>
+                  </a:lnTo>
+                  <a:lnTo>
+                    <a:pt x="2391712" y="375665"/>
+                  </a:lnTo>
+                  <a:lnTo>
+                    <a:pt x="2321368" y="375032"/>
+                  </a:lnTo>
+                  <a:lnTo>
+                    <a:pt x="2251023" y="374398"/>
+                  </a:lnTo>
+                  <a:lnTo>
+                    <a:pt x="2180679" y="373762"/>
+                  </a:lnTo>
+                  <a:lnTo>
+                    <a:pt x="2110334" y="373125"/>
+                  </a:lnTo>
+                  <a:lnTo>
+                    <a:pt x="2039990" y="372486"/>
+                  </a:lnTo>
+                  <a:lnTo>
+                    <a:pt x="1969645" y="371846"/>
+                  </a:lnTo>
+                  <a:lnTo>
+                    <a:pt x="1899301" y="371205"/>
+                  </a:lnTo>
+                  <a:lnTo>
+                    <a:pt x="1828956" y="370563"/>
+                  </a:lnTo>
+                  <a:lnTo>
+                    <a:pt x="1758612" y="369919"/>
+                  </a:lnTo>
+                  <a:lnTo>
+                    <a:pt x="1688267" y="369274"/>
+                  </a:lnTo>
+                  <a:lnTo>
+                    <a:pt x="1617923" y="368627"/>
+                  </a:lnTo>
+                  <a:lnTo>
+                    <a:pt x="1547578" y="367980"/>
+                  </a:lnTo>
+                  <a:lnTo>
+                    <a:pt x="1477234" y="367330"/>
+                  </a:lnTo>
+                  <a:lnTo>
+                    <a:pt x="1406889" y="366680"/>
+                  </a:lnTo>
+                  <a:lnTo>
+                    <a:pt x="1336545" y="366028"/>
+                  </a:lnTo>
+                  <a:lnTo>
+                    <a:pt x="1266200" y="365375"/>
+                  </a:lnTo>
+                  <a:lnTo>
+                    <a:pt x="1195856" y="364720"/>
+                  </a:lnTo>
+                  <a:lnTo>
+                    <a:pt x="1125511" y="364064"/>
+                  </a:lnTo>
+                  <a:lnTo>
+                    <a:pt x="1055167" y="363407"/>
+                  </a:lnTo>
+                  <a:lnTo>
+                    <a:pt x="984822" y="362748"/>
+                  </a:lnTo>
+                  <a:lnTo>
+                    <a:pt x="914478" y="362088"/>
+                  </a:lnTo>
+                  <a:lnTo>
+                    <a:pt x="844133" y="361427"/>
+                  </a:lnTo>
+                  <a:lnTo>
+                    <a:pt x="773789" y="360764"/>
+                  </a:lnTo>
+                  <a:lnTo>
+                    <a:pt x="703444" y="360100"/>
+                  </a:lnTo>
+                  <a:lnTo>
+                    <a:pt x="633100" y="359435"/>
+                  </a:lnTo>
+                  <a:lnTo>
+                    <a:pt x="562755" y="358768"/>
+                  </a:lnTo>
+                  <a:lnTo>
+                    <a:pt x="492411" y="358099"/>
+                  </a:lnTo>
+                  <a:lnTo>
+                    <a:pt x="422066" y="357430"/>
+                  </a:lnTo>
+                  <a:lnTo>
+                    <a:pt x="351722" y="356759"/>
+                  </a:lnTo>
+                  <a:lnTo>
+                    <a:pt x="281377" y="356086"/>
+                  </a:lnTo>
+                  <a:lnTo>
+                    <a:pt x="211033" y="355412"/>
+                  </a:lnTo>
+                  <a:lnTo>
+                    <a:pt x="140688" y="354737"/>
+                  </a:lnTo>
+                  <a:lnTo>
+                    <a:pt x="70344" y="354061"/>
+                  </a:lnTo>
+                  <a:lnTo>
+                    <a:pt x="0" y="353383"/>
+                  </a:lnTo>
+                  <a:close/>
+                </a:path>
+              </a:pathLst>
+            </a:custGeom>
+            <a:solidFill>
+              <a:srgbClr val="FF8C00">
+                <a:alpha val="20000"/>
+              </a:srgbClr>
+            </a:solidFill>
+          </p:spPr>
+          <p:txBody>
+            <a:bodyPr/>
+            <a:lstStyle/>
+            <a:p/>
+          </p:txBody>
+        </p:sp>
+        <p:sp>
+          <p:nvSpPr>
+            <p:cNvPr id="72" name="pl72"/>
+            <p:cNvSpPr/>
+            <p:nvPr/>
+          </p:nvSpPr>
+          <p:spPr>
+            <a:xfrm>
+              <a:off x="1235312" y="4912688"/>
+              <a:ext cx="6964104" cy="414134"/>
+            </a:xfrm>
+            <a:custGeom>
+              <a:avLst/>
+              <a:pathLst>
+                <a:path w="6964104" h="414134">
+                  <a:moveTo>
+                    <a:pt x="0" y="0"/>
+                  </a:moveTo>
+                  <a:lnTo>
+                    <a:pt x="70344" y="12725"/>
+                  </a:lnTo>
+                  <a:lnTo>
+                    <a:pt x="140688" y="25212"/>
+                  </a:lnTo>
+                  <a:lnTo>
+                    <a:pt x="211033" y="37467"/>
+                  </a:lnTo>
+                  <a:lnTo>
+                    <a:pt x="281377" y="49492"/>
+                  </a:lnTo>
+                  <a:lnTo>
+                    <a:pt x="351722" y="61293"/>
+                  </a:lnTo>
+                  <a:lnTo>
+                    <a:pt x="422066" y="72873"/>
+                  </a:lnTo>
+                  <a:lnTo>
+                    <a:pt x="492411" y="84236"/>
+                  </a:lnTo>
+                  <a:lnTo>
+                    <a:pt x="562755" y="95388"/>
+                  </a:lnTo>
+                  <a:lnTo>
+                    <a:pt x="633100" y="106330"/>
+                  </a:lnTo>
+                  <a:lnTo>
+                    <a:pt x="703444" y="117069"/>
+                  </a:lnTo>
+                  <a:lnTo>
+                    <a:pt x="773789" y="127607"/>
+                  </a:lnTo>
+                  <a:lnTo>
+                    <a:pt x="844133" y="137948"/>
+                  </a:lnTo>
+                  <a:lnTo>
+                    <a:pt x="914478" y="148095"/>
+                  </a:lnTo>
+                  <a:lnTo>
+                    <a:pt x="984822" y="158053"/>
+                  </a:lnTo>
+                  <a:lnTo>
+                    <a:pt x="1055167" y="167825"/>
+                  </a:lnTo>
+                  <a:lnTo>
+                    <a:pt x="1125511" y="177414"/>
+                  </a:lnTo>
+                  <a:lnTo>
+                    <a:pt x="1195856" y="186825"/>
+                  </a:lnTo>
+                  <a:lnTo>
+                    <a:pt x="1266200" y="196059"/>
+                  </a:lnTo>
+                  <a:lnTo>
+                    <a:pt x="1336545" y="205121"/>
+                  </a:lnTo>
+                  <a:lnTo>
+                    <a:pt x="1406889" y="214013"/>
+                  </a:lnTo>
+                  <a:lnTo>
+                    <a:pt x="1477234" y="222739"/>
+                  </a:lnTo>
+                  <a:lnTo>
+                    <a:pt x="1547578" y="231303"/>
+                  </a:lnTo>
+                  <a:lnTo>
+                    <a:pt x="1617923" y="239706"/>
+                  </a:lnTo>
+                  <a:lnTo>
+                    <a:pt x="1688267" y="247952"/>
+                  </a:lnTo>
+                  <a:lnTo>
+                    <a:pt x="1758612" y="256044"/>
+                  </a:lnTo>
+                  <a:lnTo>
+                    <a:pt x="1828956" y="263985"/>
+                  </a:lnTo>
+                  <a:lnTo>
+                    <a:pt x="1899301" y="271777"/>
+                  </a:lnTo>
+                  <a:lnTo>
+                    <a:pt x="1969645" y="279424"/>
+                  </a:lnTo>
+                  <a:lnTo>
+                    <a:pt x="2039990" y="286928"/>
+                  </a:lnTo>
+                  <a:lnTo>
+                    <a:pt x="2110334" y="294292"/>
+                  </a:lnTo>
+                  <a:lnTo>
+                    <a:pt x="2180679" y="301518"/>
+                  </a:lnTo>
+                  <a:lnTo>
+                    <a:pt x="2251023" y="308609"/>
+                  </a:lnTo>
+                  <a:lnTo>
+                    <a:pt x="2321368" y="315568"/>
+                  </a:lnTo>
+                  <a:lnTo>
+                    <a:pt x="2391712" y="322396"/>
+                  </a:lnTo>
+                  <a:lnTo>
+                    <a:pt x="2462057" y="329097"/>
+                  </a:lnTo>
+                  <a:lnTo>
+                    <a:pt x="2532401" y="335673"/>
+                  </a:lnTo>
+                  <a:lnTo>
+                    <a:pt x="2602746" y="342126"/>
+                  </a:lnTo>
+                  <a:lnTo>
+                    <a:pt x="2673090" y="348458"/>
+                  </a:lnTo>
+                  <a:lnTo>
+                    <a:pt x="2743435" y="354672"/>
+                  </a:lnTo>
+                  <a:lnTo>
+                    <a:pt x="2813779" y="360770"/>
+                  </a:lnTo>
+                  <a:lnTo>
+                    <a:pt x="2884124" y="366754"/>
+                  </a:lnTo>
+                  <a:lnTo>
+                    <a:pt x="2954468" y="372626"/>
+                  </a:lnTo>
+                  <a:lnTo>
+                    <a:pt x="3024813" y="378388"/>
+                  </a:lnTo>
+                  <a:lnTo>
+                    <a:pt x="3095157" y="381926"/>
+                  </a:lnTo>
+                  <a:lnTo>
+                    <a:pt x="3165502" y="382545"/>
+                  </a:lnTo>
+                  <a:lnTo>
+                    <a:pt x="3235846" y="383163"/>
+                  </a:lnTo>
+                  <a:lnTo>
+                    <a:pt x="3306191" y="383779"/>
+                  </a:lnTo>
+                  <a:lnTo>
+                    <a:pt x="3376535" y="384394"/>
+                  </a:lnTo>
+                  <a:lnTo>
+                    <a:pt x="3446880" y="385008"/>
+                  </a:lnTo>
+                  <a:lnTo>
+                    <a:pt x="3517224" y="385621"/>
+                  </a:lnTo>
+                  <a:lnTo>
+                    <a:pt x="3587569" y="386232"/>
+                  </a:lnTo>
+                  <a:lnTo>
+                    <a:pt x="3657913" y="386842"/>
+                  </a:lnTo>
+                  <a:lnTo>
+                    <a:pt x="3728257" y="387451"/>
+                  </a:lnTo>
+                  <a:lnTo>
+                    <a:pt x="3798602" y="388058"/>
+                  </a:lnTo>
+                  <a:lnTo>
+                    <a:pt x="3868946" y="388665"/>
+                  </a:lnTo>
+                  <a:lnTo>
+                    <a:pt x="3939291" y="389270"/>
+                  </a:lnTo>
+                  <a:lnTo>
+                    <a:pt x="4009635" y="389873"/>
+                  </a:lnTo>
+                  <a:lnTo>
+                    <a:pt x="4079980" y="390476"/>
+                  </a:lnTo>
+                  <a:lnTo>
+                    <a:pt x="4150324" y="391077"/>
+                  </a:lnTo>
+                  <a:lnTo>
+                    <a:pt x="4220669" y="391677"/>
+                  </a:lnTo>
+                  <a:lnTo>
+                    <a:pt x="4291013" y="392276"/>
+                  </a:lnTo>
+                  <a:lnTo>
+                    <a:pt x="4361358" y="392873"/>
+                  </a:lnTo>
+                  <a:lnTo>
+                    <a:pt x="4431702" y="393470"/>
+                  </a:lnTo>
+                  <a:lnTo>
+                    <a:pt x="4502047" y="394065"/>
+                  </a:lnTo>
+                  <a:lnTo>
+                    <a:pt x="4572391" y="394659"/>
+                  </a:lnTo>
+                  <a:lnTo>
+                    <a:pt x="4642736" y="395251"/>
+                  </a:lnTo>
+                  <a:lnTo>
+                    <a:pt x="4713080" y="395843"/>
+                  </a:lnTo>
+                  <a:lnTo>
+                    <a:pt x="4783425" y="396433"/>
+                  </a:lnTo>
+                  <a:lnTo>
+                    <a:pt x="4853769" y="397022"/>
+                  </a:lnTo>
+                  <a:lnTo>
+                    <a:pt x="4924114" y="397609"/>
+                  </a:lnTo>
+                  <a:lnTo>
+                    <a:pt x="4994458" y="398196"/>
+                  </a:lnTo>
+                  <a:lnTo>
+                    <a:pt x="5064803" y="398781"/>
+                  </a:lnTo>
+                  <a:lnTo>
+                    <a:pt x="5135147" y="399365"/>
+                  </a:lnTo>
+                  <a:lnTo>
+                    <a:pt x="5205492" y="399948"/>
+                  </a:lnTo>
+                  <a:lnTo>
+                    <a:pt x="5275836" y="400530"/>
+                  </a:lnTo>
+                  <a:lnTo>
+                    <a:pt x="5346181" y="401110"/>
+                  </a:lnTo>
+                  <a:lnTo>
+                    <a:pt x="5416525" y="401690"/>
+                  </a:lnTo>
+                  <a:lnTo>
+                    <a:pt x="5486870" y="402268"/>
+                  </a:lnTo>
+                  <a:lnTo>
+                    <a:pt x="5557214" y="402844"/>
+                  </a:lnTo>
+                  <a:lnTo>
+                    <a:pt x="5627559" y="403420"/>
+                  </a:lnTo>
+                  <a:lnTo>
+                    <a:pt x="5697903" y="403995"/>
+                  </a:lnTo>
+                  <a:lnTo>
+                    <a:pt x="5768248" y="404568"/>
+                  </a:lnTo>
+                  <a:lnTo>
+                    <a:pt x="5838592" y="405140"/>
+                  </a:lnTo>
+                  <a:lnTo>
+                    <a:pt x="5908937" y="405711"/>
+                  </a:lnTo>
+                  <a:lnTo>
+                    <a:pt x="5979281" y="406281"/>
+                  </a:lnTo>
+                  <a:lnTo>
+                    <a:pt x="6049626" y="406849"/>
+                  </a:lnTo>
+                  <a:lnTo>
+                    <a:pt x="6119970" y="407417"/>
+                  </a:lnTo>
+                  <a:lnTo>
+                    <a:pt x="6190315" y="407983"/>
+                  </a:lnTo>
+                  <a:lnTo>
+                    <a:pt x="6260659" y="408548"/>
+                  </a:lnTo>
+                  <a:lnTo>
+                    <a:pt x="6331004" y="409112"/>
+                  </a:lnTo>
+                  <a:lnTo>
+                    <a:pt x="6401348" y="409674"/>
+                  </a:lnTo>
+                  <a:lnTo>
+                    <a:pt x="6471693" y="410236"/>
+                  </a:lnTo>
+                  <a:lnTo>
+                    <a:pt x="6542037" y="410796"/>
+                  </a:lnTo>
+                  <a:lnTo>
+                    <a:pt x="6612382" y="411355"/>
+                  </a:lnTo>
+                  <a:lnTo>
+                    <a:pt x="6682726" y="411914"/>
+                  </a:lnTo>
+                  <a:lnTo>
+                    <a:pt x="6753071" y="412470"/>
+                  </a:lnTo>
+                  <a:lnTo>
+                    <a:pt x="6823415" y="413026"/>
+                  </a:lnTo>
+                  <a:lnTo>
+                    <a:pt x="6893760" y="413581"/>
+                  </a:lnTo>
+                  <a:lnTo>
+                    <a:pt x="6964104" y="414134"/>
+                  </a:lnTo>
+                </a:path>
+              </a:pathLst>
+            </a:custGeom>
+          </p:spPr>
+          <p:txBody>
+            <a:bodyPr/>
+            <a:lstStyle/>
+            <a:p/>
+          </p:txBody>
+        </p:sp>
+        <p:sp>
+          <p:nvSpPr>
+            <p:cNvPr id="73" name="pl73"/>
+            <p:cNvSpPr/>
+            <p:nvPr/>
+          </p:nvSpPr>
+          <p:spPr>
+            <a:xfrm>
+              <a:off x="1235312" y="5266071"/>
+              <a:ext cx="6964104" cy="222389"/>
+            </a:xfrm>
+            <a:custGeom>
+              <a:avLst/>
+              <a:pathLst>
+                <a:path w="6964104" h="222389">
+                  <a:moveTo>
+                    <a:pt x="6964104" y="222389"/>
+                  </a:moveTo>
+                  <a:lnTo>
+                    <a:pt x="6893760" y="220385"/>
+                  </a:lnTo>
+                  <a:lnTo>
+                    <a:pt x="6823415" y="218344"/>
+                  </a:lnTo>
+                  <a:lnTo>
+                    <a:pt x="6753071" y="216263"/>
+                  </a:lnTo>
+                  <a:lnTo>
+                    <a:pt x="6682726" y="214142"/>
+                  </a:lnTo>
+                  <a:lnTo>
+                    <a:pt x="6612382" y="211982"/>
+                  </a:lnTo>
+                  <a:lnTo>
+                    <a:pt x="6542037" y="209780"/>
+                  </a:lnTo>
+                  <a:lnTo>
+                    <a:pt x="6471693" y="207536"/>
+                  </a:lnTo>
+                  <a:lnTo>
+                    <a:pt x="6401348" y="205249"/>
+                  </a:lnTo>
+                  <a:lnTo>
+                    <a:pt x="6331004" y="202919"/>
+                  </a:lnTo>
+                  <a:lnTo>
+                    <a:pt x="6260659" y="200545"/>
+                  </a:lnTo>
+                  <a:lnTo>
+                    <a:pt x="6190315" y="198125"/>
+                  </a:lnTo>
+                  <a:lnTo>
+                    <a:pt x="6119970" y="195659"/>
+                  </a:lnTo>
+                  <a:lnTo>
+                    <a:pt x="6049626" y="193147"/>
+                  </a:lnTo>
+                  <a:lnTo>
+                    <a:pt x="5979281" y="190586"/>
+                  </a:lnTo>
+                  <a:lnTo>
+                    <a:pt x="5908937" y="187977"/>
+                  </a:lnTo>
+                  <a:lnTo>
+                    <a:pt x="5838592" y="185318"/>
+                  </a:lnTo>
+                  <a:lnTo>
+                    <a:pt x="5768248" y="182608"/>
+                  </a:lnTo>
+                  <a:lnTo>
+                    <a:pt x="5697903" y="179847"/>
+                  </a:lnTo>
+                  <a:lnTo>
+                    <a:pt x="5627559" y="177033"/>
+                  </a:lnTo>
+                  <a:lnTo>
+                    <a:pt x="5557214" y="174165"/>
+                  </a:lnTo>
+                  <a:lnTo>
+                    <a:pt x="5486870" y="171243"/>
+                  </a:lnTo>
+                  <a:lnTo>
+                    <a:pt x="5416525" y="168266"/>
+                  </a:lnTo>
+                  <a:lnTo>
+                    <a:pt x="5346181" y="165231"/>
+                  </a:lnTo>
+                  <a:lnTo>
+                    <a:pt x="5275836" y="162139"/>
+                  </a:lnTo>
+                  <a:lnTo>
+                    <a:pt x="5205492" y="158988"/>
+                  </a:lnTo>
+                  <a:lnTo>
+                    <a:pt x="5135147" y="155777"/>
+                  </a:lnTo>
+                  <a:lnTo>
+                    <a:pt x="5064803" y="152505"/>
+                  </a:lnTo>
+                  <a:lnTo>
+                    <a:pt x="4994458" y="149171"/>
+                  </a:lnTo>
+                  <a:lnTo>
+                    <a:pt x="4924114" y="145773"/>
+                  </a:lnTo>
+                  <a:lnTo>
+                    <a:pt x="4853769" y="142310"/>
+                  </a:lnTo>
+                  <a:lnTo>
+                    <a:pt x="4783425" y="138781"/>
+                  </a:lnTo>
+                  <a:lnTo>
+                    <a:pt x="4713080" y="135186"/>
+                  </a:lnTo>
+                  <a:lnTo>
+                    <a:pt x="4642736" y="131521"/>
+                  </a:lnTo>
+                  <a:lnTo>
+                    <a:pt x="4572391" y="127787"/>
+                  </a:lnTo>
+                  <a:lnTo>
+                    <a:pt x="4502047" y="123982"/>
+                  </a:lnTo>
+                  <a:lnTo>
+                    <a:pt x="4431702" y="120105"/>
+                  </a:lnTo>
+                  <a:lnTo>
+                    <a:pt x="4361358" y="116153"/>
+                  </a:lnTo>
+                  <a:lnTo>
+                    <a:pt x="4291013" y="112126"/>
+                  </a:lnTo>
+                  <a:lnTo>
+                    <a:pt x="4220669" y="108023"/>
+                  </a:lnTo>
+                  <a:lnTo>
+                    <a:pt x="4150324" y="103842"/>
+                  </a:lnTo>
+                  <a:lnTo>
+                    <a:pt x="4079980" y="99580"/>
+                  </a:lnTo>
+                  <a:lnTo>
+                    <a:pt x="4009635" y="95238"/>
+                  </a:lnTo>
+                  <a:lnTo>
+                    <a:pt x="3939291" y="90813"/>
+                  </a:lnTo>
+                  <a:lnTo>
+                    <a:pt x="3868946" y="86304"/>
+                  </a:lnTo>
+                  <a:lnTo>
+                    <a:pt x="3798602" y="81709"/>
+                  </a:lnTo>
+                  <a:lnTo>
+                    <a:pt x="3728257" y="77026"/>
+                  </a:lnTo>
+                  <a:lnTo>
+                    <a:pt x="3657913" y="72254"/>
+                  </a:lnTo>
+                  <a:lnTo>
+                    <a:pt x="3587569" y="67392"/>
+                  </a:lnTo>
+                  <a:lnTo>
+                    <a:pt x="3517224" y="62437"/>
+                  </a:lnTo>
+                  <a:lnTo>
+                    <a:pt x="3446880" y="57387"/>
+                  </a:lnTo>
+                  <a:lnTo>
+                    <a:pt x="3376535" y="52241"/>
+                  </a:lnTo>
+                  <a:lnTo>
+                    <a:pt x="3306191" y="46998"/>
+                  </a:lnTo>
+                  <a:lnTo>
+                    <a:pt x="3235846" y="41654"/>
+                  </a:lnTo>
+                  <a:lnTo>
+                    <a:pt x="3165502" y="36209"/>
+                  </a:lnTo>
+                  <a:lnTo>
+                    <a:pt x="3095157" y="30660"/>
+                  </a:lnTo>
+                  <a:lnTo>
+                    <a:pt x="3024813" y="27923"/>
+                  </a:lnTo>
+                  <a:lnTo>
+                    <a:pt x="2954468" y="27301"/>
+                  </a:lnTo>
+                  <a:lnTo>
+                    <a:pt x="2884124" y="26678"/>
+                  </a:lnTo>
+                  <a:lnTo>
+                    <a:pt x="2813779" y="26054"/>
+                  </a:lnTo>
+                  <a:lnTo>
+                    <a:pt x="2743435" y="25429"/>
+                  </a:lnTo>
+                  <a:lnTo>
+                    <a:pt x="2673090" y="24802"/>
+                  </a:lnTo>
+                  <a:lnTo>
+                    <a:pt x="2602746" y="24174"/>
+                  </a:lnTo>
+                  <a:lnTo>
+                    <a:pt x="2532401" y="23545"/>
+                  </a:lnTo>
+                  <a:lnTo>
+                    <a:pt x="2462057" y="22914"/>
+                  </a:lnTo>
+                  <a:lnTo>
+                    <a:pt x="2391712" y="22282"/>
+                  </a:lnTo>
+                  <a:lnTo>
+                    <a:pt x="2321368" y="21649"/>
+                  </a:lnTo>
+                  <a:lnTo>
+                    <a:pt x="2251023" y="21015"/>
+                  </a:lnTo>
+                  <a:lnTo>
+                    <a:pt x="2180679" y="20379"/>
+                  </a:lnTo>
+                  <a:lnTo>
+                    <a:pt x="2110334" y="19742"/>
+                  </a:lnTo>
+                  <a:lnTo>
+                    <a:pt x="2039990" y="19103"/>
+                  </a:lnTo>
+                  <a:lnTo>
+                    <a:pt x="1969645" y="18463"/>
+                  </a:lnTo>
+                  <a:lnTo>
+                    <a:pt x="1899301" y="17822"/>
+                  </a:lnTo>
+                  <a:lnTo>
+                    <a:pt x="1828956" y="17180"/>
+                  </a:lnTo>
+                  <a:lnTo>
+                    <a:pt x="1758612" y="16536"/>
+                  </a:lnTo>
+                  <a:lnTo>
+                    <a:pt x="1688267" y="15891"/>
+                  </a:lnTo>
+                  <a:lnTo>
+                    <a:pt x="1617923" y="15244"/>
+                  </a:lnTo>
+                  <a:lnTo>
+                    <a:pt x="1547578" y="14596"/>
+                  </a:lnTo>
+                  <a:lnTo>
+                    <a:pt x="1477234" y="13947"/>
+                  </a:lnTo>
+                  <a:lnTo>
+                    <a:pt x="1406889" y="13297"/>
+                  </a:lnTo>
+                  <a:lnTo>
+                    <a:pt x="1336545" y="12645"/>
+                  </a:lnTo>
+                  <a:lnTo>
+                    <a:pt x="1266200" y="11992"/>
+                  </a:lnTo>
+                  <a:lnTo>
+                    <a:pt x="1195856" y="11337"/>
+                  </a:lnTo>
+                  <a:lnTo>
+                    <a:pt x="1125511" y="10681"/>
+                  </a:lnTo>
+                  <a:lnTo>
+                    <a:pt x="1055167" y="10024"/>
+                  </a:lnTo>
+                  <a:lnTo>
+                    <a:pt x="984822" y="9365"/>
+                  </a:lnTo>
+                  <a:lnTo>
+                    <a:pt x="914478" y="8705"/>
+                  </a:lnTo>
+                  <a:lnTo>
+                    <a:pt x="844133" y="8044"/>
+                  </a:lnTo>
+                  <a:lnTo>
+                    <a:pt x="773789" y="7381"/>
+                  </a:lnTo>
+                  <a:lnTo>
+                    <a:pt x="703444" y="6717"/>
+                  </a:lnTo>
+                  <a:lnTo>
+                    <a:pt x="633100" y="6051"/>
+                  </a:lnTo>
+                  <a:lnTo>
+                    <a:pt x="562755" y="5385"/>
+                  </a:lnTo>
+                  <a:lnTo>
+                    <a:pt x="492411" y="4716"/>
+                  </a:lnTo>
+                  <a:lnTo>
+                    <a:pt x="422066" y="4047"/>
+                  </a:lnTo>
+                  <a:lnTo>
+                    <a:pt x="351722" y="3376"/>
+                  </a:lnTo>
+                  <a:lnTo>
+                    <a:pt x="281377" y="2703"/>
+                  </a:lnTo>
+                  <a:lnTo>
+                    <a:pt x="211033" y="2029"/>
+                  </a:lnTo>
+                  <a:lnTo>
+                    <a:pt x="140688" y="1354"/>
+                  </a:lnTo>
+                  <a:lnTo>
+                    <a:pt x="70344" y="678"/>
+                  </a:lnTo>
+                  <a:lnTo>
+                    <a:pt x="0" y="0"/>
+                  </a:lnTo>
+                </a:path>
+              </a:pathLst>
+            </a:custGeom>
+          </p:spPr>
+          <p:txBody>
+            <a:bodyPr/>
+            <a:lstStyle/>
+            <a:p/>
+          </p:txBody>
+        </p:sp>
+        <p:sp>
+          <p:nvSpPr>
+            <p:cNvPr id="74" name="pl74"/>
+            <p:cNvSpPr/>
+            <p:nvPr/>
+          </p:nvSpPr>
+          <p:spPr>
+            <a:xfrm>
+              <a:off x="1235312" y="5121346"/>
+              <a:ext cx="6964104" cy="304766"/>
+            </a:xfrm>
+            <a:custGeom>
+              <a:avLst/>
+              <a:pathLst>
+                <a:path w="6964104" h="304766">
+                  <a:moveTo>
+                    <a:pt x="0" y="0"/>
+                  </a:moveTo>
+                  <a:lnTo>
+                    <a:pt x="70344" y="4918"/>
+                  </a:lnTo>
+                  <a:lnTo>
+                    <a:pt x="140688" y="9785"/>
+                  </a:lnTo>
+                  <a:lnTo>
+                    <a:pt x="211033" y="14602"/>
+                  </a:lnTo>
+                  <a:lnTo>
+                    <a:pt x="281377" y="19368"/>
+                  </a:lnTo>
+                  <a:lnTo>
+                    <a:pt x="351722" y="24085"/>
+                  </a:lnTo>
+                  <a:lnTo>
+                    <a:pt x="422066" y="28752"/>
+                  </a:lnTo>
+                  <a:lnTo>
+                    <a:pt x="492411" y="33371"/>
+                  </a:lnTo>
+                  <a:lnTo>
+                    <a:pt x="562755" y="37942"/>
+                  </a:lnTo>
+                  <a:lnTo>
+                    <a:pt x="633100" y="42466"/>
+                  </a:lnTo>
+                  <a:lnTo>
+                    <a:pt x="703444" y="46942"/>
+                  </a:lnTo>
+                  <a:lnTo>
+                    <a:pt x="773789" y="51371"/>
+                  </a:lnTo>
+                  <a:lnTo>
+                    <a:pt x="844133" y="55755"/>
+                  </a:lnTo>
+                  <a:lnTo>
+                    <a:pt x="914478" y="60093"/>
+                  </a:lnTo>
+                  <a:lnTo>
+                    <a:pt x="984822" y="64385"/>
+                  </a:lnTo>
+                  <a:lnTo>
+                    <a:pt x="1055167" y="68633"/>
+                  </a:lnTo>
+                  <a:lnTo>
+                    <a:pt x="1125511" y="72837"/>
+                  </a:lnTo>
+                  <a:lnTo>
+                    <a:pt x="1195856" y="76997"/>
+                  </a:lnTo>
+                  <a:lnTo>
+                    <a:pt x="1266200" y="81114"/>
+                  </a:lnTo>
+                  <a:lnTo>
+                    <a:pt x="1336545" y="85188"/>
+                  </a:lnTo>
+                  <a:lnTo>
+                    <a:pt x="1406889" y="89219"/>
+                  </a:lnTo>
+                  <a:lnTo>
+                    <a:pt x="1477234" y="93208"/>
+                  </a:lnTo>
+                  <a:lnTo>
+                    <a:pt x="1547578" y="97156"/>
+                  </a:lnTo>
+                  <a:lnTo>
+                    <a:pt x="1617923" y="101063"/>
+                  </a:lnTo>
+                  <a:lnTo>
+                    <a:pt x="1688267" y="104929"/>
+                  </a:lnTo>
+                  <a:lnTo>
+                    <a:pt x="1758612" y="108755"/>
+                  </a:lnTo>
+                  <a:lnTo>
+                    <a:pt x="1828956" y="112541"/>
+                  </a:lnTo>
+                  <a:lnTo>
+                    <a:pt x="1899301" y="116287"/>
+                  </a:lnTo>
+                  <a:lnTo>
+                    <a:pt x="1969645" y="119995"/>
+                  </a:lnTo>
+                  <a:lnTo>
+                    <a:pt x="2039990" y="123664"/>
+                  </a:lnTo>
+                  <a:lnTo>
+                    <a:pt x="2110334" y="127294"/>
+                  </a:lnTo>
+                  <a:lnTo>
+                    <a:pt x="2180679" y="130887"/>
+                  </a:lnTo>
+                  <a:lnTo>
+                    <a:pt x="2251023" y="134443"/>
+                  </a:lnTo>
+                  <a:lnTo>
+                    <a:pt x="2321368" y="137961"/>
+                  </a:lnTo>
+                  <a:lnTo>
+                    <a:pt x="2391712" y="141443"/>
+                  </a:lnTo>
+                  <a:lnTo>
+                    <a:pt x="2462057" y="144889"/>
+                  </a:lnTo>
+                  <a:lnTo>
+                    <a:pt x="2532401" y="148298"/>
+                  </a:lnTo>
+                  <a:lnTo>
+                    <a:pt x="2602746" y="151673"/>
+                  </a:lnTo>
+                  <a:lnTo>
+                    <a:pt x="2673090" y="155012"/>
+                  </a:lnTo>
+                  <a:lnTo>
+                    <a:pt x="2743435" y="158316"/>
+                  </a:lnTo>
+                  <a:lnTo>
+                    <a:pt x="2813779" y="161586"/>
+                  </a:lnTo>
+                  <a:lnTo>
+                    <a:pt x="2884124" y="164822"/>
+                  </a:lnTo>
+                  <a:lnTo>
+                    <a:pt x="2954468" y="168024"/>
+                  </a:lnTo>
+                  <a:lnTo>
+                    <a:pt x="3024813" y="171193"/>
+                  </a:lnTo>
+                  <a:lnTo>
+                    <a:pt x="3095157" y="174328"/>
+                  </a:lnTo>
+                  <a:lnTo>
+                    <a:pt x="3165502" y="177432"/>
+                  </a:lnTo>
+                  <a:lnTo>
+                    <a:pt x="3235846" y="180502"/>
+                  </a:lnTo>
+                  <a:lnTo>
+                    <a:pt x="3306191" y="183541"/>
+                  </a:lnTo>
+                  <a:lnTo>
+                    <a:pt x="3376535" y="186548"/>
+                  </a:lnTo>
+                  <a:lnTo>
+                    <a:pt x="3446880" y="189524"/>
+                  </a:lnTo>
+                  <a:lnTo>
+                    <a:pt x="3517224" y="192469"/>
+                  </a:lnTo>
+                  <a:lnTo>
+                    <a:pt x="3587569" y="195384"/>
+                  </a:lnTo>
+                  <a:lnTo>
+                    <a:pt x="3657913" y="198267"/>
+                  </a:lnTo>
+                  <a:lnTo>
+                    <a:pt x="3728257" y="201121"/>
+                  </a:lnTo>
+                  <a:lnTo>
+                    <a:pt x="3798602" y="203945"/>
+                  </a:lnTo>
+                  <a:lnTo>
+                    <a:pt x="3868946" y="206740"/>
+                  </a:lnTo>
+                  <a:lnTo>
+                    <a:pt x="3939291" y="209506"/>
+                  </a:lnTo>
+                  <a:lnTo>
+                    <a:pt x="4009635" y="212243"/>
+                  </a:lnTo>
+                  <a:lnTo>
+                    <a:pt x="4079980" y="214951"/>
+                  </a:lnTo>
+                  <a:lnTo>
+                    <a:pt x="4150324" y="217631"/>
+                  </a:lnTo>
+                  <a:lnTo>
+                    <a:pt x="4220669" y="220283"/>
+                  </a:lnTo>
+                  <a:lnTo>
+                    <a:pt x="4291013" y="222908"/>
+                  </a:lnTo>
+                  <a:lnTo>
+                    <a:pt x="4361358" y="225505"/>
+                  </a:lnTo>
+                  <a:lnTo>
+                    <a:pt x="4431702" y="228076"/>
+                  </a:lnTo>
+                  <a:lnTo>
+                    <a:pt x="4502047" y="230619"/>
+                  </a:lnTo>
+                  <a:lnTo>
+                    <a:pt x="4572391" y="233136"/>
+                  </a:lnTo>
+                  <a:lnTo>
+                    <a:pt x="4642736" y="235627"/>
+                  </a:lnTo>
+                  <a:lnTo>
+                    <a:pt x="4713080" y="238092"/>
+                  </a:lnTo>
+                  <a:lnTo>
+                    <a:pt x="4783425" y="240531"/>
+                  </a:lnTo>
+                  <a:lnTo>
+                    <a:pt x="4853769" y="242945"/>
+                  </a:lnTo>
+                  <a:lnTo>
+                    <a:pt x="4924114" y="245333"/>
+                  </a:lnTo>
+                  <a:lnTo>
+                    <a:pt x="4994458" y="247697"/>
+                  </a:lnTo>
+                  <a:lnTo>
+                    <a:pt x="5064803" y="250036"/>
+                  </a:lnTo>
+                  <a:lnTo>
+                    <a:pt x="5135147" y="252351"/>
+                  </a:lnTo>
+                  <a:lnTo>
+                    <a:pt x="5205492" y="254642"/>
+                  </a:lnTo>
+                  <a:lnTo>
+                    <a:pt x="5275836" y="256909"/>
+                  </a:lnTo>
+                  <a:lnTo>
+                    <a:pt x="5346181" y="259152"/>
+                  </a:lnTo>
+                  <a:lnTo>
+                    <a:pt x="5416525" y="261372"/>
+                  </a:lnTo>
+                  <a:lnTo>
+                    <a:pt x="5486870" y="263569"/>
+                  </a:lnTo>
+                  <a:lnTo>
+                    <a:pt x="5557214" y="265743"/>
+                  </a:lnTo>
+                  <a:lnTo>
+                    <a:pt x="5627559" y="267894"/>
+                  </a:lnTo>
+                  <a:lnTo>
+                    <a:pt x="5697903" y="270023"/>
+                  </a:lnTo>
+                  <a:lnTo>
+                    <a:pt x="5768248" y="272129"/>
+                  </a:lnTo>
+                  <a:lnTo>
+                    <a:pt x="5838592" y="274214"/>
+                  </a:lnTo>
+                  <a:lnTo>
+                    <a:pt x="5908937" y="276277"/>
+                  </a:lnTo>
+                  <a:lnTo>
+                    <a:pt x="5979281" y="278319"/>
+                  </a:lnTo>
+                  <a:lnTo>
+                    <a:pt x="6049626" y="280339"/>
+                  </a:lnTo>
+                  <a:lnTo>
+                    <a:pt x="6119970" y="282338"/>
+                  </a:lnTo>
+                  <a:lnTo>
+                    <a:pt x="6190315" y="284317"/>
+                  </a:lnTo>
+                  <a:lnTo>
+                    <a:pt x="6260659" y="286275"/>
+                  </a:lnTo>
+                  <a:lnTo>
+                    <a:pt x="6331004" y="288212"/>
+                  </a:lnTo>
+                  <a:lnTo>
+                    <a:pt x="6401348" y="290130"/>
+                  </a:lnTo>
+                  <a:lnTo>
+                    <a:pt x="6471693" y="292027"/>
+                  </a:lnTo>
+                  <a:lnTo>
+                    <a:pt x="6542037" y="293904"/>
+                  </a:lnTo>
+                  <a:lnTo>
+                    <a:pt x="6612382" y="295762"/>
+                  </a:lnTo>
+                  <a:lnTo>
+                    <a:pt x="6682726" y="297601"/>
+                  </a:lnTo>
+                  <a:lnTo>
+                    <a:pt x="6753071" y="299421"/>
+                  </a:lnTo>
+                  <a:lnTo>
+                    <a:pt x="6823415" y="301221"/>
+                  </a:lnTo>
+                  <a:lnTo>
+                    <a:pt x="6893760" y="303003"/>
+                  </a:lnTo>
+                  <a:lnTo>
+                    <a:pt x="6964104" y="304766"/>
+                  </a:lnTo>
+                </a:path>
+              </a:pathLst>
+            </a:custGeom>
+            <a:ln w="27101" cap="flat">
+              <a:solidFill>
+                <a:srgbClr val="FF8C00">
+                  <a:alpha val="100000"/>
+                </a:srgbClr>
+              </a:solidFill>
+              <a:prstDash val="solid"/>
+              <a:round/>
+            </a:ln>
+          </p:spPr>
+          <p:txBody>
+            <a:bodyPr/>
+            <a:lstStyle/>
+            <a:p/>
+          </p:txBody>
+        </p:sp>
+        <p:sp>
+          <p:nvSpPr>
+            <p:cNvPr id="75" name="pl75"/>
+            <p:cNvSpPr/>
+            <p:nvPr/>
+          </p:nvSpPr>
+          <p:spPr>
+            <a:xfrm>
+              <a:off x="887106" y="5294352"/>
+              <a:ext cx="7660515" cy="0"/>
+            </a:xfrm>
+            <a:custGeom>
+              <a:avLst/>
+              <a:pathLst>
+                <a:path w="7660515" h="0">
+                  <a:moveTo>
+                    <a:pt x="0" y="0"/>
+                  </a:moveTo>
+                  <a:lnTo>
+                    <a:pt x="7660515" y="0"/>
+                  </a:lnTo>
+                  <a:lnTo>
+                    <a:pt x="7660515" y="0"/>
+                  </a:lnTo>
+                </a:path>
+              </a:pathLst>
+            </a:custGeom>
+            <a:ln w="13550" cap="flat">
+              <a:solidFill>
+                <a:srgbClr val="7F7F7F">
+                  <a:alpha val="100000"/>
+                </a:srgbClr>
+              </a:solidFill>
+              <a:prstDash val="dash"/>
+              <a:round/>
+            </a:ln>
+          </p:spPr>
+          <p:txBody>
+            <a:bodyPr/>
+            <a:lstStyle/>
+            <a:p/>
+          </p:txBody>
+        </p:sp>
+        <p:sp>
+          <p:nvSpPr>
+            <p:cNvPr id="76" name="pl76"/>
+            <p:cNvSpPr/>
+            <p:nvPr/>
+          </p:nvSpPr>
+          <p:spPr>
+            <a:xfrm>
+              <a:off x="4300713" y="4336484"/>
+              <a:ext cx="0" cy="1317069"/>
+            </a:xfrm>
+            <a:custGeom>
+              <a:avLst/>
+              <a:pathLst>
+                <a:path w="0" h="1317069">
+                  <a:moveTo>
+                    <a:pt x="0" y="1317069"/>
+                  </a:moveTo>
+                  <a:lnTo>
+                    <a:pt x="0" y="0"/>
+                  </a:lnTo>
+                  <a:lnTo>
+                    <a:pt x="0" y="0"/>
+                  </a:lnTo>
+                </a:path>
+              </a:pathLst>
+            </a:custGeom>
+            <a:ln w="13550" cap="flat">
+              <a:solidFill>
+                <a:srgbClr val="666666">
+                  <a:alpha val="100000"/>
+                </a:srgbClr>
+              </a:solidFill>
+              <a:prstDash val="dot"/>
+              <a:round/>
+            </a:ln>
+          </p:spPr>
+          <p:txBody>
+            <a:bodyPr/>
+            <a:lstStyle/>
+            <a:p/>
+          </p:txBody>
+        </p:sp>
+        <p:sp>
+          <p:nvSpPr>
+            <p:cNvPr id="77" name="pl77"/>
+            <p:cNvSpPr/>
+            <p:nvPr/>
+          </p:nvSpPr>
+          <p:spPr>
+            <a:xfrm>
+              <a:off x="3103710" y="4336484"/>
+              <a:ext cx="0" cy="1317069"/>
+            </a:xfrm>
+            <a:custGeom>
+              <a:avLst/>
+              <a:pathLst>
+                <a:path w="0" h="1317069">
+                  <a:moveTo>
+                    <a:pt x="0" y="1317069"/>
+                  </a:moveTo>
+                  <a:lnTo>
+                    <a:pt x="0" y="0"/>
+                  </a:lnTo>
+                  <a:lnTo>
+                    <a:pt x="0" y="0"/>
+                  </a:lnTo>
+                </a:path>
+              </a:pathLst>
+            </a:custGeom>
+            <a:ln w="13550" cap="flat">
+              <a:solidFill>
+                <a:srgbClr val="4682B4">
+                  <a:alpha val="69803"/>
+                </a:srgbClr>
+              </a:solidFill>
+              <a:prstDash val="dash"/>
+              <a:round/>
+            </a:ln>
+          </p:spPr>
+          <p:txBody>
+            <a:bodyPr/>
+            <a:lstStyle/>
+            <a:p/>
+          </p:txBody>
+        </p:sp>
+        <p:sp>
+          <p:nvSpPr>
+            <p:cNvPr id="78" name="pl78"/>
+            <p:cNvSpPr/>
+            <p:nvPr/>
+          </p:nvSpPr>
+          <p:spPr>
+            <a:xfrm>
+              <a:off x="5504283" y="4336484"/>
+              <a:ext cx="0" cy="1317069"/>
+            </a:xfrm>
+            <a:custGeom>
+              <a:avLst/>
+              <a:pathLst>
+                <a:path w="0" h="1317069">
+                  <a:moveTo>
+                    <a:pt x="0" y="1317069"/>
+                  </a:moveTo>
+                  <a:lnTo>
+                    <a:pt x="0" y="0"/>
+                  </a:lnTo>
+                  <a:lnTo>
+                    <a:pt x="0" y="0"/>
+                  </a:lnTo>
+                </a:path>
+              </a:pathLst>
+            </a:custGeom>
+            <a:ln w="13550" cap="flat">
+              <a:solidFill>
+                <a:srgbClr val="4682B4">
+                  <a:alpha val="69803"/>
+                </a:srgbClr>
+              </a:solidFill>
+              <a:prstDash val="dash"/>
+              <a:round/>
+            </a:ln>
+          </p:spPr>
+          <p:txBody>
+            <a:bodyPr/>
+            <a:lstStyle/>
+            <a:p/>
+          </p:txBody>
+        </p:sp>
+        <p:sp>
+          <p:nvSpPr>
+            <p:cNvPr id="79" name="tx79"/>
+            <p:cNvSpPr/>
+            <p:nvPr/>
+          </p:nvSpPr>
+          <p:spPr>
+            <a:xfrm>
+              <a:off x="762297" y="5553636"/>
+              <a:ext cx="62179" cy="80101"/>
+            </a:xfrm>
+            <a:prstGeom prst="rect">
+              <a:avLst/>
+            </a:prstGeom>
+            <a:noFill/>
+          </p:spPr>
+          <p:txBody>
+            <a:bodyPr lIns="0" rIns="0" tIns="0" bIns="0" anchorCtr="1" anchor="ctr" wrap="none"/>
+            <a:lstStyle/>
+            <a:p>
+              <a:pPr algn="l" marL="0" marR="0" indent="0">
+                <a:lnSpc>
+                  <a:spcPts val="880"/>
+                </a:lnSpc>
+                <a:spcBef>
+                  <a:spcPts val="0"/>
+                </a:spcBef>
+                <a:spcAft>
+                  <a:spcPts val="0"/>
+                </a:spcAft>
+              </a:pPr>
+              <a:r>
+                <a:rPr sz="880">
+                  <a:solidFill>
+                    <a:srgbClr val="4D4D4D">
+                      <a:alpha val="100000"/>
+                    </a:srgbClr>
+                  </a:solidFill>
+                  <a:latin typeface="Helvetica"/>
+                  <a:cs typeface="Helvetica"/>
+                </a:rPr>
+                <a:t>0</a:t>
+              </a:r>
+            </a:p>
+          </p:txBody>
+        </p:sp>
+        <p:sp>
+          <p:nvSpPr>
+            <p:cNvPr id="80" name="tx80"/>
+            <p:cNvSpPr/>
+            <p:nvPr/>
+          </p:nvSpPr>
+          <p:spPr>
+            <a:xfrm>
+              <a:off x="762297" y="5254302"/>
+              <a:ext cx="62179" cy="80101"/>
+            </a:xfrm>
+            <a:prstGeom prst="rect">
+              <a:avLst/>
+            </a:prstGeom>
+            <a:noFill/>
+          </p:spPr>
+          <p:txBody>
+            <a:bodyPr lIns="0" rIns="0" tIns="0" bIns="0" anchorCtr="1" anchor="ctr" wrap="none"/>
+            <a:lstStyle/>
+            <a:p>
+              <a:pPr algn="l" marL="0" marR="0" indent="0">
+                <a:lnSpc>
+                  <a:spcPts val="880"/>
+                </a:lnSpc>
+                <a:spcBef>
+                  <a:spcPts val="0"/>
+                </a:spcBef>
+                <a:spcAft>
+                  <a:spcPts val="0"/>
+                </a:spcAft>
+              </a:pPr>
+              <a:r>
+                <a:rPr sz="880">
+                  <a:solidFill>
+                    <a:srgbClr val="4D4D4D">
+                      <a:alpha val="100000"/>
+                    </a:srgbClr>
+                  </a:solidFill>
+                  <a:latin typeface="Helvetica"/>
+                  <a:cs typeface="Helvetica"/>
+                </a:rPr>
+                <a:t>1</a:t>
+              </a:r>
+            </a:p>
+          </p:txBody>
+        </p:sp>
+        <p:sp>
+          <p:nvSpPr>
+            <p:cNvPr id="81" name="tx81"/>
+            <p:cNvSpPr/>
+            <p:nvPr/>
+          </p:nvSpPr>
+          <p:spPr>
+            <a:xfrm>
+              <a:off x="762297" y="4954968"/>
+              <a:ext cx="62179" cy="80101"/>
+            </a:xfrm>
+            <a:prstGeom prst="rect">
+              <a:avLst/>
+            </a:prstGeom>
+            <a:noFill/>
+          </p:spPr>
+          <p:txBody>
+            <a:bodyPr lIns="0" rIns="0" tIns="0" bIns="0" anchorCtr="1" anchor="ctr" wrap="none"/>
+            <a:lstStyle/>
+            <a:p>
+              <a:pPr algn="l" marL="0" marR="0" indent="0">
+                <a:lnSpc>
+                  <a:spcPts val="880"/>
+                </a:lnSpc>
+                <a:spcBef>
+                  <a:spcPts val="0"/>
+                </a:spcBef>
+                <a:spcAft>
+                  <a:spcPts val="0"/>
+                </a:spcAft>
+              </a:pPr>
+              <a:r>
+                <a:rPr sz="880">
+                  <a:solidFill>
+                    <a:srgbClr val="4D4D4D">
+                      <a:alpha val="100000"/>
+                    </a:srgbClr>
+                  </a:solidFill>
+                  <a:latin typeface="Helvetica"/>
+                  <a:cs typeface="Helvetica"/>
+                </a:rPr>
+                <a:t>2</a:t>
+              </a:r>
+            </a:p>
+          </p:txBody>
+        </p:sp>
+        <p:sp>
+          <p:nvSpPr>
+            <p:cNvPr id="82" name="tx82"/>
+            <p:cNvSpPr/>
+            <p:nvPr/>
+          </p:nvSpPr>
+          <p:spPr>
+            <a:xfrm>
+              <a:off x="762297" y="4655634"/>
+              <a:ext cx="62179" cy="80101"/>
+            </a:xfrm>
+            <a:prstGeom prst="rect">
+              <a:avLst/>
+            </a:prstGeom>
+            <a:noFill/>
+          </p:spPr>
+          <p:txBody>
+            <a:bodyPr lIns="0" rIns="0" tIns="0" bIns="0" anchorCtr="1" anchor="ctr" wrap="none"/>
+            <a:lstStyle/>
+            <a:p>
+              <a:pPr algn="l" marL="0" marR="0" indent="0">
+                <a:lnSpc>
+                  <a:spcPts val="880"/>
+                </a:lnSpc>
+                <a:spcBef>
+                  <a:spcPts val="0"/>
+                </a:spcBef>
+                <a:spcAft>
+                  <a:spcPts val="0"/>
+                </a:spcAft>
+              </a:pPr>
+              <a:r>
+                <a:rPr sz="880">
+                  <a:solidFill>
+                    <a:srgbClr val="4D4D4D">
+                      <a:alpha val="100000"/>
+                    </a:srgbClr>
+                  </a:solidFill>
+                  <a:latin typeface="Helvetica"/>
+                  <a:cs typeface="Helvetica"/>
+                </a:rPr>
+                <a:t>3</a:t>
+              </a:r>
+            </a:p>
+          </p:txBody>
+        </p:sp>
+        <p:sp>
+          <p:nvSpPr>
+            <p:cNvPr id="83" name="tx83"/>
+            <p:cNvSpPr/>
+            <p:nvPr/>
+          </p:nvSpPr>
+          <p:spPr>
+            <a:xfrm>
+              <a:off x="762297" y="4356300"/>
+              <a:ext cx="62179" cy="80101"/>
+            </a:xfrm>
+            <a:prstGeom prst="rect">
+              <a:avLst/>
+            </a:prstGeom>
+            <a:noFill/>
+          </p:spPr>
+          <p:txBody>
+            <a:bodyPr lIns="0" rIns="0" tIns="0" bIns="0" anchorCtr="1" anchor="ctr" wrap="none"/>
+            <a:lstStyle/>
+            <a:p>
+              <a:pPr algn="l" marL="0" marR="0" indent="0">
+                <a:lnSpc>
+                  <a:spcPts val="880"/>
+                </a:lnSpc>
+                <a:spcBef>
+                  <a:spcPts val="0"/>
+                </a:spcBef>
+                <a:spcAft>
+                  <a:spcPts val="0"/>
+                </a:spcAft>
+              </a:pPr>
+              <a:r>
+                <a:rPr sz="880">
+                  <a:solidFill>
+                    <a:srgbClr val="4D4D4D">
+                      <a:alpha val="100000"/>
+                    </a:srgbClr>
+                  </a:solidFill>
+                  <a:latin typeface="Helvetica"/>
+                  <a:cs typeface="Helvetica"/>
+                </a:rPr>
+                <a:t>4</a:t>
+              </a:r>
+            </a:p>
+          </p:txBody>
+        </p:sp>
+        <p:sp>
+          <p:nvSpPr>
+            <p:cNvPr id="84" name="tx84"/>
+            <p:cNvSpPr/>
+            <p:nvPr/>
+          </p:nvSpPr>
+          <p:spPr>
+            <a:xfrm>
+              <a:off x="1324230" y="5716183"/>
+              <a:ext cx="161574" cy="80101"/>
+            </a:xfrm>
+            <a:prstGeom prst="rect">
+              <a:avLst/>
+            </a:prstGeom>
+            <a:noFill/>
+          </p:spPr>
+          <p:txBody>
+            <a:bodyPr lIns="0" rIns="0" tIns="0" bIns="0" anchorCtr="1" anchor="ctr" wrap="none"/>
+            <a:lstStyle/>
+            <a:p>
+              <a:pPr algn="l" marL="0" marR="0" indent="0">
+                <a:lnSpc>
+                  <a:spcPts val="880"/>
+                </a:lnSpc>
+                <a:spcBef>
+                  <a:spcPts val="0"/>
+                </a:spcBef>
+                <a:spcAft>
+                  <a:spcPts val="0"/>
+                </a:spcAft>
+              </a:pPr>
+              <a:r>
+                <a:rPr sz="880">
+                  <a:solidFill>
+                    <a:srgbClr val="4D4D4D">
+                      <a:alpha val="100000"/>
+                    </a:srgbClr>
+                  </a:solidFill>
+                  <a:latin typeface="Helvetica"/>
+                  <a:cs typeface="Helvetica"/>
+                </a:rPr>
+                <a:t>-50</a:t>
+              </a:r>
+            </a:p>
+          </p:txBody>
+        </p:sp>
+        <p:sp>
+          <p:nvSpPr>
+            <p:cNvPr id="85" name="tx85"/>
+            <p:cNvSpPr/>
+            <p:nvPr/>
+          </p:nvSpPr>
+          <p:spPr>
+            <a:xfrm>
+              <a:off x="2179256" y="5716183"/>
+              <a:ext cx="161574" cy="80101"/>
+            </a:xfrm>
+            <a:prstGeom prst="rect">
+              <a:avLst/>
+            </a:prstGeom>
+            <a:noFill/>
+          </p:spPr>
+          <p:txBody>
+            <a:bodyPr lIns="0" rIns="0" tIns="0" bIns="0" anchorCtr="1" anchor="ctr" wrap="none"/>
+            <a:lstStyle/>
+            <a:p>
+              <a:pPr algn="l" marL="0" marR="0" indent="0">
+                <a:lnSpc>
+                  <a:spcPts val="880"/>
+                </a:lnSpc>
+                <a:spcBef>
+                  <a:spcPts val="0"/>
+                </a:spcBef>
+                <a:spcAft>
+                  <a:spcPts val="0"/>
+                </a:spcAft>
+              </a:pPr>
+              <a:r>
+                <a:rPr sz="880">
+                  <a:solidFill>
+                    <a:srgbClr val="4D4D4D">
+                      <a:alpha val="100000"/>
+                    </a:srgbClr>
+                  </a:solidFill>
+                  <a:latin typeface="Helvetica"/>
+                  <a:cs typeface="Helvetica"/>
+                </a:rPr>
+                <a:t>-40</a:t>
+              </a:r>
+            </a:p>
+          </p:txBody>
+        </p:sp>
+        <p:sp>
+          <p:nvSpPr>
+            <p:cNvPr id="86" name="tx86"/>
+            <p:cNvSpPr/>
+            <p:nvPr/>
+          </p:nvSpPr>
+          <p:spPr>
+            <a:xfrm>
+              <a:off x="3034282" y="5716183"/>
+              <a:ext cx="161574" cy="80101"/>
+            </a:xfrm>
+            <a:prstGeom prst="rect">
+              <a:avLst/>
+            </a:prstGeom>
+            <a:noFill/>
+          </p:spPr>
+          <p:txBody>
+            <a:bodyPr lIns="0" rIns="0" tIns="0" bIns="0" anchorCtr="1" anchor="ctr" wrap="none"/>
+            <a:lstStyle/>
+            <a:p>
+              <a:pPr algn="l" marL="0" marR="0" indent="0">
+                <a:lnSpc>
+                  <a:spcPts val="880"/>
+                </a:lnSpc>
+                <a:spcBef>
+                  <a:spcPts val="0"/>
+                </a:spcBef>
+                <a:spcAft>
+                  <a:spcPts val="0"/>
+                </a:spcAft>
+              </a:pPr>
+              <a:r>
+                <a:rPr sz="880">
+                  <a:solidFill>
+                    <a:srgbClr val="4D4D4D">
+                      <a:alpha val="100000"/>
+                    </a:srgbClr>
+                  </a:solidFill>
+                  <a:latin typeface="Helvetica"/>
+                  <a:cs typeface="Helvetica"/>
+                </a:rPr>
+                <a:t>-30</a:t>
+              </a:r>
+            </a:p>
+          </p:txBody>
+        </p:sp>
+        <p:sp>
+          <p:nvSpPr>
+            <p:cNvPr id="87" name="tx87"/>
+            <p:cNvSpPr/>
+            <p:nvPr/>
+          </p:nvSpPr>
+          <p:spPr>
+            <a:xfrm>
+              <a:off x="3889308" y="5716183"/>
+              <a:ext cx="161574" cy="80101"/>
+            </a:xfrm>
+            <a:prstGeom prst="rect">
+              <a:avLst/>
+            </a:prstGeom>
+            <a:noFill/>
+          </p:spPr>
+          <p:txBody>
+            <a:bodyPr lIns="0" rIns="0" tIns="0" bIns="0" anchorCtr="1" anchor="ctr" wrap="none"/>
+            <a:lstStyle/>
+            <a:p>
+              <a:pPr algn="l" marL="0" marR="0" indent="0">
+                <a:lnSpc>
+                  <a:spcPts val="880"/>
+                </a:lnSpc>
+                <a:spcBef>
+                  <a:spcPts val="0"/>
+                </a:spcBef>
+                <a:spcAft>
+                  <a:spcPts val="0"/>
+                </a:spcAft>
+              </a:pPr>
+              <a:r>
+                <a:rPr sz="880">
+                  <a:solidFill>
+                    <a:srgbClr val="4D4D4D">
+                      <a:alpha val="100000"/>
+                    </a:srgbClr>
+                  </a:solidFill>
+                  <a:latin typeface="Helvetica"/>
+                  <a:cs typeface="Helvetica"/>
+                </a:rPr>
+                <a:t>-20</a:t>
+              </a:r>
+            </a:p>
+          </p:txBody>
+        </p:sp>
+        <p:sp>
+          <p:nvSpPr>
+            <p:cNvPr id="88" name="tx88"/>
+            <p:cNvSpPr/>
+            <p:nvPr/>
+          </p:nvSpPr>
+          <p:spPr>
+            <a:xfrm>
+              <a:off x="4744334" y="5716183"/>
+              <a:ext cx="161574" cy="80101"/>
+            </a:xfrm>
+            <a:prstGeom prst="rect">
+              <a:avLst/>
+            </a:prstGeom>
+            <a:noFill/>
+          </p:spPr>
+          <p:txBody>
+            <a:bodyPr lIns="0" rIns="0" tIns="0" bIns="0" anchorCtr="1" anchor="ctr" wrap="none"/>
+            <a:lstStyle/>
+            <a:p>
+              <a:pPr algn="l" marL="0" marR="0" indent="0">
+                <a:lnSpc>
+                  <a:spcPts val="880"/>
+                </a:lnSpc>
+                <a:spcBef>
+                  <a:spcPts val="0"/>
+                </a:spcBef>
+                <a:spcAft>
+                  <a:spcPts val="0"/>
+                </a:spcAft>
+              </a:pPr>
+              <a:r>
+                <a:rPr sz="880">
+                  <a:solidFill>
+                    <a:srgbClr val="4D4D4D">
+                      <a:alpha val="100000"/>
+                    </a:srgbClr>
+                  </a:solidFill>
+                  <a:latin typeface="Helvetica"/>
+                  <a:cs typeface="Helvetica"/>
+                </a:rPr>
+                <a:t>-10</a:t>
+              </a:r>
+            </a:p>
+          </p:txBody>
+        </p:sp>
+        <p:sp>
+          <p:nvSpPr>
+            <p:cNvPr id="89" name="tx89"/>
+            <p:cNvSpPr/>
+            <p:nvPr/>
+          </p:nvSpPr>
+          <p:spPr>
+            <a:xfrm>
+              <a:off x="5649057" y="5716183"/>
+              <a:ext cx="62179" cy="80101"/>
+            </a:xfrm>
+            <a:prstGeom prst="rect">
+              <a:avLst/>
+            </a:prstGeom>
+            <a:noFill/>
+          </p:spPr>
+          <p:txBody>
+            <a:bodyPr lIns="0" rIns="0" tIns="0" bIns="0" anchorCtr="1" anchor="ctr" wrap="none"/>
+            <a:lstStyle/>
+            <a:p>
+              <a:pPr algn="l" marL="0" marR="0" indent="0">
+                <a:lnSpc>
+                  <a:spcPts val="880"/>
+                </a:lnSpc>
+                <a:spcBef>
+                  <a:spcPts val="0"/>
+                </a:spcBef>
+                <a:spcAft>
+                  <a:spcPts val="0"/>
+                </a:spcAft>
+              </a:pPr>
+              <a:r>
+                <a:rPr sz="880">
+                  <a:solidFill>
+                    <a:srgbClr val="4D4D4D">
+                      <a:alpha val="100000"/>
+                    </a:srgbClr>
+                  </a:solidFill>
+                  <a:latin typeface="Helvetica"/>
+                  <a:cs typeface="Helvetica"/>
+                </a:rPr>
+                <a:t>0</a:t>
+              </a:r>
+            </a:p>
+          </p:txBody>
+        </p:sp>
+        <p:sp>
+          <p:nvSpPr>
+            <p:cNvPr id="90" name="tx90"/>
+            <p:cNvSpPr/>
+            <p:nvPr/>
+          </p:nvSpPr>
+          <p:spPr>
+            <a:xfrm>
+              <a:off x="6472994" y="5716183"/>
+              <a:ext cx="124358" cy="80101"/>
+            </a:xfrm>
+            <a:prstGeom prst="rect">
+              <a:avLst/>
+            </a:prstGeom>
+            <a:noFill/>
+          </p:spPr>
+          <p:txBody>
+            <a:bodyPr lIns="0" rIns="0" tIns="0" bIns="0" anchorCtr="1" anchor="ctr" wrap="none"/>
+            <a:lstStyle/>
+            <a:p>
+              <a:pPr algn="l" marL="0" marR="0" indent="0">
+                <a:lnSpc>
+                  <a:spcPts val="880"/>
+                </a:lnSpc>
+                <a:spcBef>
+                  <a:spcPts val="0"/>
+                </a:spcBef>
+                <a:spcAft>
+                  <a:spcPts val="0"/>
+                </a:spcAft>
+              </a:pPr>
+              <a:r>
+                <a:rPr sz="880">
+                  <a:solidFill>
+                    <a:srgbClr val="4D4D4D">
+                      <a:alpha val="100000"/>
+                    </a:srgbClr>
+                  </a:solidFill>
+                  <a:latin typeface="Helvetica"/>
+                  <a:cs typeface="Helvetica"/>
+                </a:rPr>
+                <a:t>10</a:t>
+              </a:r>
+            </a:p>
+          </p:txBody>
+        </p:sp>
+        <p:sp>
+          <p:nvSpPr>
+            <p:cNvPr id="91" name="tx91"/>
+            <p:cNvSpPr/>
+            <p:nvPr/>
+          </p:nvSpPr>
+          <p:spPr>
+            <a:xfrm>
+              <a:off x="7328020" y="5716183"/>
+              <a:ext cx="124358" cy="80101"/>
+            </a:xfrm>
+            <a:prstGeom prst="rect">
+              <a:avLst/>
+            </a:prstGeom>
+            <a:noFill/>
+          </p:spPr>
+          <p:txBody>
+            <a:bodyPr lIns="0" rIns="0" tIns="0" bIns="0" anchorCtr="1" anchor="ctr" wrap="none"/>
+            <a:lstStyle/>
+            <a:p>
+              <a:pPr algn="l" marL="0" marR="0" indent="0">
+                <a:lnSpc>
+                  <a:spcPts val="880"/>
+                </a:lnSpc>
+                <a:spcBef>
+                  <a:spcPts val="0"/>
+                </a:spcBef>
+                <a:spcAft>
+                  <a:spcPts val="0"/>
+                </a:spcAft>
+              </a:pPr>
+              <a:r>
+                <a:rPr sz="880">
+                  <a:solidFill>
+                    <a:srgbClr val="4D4D4D">
+                      <a:alpha val="100000"/>
+                    </a:srgbClr>
+                  </a:solidFill>
+                  <a:latin typeface="Helvetica"/>
+                  <a:cs typeface="Helvetica"/>
+                </a:rPr>
+                <a:t>20</a:t>
+              </a:r>
+            </a:p>
+          </p:txBody>
+        </p:sp>
+        <p:sp>
+          <p:nvSpPr>
+            <p:cNvPr id="92" name="tx92"/>
+            <p:cNvSpPr/>
+            <p:nvPr/>
+          </p:nvSpPr>
+          <p:spPr>
+            <a:xfrm>
+              <a:off x="8183046" y="5716183"/>
+              <a:ext cx="124358" cy="80101"/>
+            </a:xfrm>
+            <a:prstGeom prst="rect">
+              <a:avLst/>
+            </a:prstGeom>
+            <a:noFill/>
+          </p:spPr>
+          <p:txBody>
+            <a:bodyPr lIns="0" rIns="0" tIns="0" bIns="0" anchorCtr="1" anchor="ctr" wrap="none"/>
+            <a:lstStyle/>
+            <a:p>
+              <a:pPr algn="l" marL="0" marR="0" indent="0">
+                <a:lnSpc>
+                  <a:spcPts val="880"/>
+                </a:lnSpc>
+                <a:spcBef>
+                  <a:spcPts val="0"/>
+                </a:spcBef>
+                <a:spcAft>
+                  <a:spcPts val="0"/>
+                </a:spcAft>
+              </a:pPr>
+              <a:r>
+                <a:rPr sz="880">
+                  <a:solidFill>
+                    <a:srgbClr val="4D4D4D">
+                      <a:alpha val="100000"/>
+                    </a:srgbClr>
+                  </a:solidFill>
+                  <a:latin typeface="Helvetica"/>
+                  <a:cs typeface="Helvetica"/>
+                </a:rPr>
+                <a:t>30</a:t>
+              </a:r>
+            </a:p>
+          </p:txBody>
+        </p:sp>
+        <p:sp>
+          <p:nvSpPr>
+            <p:cNvPr id="93" name="tx93"/>
+            <p:cNvSpPr/>
+            <p:nvPr/>
+          </p:nvSpPr>
+          <p:spPr>
+            <a:xfrm>
+              <a:off x="1561815" y="5855859"/>
+              <a:ext cx="6311097" cy="100218"/>
+            </a:xfrm>
+            <a:prstGeom prst="rect">
+              <a:avLst/>
+            </a:prstGeom>
+            <a:noFill/>
+          </p:spPr>
+          <p:txBody>
+            <a:bodyPr lIns="0" rIns="0" tIns="0" bIns="0" anchorCtr="1" anchor="ctr" wrap="none"/>
+            <a:lstStyle/>
+            <a:p>
+              <a:pPr algn="l" marL="0" marR="0" indent="0">
+                <a:lnSpc>
+                  <a:spcPts val="1100"/>
+                </a:lnSpc>
+                <a:spcBef>
+                  <a:spcPts val="0"/>
+                </a:spcBef>
+                <a:spcAft>
+                  <a:spcPts val="0"/>
+                </a:spcAft>
+              </a:pPr>
+              <a:r>
+                <a:rPr sz="1100">
+                  <a:solidFill>
+                    <a:srgbClr val="000000">
+                      <a:alpha val="100000"/>
+                    </a:srgbClr>
+                  </a:solidFill>
+                  <a:latin typeface="Helvetica"/>
+                  <a:cs typeface="Helvetica"/>
+                </a:rPr>
+                <a:t>Sensitivity eGFR Difference (%): 100 × (CKD-EPI 2012 CysC − CKD-EPI 2021 Cr) / CKD-EPI 2021 Cr</a:t>
+              </a:r>
+            </a:p>
+          </p:txBody>
+        </p:sp>
+        <p:sp>
+          <p:nvSpPr>
+            <p:cNvPr id="94" name="tx94"/>
+            <p:cNvSpPr/>
+            <p:nvPr/>
+          </p:nvSpPr>
+          <p:spPr>
+            <a:xfrm rot="-5400000">
+              <a:off x="138035" y="4944909"/>
+              <a:ext cx="1016904" cy="100218"/>
+            </a:xfrm>
+            <a:prstGeom prst="rect">
+              <a:avLst/>
+            </a:prstGeom>
+            <a:noFill/>
+          </p:spPr>
+          <p:txBody>
+            <a:bodyPr lIns="0" rIns="0" tIns="0" bIns="0" anchorCtr="1" anchor="ctr" wrap="none"/>
+            <a:lstStyle/>
+            <a:p>
+              <a:pPr algn="l" marL="0" marR="0" indent="0">
+                <a:lnSpc>
+                  <a:spcPts val="1100"/>
+                </a:lnSpc>
+                <a:spcBef>
+                  <a:spcPts val="0"/>
+                </a:spcBef>
+                <a:spcAft>
+                  <a:spcPts val="0"/>
+                </a:spcAft>
+              </a:pPr>
+              <a:r>
+                <a:rPr sz="1100">
+                  <a:solidFill>
+                    <a:srgbClr val="000000">
+                      <a:alpha val="100000"/>
+                    </a:srgbClr>
+                  </a:solidFill>
+                  <a:latin typeface="Helvetica"/>
+                  <a:cs typeface="Helvetica"/>
+                </a:rPr>
+                <a:t>subHR (95% CI)</a:t>
+              </a:r>
+            </a:p>
+          </p:txBody>
+        </p:sp>
+        <p:sp>
+          <p:nvSpPr>
+            <p:cNvPr id="95" name="tx95"/>
+            <p:cNvSpPr/>
+            <p:nvPr/>
+          </p:nvSpPr>
+          <p:spPr>
+            <a:xfrm>
+              <a:off x="887106" y="4159544"/>
+              <a:ext cx="6959864" cy="82021"/>
+            </a:xfrm>
+            <a:prstGeom prst="rect">
+              <a:avLst/>
+            </a:prstGeom>
+            <a:noFill/>
+          </p:spPr>
+          <p:txBody>
+            <a:bodyPr lIns="0" rIns="0" tIns="0" bIns="0" anchorCtr="1" anchor="ctr" wrap="none"/>
+            <a:lstStyle/>
+            <a:p>
+              <a:pPr algn="l" marL="0" marR="0" indent="0">
+                <a:lnSpc>
+                  <a:spcPts val="900"/>
+                </a:lnSpc>
+                <a:spcBef>
+                  <a:spcPts val="0"/>
+                </a:spcBef>
+                <a:spcAft>
+                  <a:spcPts val="0"/>
+                </a:spcAft>
+              </a:pPr>
+              <a:r>
+                <a:rPr sz="900">
+                  <a:solidFill>
+                    <a:srgbClr val="404040">
+                      <a:alpha val="100000"/>
+                    </a:srgbClr>
+                  </a:solidFill>
+                  <a:latin typeface="Helvetica"/>
+                  <a:cs typeface="Helvetica"/>
+                </a:rPr>
+                <a:t>subHR per 10 % decline: 1.14 (1.03-1.26), p_Bonf = 0.087 (n = 6)  |  per IQR decline (Δ = 28.1 %): 1.43 (1.07-1.90)  |  IQR: [-30.1, -2.1] %</a:t>
+              </a:r>
+            </a:p>
+          </p:txBody>
+        </p:sp>
+        <p:sp>
+          <p:nvSpPr>
+            <p:cNvPr id="96" name="tx96"/>
+            <p:cNvSpPr/>
+            <p:nvPr/>
+          </p:nvSpPr>
+          <p:spPr>
+            <a:xfrm>
+              <a:off x="887106" y="3932770"/>
               <a:ext cx="4207154" cy="120152"/>
             </a:xfrm>
             <a:prstGeom prst="rect">
